--- a/3일차_실습2_latest.pptx
+++ b/3일차_실습2_latest.pptx
@@ -6,24 +6,25 @@
     <p:sldMasterId id="2147483650" r:id="rId2"/>
   </p:sldMasterIdLst>
   <p:notesMasterIdLst>
-    <p:notesMasterId r:id="rId18"/>
+    <p:notesMasterId r:id="rId19"/>
   </p:notesMasterIdLst>
   <p:sldIdLst>
     <p:sldId id="291" r:id="rId3"/>
-    <p:sldId id="257" r:id="rId4"/>
-    <p:sldId id="258" r:id="rId5"/>
-    <p:sldId id="259" r:id="rId6"/>
-    <p:sldId id="260" r:id="rId7"/>
-    <p:sldId id="262" r:id="rId8"/>
-    <p:sldId id="263" r:id="rId9"/>
-    <p:sldId id="264" r:id="rId10"/>
-    <p:sldId id="267" r:id="rId11"/>
-    <p:sldId id="268" r:id="rId12"/>
-    <p:sldId id="269" r:id="rId13"/>
-    <p:sldId id="271" r:id="rId14"/>
-    <p:sldId id="272" r:id="rId15"/>
-    <p:sldId id="273" r:id="rId16"/>
-    <p:sldId id="292" r:id="rId17"/>
+    <p:sldId id="293" r:id="rId4"/>
+    <p:sldId id="257" r:id="rId5"/>
+    <p:sldId id="258" r:id="rId6"/>
+    <p:sldId id="259" r:id="rId7"/>
+    <p:sldId id="260" r:id="rId8"/>
+    <p:sldId id="262" r:id="rId9"/>
+    <p:sldId id="263" r:id="rId10"/>
+    <p:sldId id="264" r:id="rId11"/>
+    <p:sldId id="267" r:id="rId12"/>
+    <p:sldId id="268" r:id="rId13"/>
+    <p:sldId id="269" r:id="rId14"/>
+    <p:sldId id="271" r:id="rId15"/>
+    <p:sldId id="272" r:id="rId16"/>
+    <p:sldId id="273" r:id="rId17"/>
+    <p:sldId id="292" r:id="rId18"/>
   </p:sldIdLst>
   <p:sldSz cx="12192000" cy="6858000"/>
   <p:notesSz cx="6858000" cy="12192000"/>
@@ -795,6 +796,90 @@
 </file>
 
 <file path=ppt/notesSlides/notesSlide15.xml><?xml version="1.0" encoding="utf-8"?>
+<p:notes xmlns:a="http://schemas.openxmlformats.org/drawingml/2006/main" xmlns:r="http://schemas.openxmlformats.org/officeDocument/2006/relationships" xmlns:p="http://schemas.openxmlformats.org/presentationml/2006/main">
+  <p:cSld>
+    <p:spTree>
+      <p:nvGrpSpPr>
+        <p:cNvPr id="1" name=""/>
+        <p:cNvGrpSpPr/>
+        <p:nvPr/>
+      </p:nvGrpSpPr>
+      <p:grpSpPr>
+        <a:xfrm>
+          <a:off x="0" y="0"/>
+          <a:ext cx="0" cy="0"/>
+          <a:chOff x="0" y="0"/>
+          <a:chExt cx="0" cy="0"/>
+        </a:xfrm>
+      </p:grpSpPr>
+      <p:sp>
+        <p:nvSpPr>
+          <p:cNvPr id="2" name="Slide Image Placeholder 1"/>
+          <p:cNvSpPr>
+            <a:spLocks noGrp="1" noRot="1" noChangeAspect="1"/>
+          </p:cNvSpPr>
+          <p:nvPr>
+            <p:ph type="sldImg"/>
+          </p:nvPr>
+        </p:nvSpPr>
+        <p:spPr/>
+      </p:sp>
+      <p:sp>
+        <p:nvSpPr>
+          <p:cNvPr id="3" name="Notes Placeholder 2"/>
+          <p:cNvSpPr>
+            <a:spLocks noGrp="1"/>
+          </p:cNvSpPr>
+          <p:nvPr>
+            <p:ph type="body" idx="1"/>
+          </p:nvPr>
+        </p:nvSpPr>
+        <p:spPr/>
+        <p:txBody>
+          <a:bodyPr/>
+          <a:lstStyle/>
+          <a:p>
+            <a:endParaRPr lang="en-US" dirty="0"/>
+          </a:p>
+        </p:txBody>
+      </p:sp>
+      <p:sp>
+        <p:nvSpPr>
+          <p:cNvPr id="4" name="Slide Number Placeholder 3"/>
+          <p:cNvSpPr>
+            <a:spLocks noGrp="1"/>
+          </p:cNvSpPr>
+          <p:nvPr>
+            <p:ph type="sldNum" sz="quarter" idx="10"/>
+          </p:nvPr>
+        </p:nvSpPr>
+        <p:spPr/>
+        <p:txBody>
+          <a:bodyPr/>
+          <a:lstStyle/>
+          <a:p>
+            <a:fld id="{F7021451-1387-4CA6-816F-3879F97B5CBC}" type="slidenum">
+              <a:rPr lang="en-US"/>
+              <a:t>15</a:t>
+            </a:fld>
+            <a:endParaRPr lang="en-US"/>
+          </a:p>
+        </p:txBody>
+      </p:sp>
+    </p:spTree>
+    <p:extLst>
+      <p:ext uri="{BB962C8B-B14F-4D97-AF65-F5344CB8AC3E}">
+        <p14:creationId xmlns:p14="http://schemas.microsoft.com/office/powerpoint/2010/main" val="1024086991"/>
+      </p:ext>
+    </p:extLst>
+  </p:cSld>
+  <p:clrMapOvr>
+    <a:masterClrMapping/>
+  </p:clrMapOvr>
+</p:notes>
+</file>
+
+<file path=ppt/notesSlides/notesSlide16.xml><?xml version="1.0" encoding="utf-8"?>
 <p:notes xmlns:a="http://schemas.openxmlformats.org/drawingml/2006/main" xmlns:r="http://schemas.openxmlformats.org/officeDocument/2006/relationships" xmlns:p="http://schemas.openxmlformats.org/presentationml/2006/main" showMasterSp="0" showMasterPhAnim="0">
   <p:cSld>
     <p:spTree>
@@ -9118,6 +9203,877 @@
 
 <file path=ppt/slides/slide10.xml><?xml version="1.0" encoding="utf-8"?>
 <p:sld xmlns:a="http://schemas.openxmlformats.org/drawingml/2006/main" xmlns:r="http://schemas.openxmlformats.org/officeDocument/2006/relationships" xmlns:p="http://schemas.openxmlformats.org/presentationml/2006/main">
+  <p:cSld name="Slide 12">
+    <p:bg>
+      <p:bgPr>
+        <a:solidFill>
+          <a:srgbClr val="111848"/>
+        </a:solidFill>
+        <a:effectLst/>
+      </p:bgPr>
+    </p:bg>
+    <p:spTree>
+      <p:nvGrpSpPr>
+        <p:cNvPr id="1" name=""/>
+        <p:cNvGrpSpPr/>
+        <p:nvPr/>
+      </p:nvGrpSpPr>
+      <p:grpSpPr>
+        <a:xfrm>
+          <a:off x="0" y="0"/>
+          <a:ext cx="0" cy="0"/>
+          <a:chOff x="0" y="0"/>
+          <a:chExt cx="0" cy="0"/>
+        </a:xfrm>
+      </p:grpSpPr>
+      <p:sp>
+        <p:nvSpPr>
+          <p:cNvPr id="2" name="Shape 0"/>
+          <p:cNvSpPr/>
+          <p:nvPr/>
+        </p:nvSpPr>
+        <p:spPr>
+          <a:xfrm>
+            <a:off x="0" y="0"/>
+            <a:ext cx="164592" cy="6858000"/>
+          </a:xfrm>
+          <a:prstGeom prst="rect">
+            <a:avLst/>
+          </a:prstGeom>
+          <a:solidFill>
+            <a:srgbClr val="0F766E"/>
+          </a:solidFill>
+          <a:ln/>
+        </p:spPr>
+        <p:txBody>
+          <a:bodyPr/>
+          <a:lstStyle/>
+          <a:p>
+            <a:endParaRPr lang="ko-KR" altLang="en-US"/>
+          </a:p>
+        </p:txBody>
+      </p:sp>
+      <p:sp>
+        <p:nvSpPr>
+          <p:cNvPr id="3" name="Text 1"/>
+          <p:cNvSpPr/>
+          <p:nvPr/>
+        </p:nvSpPr>
+        <p:spPr>
+          <a:xfrm>
+            <a:off x="411480" y="914400"/>
+            <a:ext cx="8229600" cy="384048"/>
+          </a:xfrm>
+          <a:prstGeom prst="rect">
+            <a:avLst/>
+          </a:prstGeom>
+          <a:noFill/>
+          <a:ln/>
+        </p:spPr>
+        <p:txBody>
+          <a:bodyPr wrap="square" lIns="0" tIns="0" rIns="0" bIns="0" rtlCol="0" anchor="ctr"/>
+          <a:lstStyle/>
+          <a:p>
+            <a:pPr marL="0" indent="0">
+              <a:buNone/>
+            </a:pPr>
+            <a:r>
+              <a:rPr lang="en-US" sz="1400" b="1" dirty="0">
+                <a:solidFill>
+                  <a:srgbClr val="0F766E"/>
+                </a:solidFill>
+                <a:latin typeface="Arial" pitchFamily="34" charset="0"/>
+                <a:ea typeface="Arial" pitchFamily="34" charset="-122"/>
+                <a:cs typeface="Arial" pitchFamily="34" charset="-120"/>
+              </a:rPr>
+              <a:t>실습 C</a:t>
+            </a:r>
+            <a:endParaRPr lang="en-US" sz="1400" dirty="0"/>
+          </a:p>
+        </p:txBody>
+      </p:sp>
+      <p:sp>
+        <p:nvSpPr>
+          <p:cNvPr id="4" name="Text 2"/>
+          <p:cNvSpPr/>
+          <p:nvPr/>
+        </p:nvSpPr>
+        <p:spPr>
+          <a:xfrm>
+            <a:off x="411480" y="1371600"/>
+            <a:ext cx="7772400" cy="1645920"/>
+          </a:xfrm>
+          <a:prstGeom prst="rect">
+            <a:avLst/>
+          </a:prstGeom>
+          <a:noFill/>
+          <a:ln/>
+        </p:spPr>
+        <p:txBody>
+          <a:bodyPr wrap="square" rtlCol="0" anchor="ctr"/>
+          <a:lstStyle/>
+          <a:p>
+            <a:pPr marL="0" indent="0">
+              <a:buNone/>
+            </a:pPr>
+            <a:r>
+              <a:rPr lang="en-US" sz="3400" b="1" dirty="0">
+                <a:solidFill>
+                  <a:srgbClr val="FFFFFF"/>
+                </a:solidFill>
+                <a:latin typeface="Arial" pitchFamily="34" charset="0"/>
+                <a:ea typeface="Arial" pitchFamily="34" charset="-122"/>
+                <a:cs typeface="Arial" pitchFamily="34" charset="-120"/>
+              </a:rPr>
+              <a:t>RAG 프롬프트 인젝션</a:t>
+            </a:r>
+            <a:endParaRPr lang="en-US" sz="3400" dirty="0"/>
+          </a:p>
+          <a:p>
+            <a:pPr marL="0" indent="0">
+              <a:buNone/>
+            </a:pPr>
+            <a:r>
+              <a:rPr lang="en-US" sz="3400" b="1" dirty="0">
+                <a:solidFill>
+                  <a:srgbClr val="FFFFFF"/>
+                </a:solidFill>
+                <a:latin typeface="Arial" pitchFamily="34" charset="0"/>
+                <a:ea typeface="Arial" pitchFamily="34" charset="-122"/>
+                <a:cs typeface="Arial" pitchFamily="34" charset="-120"/>
+              </a:rPr>
+              <a:t>(LLM01)</a:t>
+            </a:r>
+            <a:endParaRPr lang="en-US" sz="3400" dirty="0"/>
+          </a:p>
+        </p:txBody>
+      </p:sp>
+      <p:sp>
+        <p:nvSpPr>
+          <p:cNvPr id="5" name="Text 3"/>
+          <p:cNvSpPr/>
+          <p:nvPr/>
+        </p:nvSpPr>
+        <p:spPr>
+          <a:xfrm>
+            <a:off x="411480" y="3154680"/>
+            <a:ext cx="7772400" cy="438912"/>
+          </a:xfrm>
+          <a:prstGeom prst="rect">
+            <a:avLst/>
+          </a:prstGeom>
+          <a:noFill/>
+          <a:ln/>
+        </p:spPr>
+        <p:txBody>
+          <a:bodyPr wrap="square" rtlCol="0" anchor="ctr"/>
+          <a:lstStyle/>
+          <a:p>
+            <a:pPr marL="0" indent="0">
+              <a:buNone/>
+            </a:pPr>
+            <a:r>
+              <a:rPr lang="en-US" sz="1300" i="1" dirty="0">
+                <a:solidFill>
+                  <a:srgbClr val="94A3B8"/>
+                </a:solidFill>
+                <a:latin typeface="Arial" pitchFamily="34" charset="0"/>
+                <a:ea typeface="Arial" pitchFamily="34" charset="-122"/>
+                <a:cs typeface="Arial" pitchFamily="34" charset="-120"/>
+              </a:rPr>
+              <a:t>"문서 한 건으로 RAG 전체가 조종된다"</a:t>
+            </a:r>
+            <a:endParaRPr lang="en-US" sz="1300" dirty="0"/>
+          </a:p>
+        </p:txBody>
+      </p:sp>
+      <p:sp>
+        <p:nvSpPr>
+          <p:cNvPr id="6" name="Shape 4"/>
+          <p:cNvSpPr/>
+          <p:nvPr/>
+        </p:nvSpPr>
+        <p:spPr>
+          <a:xfrm>
+            <a:off x="411480" y="3794760"/>
+            <a:ext cx="1159459" cy="274320"/>
+          </a:xfrm>
+          <a:prstGeom prst="rect">
+            <a:avLst/>
+          </a:prstGeom>
+          <a:solidFill>
+            <a:srgbClr val="0F766E"/>
+          </a:solidFill>
+          <a:ln/>
+        </p:spPr>
+        <p:txBody>
+          <a:bodyPr/>
+          <a:lstStyle/>
+          <a:p>
+            <a:endParaRPr lang="ko-KR" altLang="en-US"/>
+          </a:p>
+        </p:txBody>
+      </p:sp>
+      <p:sp>
+        <p:nvSpPr>
+          <p:cNvPr id="7" name="Text 5"/>
+          <p:cNvSpPr/>
+          <p:nvPr/>
+        </p:nvSpPr>
+        <p:spPr>
+          <a:xfrm>
+            <a:off x="475488" y="3794760"/>
+            <a:ext cx="1031443" cy="274320"/>
+          </a:xfrm>
+          <a:prstGeom prst="rect">
+            <a:avLst/>
+          </a:prstGeom>
+          <a:noFill/>
+          <a:ln/>
+        </p:spPr>
+        <p:txBody>
+          <a:bodyPr wrap="square" lIns="0" tIns="0" rIns="0" bIns="0" rtlCol="0" anchor="ctr"/>
+          <a:lstStyle/>
+          <a:p>
+            <a:pPr marL="0" indent="0">
+              <a:buNone/>
+            </a:pPr>
+            <a:r>
+              <a:rPr lang="en-US" sz="900" b="1" dirty="0">
+                <a:solidFill>
+                  <a:srgbClr val="FFFFFF"/>
+                </a:solidFill>
+                <a:latin typeface="Arial" pitchFamily="34" charset="0"/>
+                <a:ea typeface="Arial" pitchFamily="34" charset="-122"/>
+                <a:cs typeface="Arial" pitchFamily="34" charset="-120"/>
+              </a:rPr>
+              <a:t>LLM01 간접인젝션</a:t>
+            </a:r>
+            <a:endParaRPr lang="en-US" sz="900" dirty="0"/>
+          </a:p>
+        </p:txBody>
+      </p:sp>
+      <p:sp>
+        <p:nvSpPr>
+          <p:cNvPr id="8" name="Shape 6"/>
+          <p:cNvSpPr/>
+          <p:nvPr/>
+        </p:nvSpPr>
+        <p:spPr>
+          <a:xfrm>
+            <a:off x="1662379" y="3794760"/>
+            <a:ext cx="1159459" cy="274320"/>
+          </a:xfrm>
+          <a:prstGeom prst="rect">
+            <a:avLst/>
+          </a:prstGeom>
+          <a:solidFill>
+            <a:srgbClr val="0F766E"/>
+          </a:solidFill>
+          <a:ln/>
+        </p:spPr>
+        <p:txBody>
+          <a:bodyPr/>
+          <a:lstStyle/>
+          <a:p>
+            <a:endParaRPr lang="ko-KR" altLang="en-US"/>
+          </a:p>
+        </p:txBody>
+      </p:sp>
+      <p:sp>
+        <p:nvSpPr>
+          <p:cNvPr id="9" name="Text 7"/>
+          <p:cNvSpPr/>
+          <p:nvPr/>
+        </p:nvSpPr>
+        <p:spPr>
+          <a:xfrm>
+            <a:off x="1726387" y="3794760"/>
+            <a:ext cx="1031443" cy="274320"/>
+          </a:xfrm>
+          <a:prstGeom prst="rect">
+            <a:avLst/>
+          </a:prstGeom>
+          <a:noFill/>
+          <a:ln/>
+        </p:spPr>
+        <p:txBody>
+          <a:bodyPr wrap="square" lIns="0" tIns="0" rIns="0" bIns="0" rtlCol="0" anchor="ctr"/>
+          <a:lstStyle/>
+          <a:p>
+            <a:pPr marL="0" indent="0">
+              <a:buNone/>
+            </a:pPr>
+            <a:r>
+              <a:rPr lang="en-US" sz="900" b="1" dirty="0">
+                <a:solidFill>
+                  <a:srgbClr val="FFFFFF"/>
+                </a:solidFill>
+                <a:latin typeface="Arial" pitchFamily="34" charset="0"/>
+                <a:ea typeface="Arial" pitchFamily="34" charset="-122"/>
+                <a:cs typeface="Arial" pitchFamily="34" charset="-120"/>
+              </a:rPr>
+              <a:t>M03 DOC태그격리</a:t>
+            </a:r>
+            <a:endParaRPr lang="en-US" sz="900" dirty="0"/>
+          </a:p>
+        </p:txBody>
+      </p:sp>
+      <p:sp>
+        <p:nvSpPr>
+          <p:cNvPr id="10" name="Shape 8"/>
+          <p:cNvSpPr/>
+          <p:nvPr/>
+        </p:nvSpPr>
+        <p:spPr>
+          <a:xfrm>
+            <a:off x="2913278" y="3794760"/>
+            <a:ext cx="918058" cy="274320"/>
+          </a:xfrm>
+          <a:prstGeom prst="rect">
+            <a:avLst/>
+          </a:prstGeom>
+          <a:solidFill>
+            <a:srgbClr val="0F766E"/>
+          </a:solidFill>
+          <a:ln/>
+        </p:spPr>
+        <p:txBody>
+          <a:bodyPr/>
+          <a:lstStyle/>
+          <a:p>
+            <a:endParaRPr lang="ko-KR" altLang="en-US"/>
+          </a:p>
+        </p:txBody>
+      </p:sp>
+      <p:sp>
+        <p:nvSpPr>
+          <p:cNvPr id="11" name="Text 9"/>
+          <p:cNvSpPr/>
+          <p:nvPr/>
+        </p:nvSpPr>
+        <p:spPr>
+          <a:xfrm>
+            <a:off x="2977286" y="3794760"/>
+            <a:ext cx="790042" cy="274320"/>
+          </a:xfrm>
+          <a:prstGeom prst="rect">
+            <a:avLst/>
+          </a:prstGeom>
+          <a:noFill/>
+          <a:ln/>
+        </p:spPr>
+        <p:txBody>
+          <a:bodyPr wrap="square" lIns="0" tIns="0" rIns="0" bIns="0" rtlCol="0" anchor="ctr"/>
+          <a:lstStyle/>
+          <a:p>
+            <a:pPr marL="0" indent="0">
+              <a:buNone/>
+            </a:pPr>
+            <a:r>
+              <a:rPr lang="en-US" sz="900" b="1" dirty="0">
+                <a:solidFill>
+                  <a:srgbClr val="FFFFFF"/>
+                </a:solidFill>
+                <a:latin typeface="Arial" pitchFamily="34" charset="0"/>
+                <a:ea typeface="Arial" pitchFamily="34" charset="-122"/>
+                <a:cs typeface="Arial" pitchFamily="34" charset="-120"/>
+              </a:rPr>
+              <a:t>M11 출처표기</a:t>
+            </a:r>
+            <a:endParaRPr lang="en-US" sz="900" dirty="0"/>
+          </a:p>
+        </p:txBody>
+      </p:sp>
+      <p:sp>
+        <p:nvSpPr>
+          <p:cNvPr id="12" name="Shape 10"/>
+          <p:cNvSpPr/>
+          <p:nvPr/>
+        </p:nvSpPr>
+        <p:spPr>
+          <a:xfrm>
+            <a:off x="3922776" y="3794760"/>
+            <a:ext cx="1561795" cy="274320"/>
+          </a:xfrm>
+          <a:prstGeom prst="rect">
+            <a:avLst/>
+          </a:prstGeom>
+          <a:solidFill>
+            <a:srgbClr val="0F766E"/>
+          </a:solidFill>
+          <a:ln/>
+        </p:spPr>
+        <p:txBody>
+          <a:bodyPr/>
+          <a:lstStyle/>
+          <a:p>
+            <a:endParaRPr lang="ko-KR" altLang="en-US"/>
+          </a:p>
+        </p:txBody>
+      </p:sp>
+      <p:sp>
+        <p:nvSpPr>
+          <p:cNvPr id="13" name="Text 11"/>
+          <p:cNvSpPr/>
+          <p:nvPr/>
+        </p:nvSpPr>
+        <p:spPr>
+          <a:xfrm>
+            <a:off x="3986784" y="3794760"/>
+            <a:ext cx="1433779" cy="274320"/>
+          </a:xfrm>
+          <a:prstGeom prst="rect">
+            <a:avLst/>
+          </a:prstGeom>
+          <a:noFill/>
+          <a:ln/>
+        </p:spPr>
+        <p:txBody>
+          <a:bodyPr wrap="square" lIns="0" tIns="0" rIns="0" bIns="0" rtlCol="0" anchor="ctr"/>
+          <a:lstStyle/>
+          <a:p>
+            <a:pPr marL="0" indent="0">
+              <a:buNone/>
+            </a:pPr>
+            <a:r>
+              <a:rPr lang="en-US" sz="900" b="1" dirty="0">
+                <a:solidFill>
+                  <a:srgbClr val="FFFFFF"/>
+                </a:solidFill>
+                <a:latin typeface="Arial" pitchFamily="34" charset="0"/>
+                <a:ea typeface="Arial" pitchFamily="34" charset="-122"/>
+                <a:cs typeface="Arial" pitchFamily="34" charset="-120"/>
+              </a:rPr>
+              <a:t>M13 VectorDB쓰기통제</a:t>
+            </a:r>
+            <a:endParaRPr lang="en-US" sz="900" dirty="0"/>
+          </a:p>
+        </p:txBody>
+      </p:sp>
+      <p:sp>
+        <p:nvSpPr>
+          <p:cNvPr id="14" name="Shape 12"/>
+          <p:cNvSpPr/>
+          <p:nvPr/>
+        </p:nvSpPr>
+        <p:spPr>
+          <a:xfrm>
+            <a:off x="8686800" y="731520"/>
+            <a:ext cx="3200400" cy="5029200"/>
+          </a:xfrm>
+          <a:prstGeom prst="rect">
+            <a:avLst/>
+          </a:prstGeom>
+          <a:solidFill>
+            <a:srgbClr val="0F172A"/>
+          </a:solidFill>
+          <a:ln/>
+          <a:effectLst>
+            <a:outerShdw blurRad="63500" dist="25400" dir="8100000" algn="bl" rotWithShape="0">
+              <a:srgbClr val="000000">
+                <a:alpha val="10000"/>
+              </a:srgbClr>
+            </a:outerShdw>
+          </a:effectLst>
+        </p:spPr>
+        <p:txBody>
+          <a:bodyPr/>
+          <a:lstStyle/>
+          <a:p>
+            <a:endParaRPr lang="ko-KR" altLang="en-US"/>
+          </a:p>
+        </p:txBody>
+      </p:sp>
+      <p:sp>
+        <p:nvSpPr>
+          <p:cNvPr id="15" name="Text 13"/>
+          <p:cNvSpPr/>
+          <p:nvPr/>
+        </p:nvSpPr>
+        <p:spPr>
+          <a:xfrm>
+            <a:off x="8823960" y="914400"/>
+            <a:ext cx="2880360" cy="420624"/>
+          </a:xfrm>
+          <a:prstGeom prst="rect">
+            <a:avLst/>
+          </a:prstGeom>
+          <a:noFill/>
+          <a:ln/>
+        </p:spPr>
+        <p:txBody>
+          <a:bodyPr wrap="square" lIns="0" tIns="0" rIns="0" bIns="0" rtlCol="0" anchor="ctr"/>
+          <a:lstStyle/>
+          <a:p>
+            <a:pPr marL="0" indent="0">
+              <a:buNone/>
+            </a:pPr>
+            <a:r>
+              <a:rPr lang="en-US" sz="950" b="1" dirty="0">
+                <a:solidFill>
+                  <a:srgbClr val="0F766E"/>
+                </a:solidFill>
+                <a:latin typeface="Consolas" pitchFamily="34" charset="0"/>
+                <a:ea typeface="Consolas" pitchFamily="34" charset="-122"/>
+                <a:cs typeface="Consolas" pitchFamily="34" charset="-120"/>
+              </a:rPr>
+              <a:t>간접 인젝션 흐름</a:t>
+            </a:r>
+            <a:endParaRPr lang="en-US" sz="950" dirty="0"/>
+          </a:p>
+        </p:txBody>
+      </p:sp>
+      <p:sp>
+        <p:nvSpPr>
+          <p:cNvPr id="16" name="Text 14"/>
+          <p:cNvSpPr/>
+          <p:nvPr/>
+        </p:nvSpPr>
+        <p:spPr>
+          <a:xfrm>
+            <a:off x="8823960" y="1389888"/>
+            <a:ext cx="2880360" cy="420624"/>
+          </a:xfrm>
+          <a:prstGeom prst="rect">
+            <a:avLst/>
+          </a:prstGeom>
+          <a:noFill/>
+          <a:ln/>
+        </p:spPr>
+        <p:txBody>
+          <a:bodyPr wrap="square" lIns="0" tIns="0" rIns="0" bIns="0" rtlCol="0" anchor="ctr"/>
+          <a:lstStyle/>
+          <a:p>
+            <a:pPr marL="0" indent="0">
+              <a:buNone/>
+            </a:pPr>
+            <a:endParaRPr lang="en-US" sz="950" dirty="0"/>
+          </a:p>
+        </p:txBody>
+      </p:sp>
+      <p:sp>
+        <p:nvSpPr>
+          <p:cNvPr id="17" name="Text 15"/>
+          <p:cNvSpPr/>
+          <p:nvPr/>
+        </p:nvSpPr>
+        <p:spPr>
+          <a:xfrm>
+            <a:off x="8823960" y="1865376"/>
+            <a:ext cx="2880360" cy="420624"/>
+          </a:xfrm>
+          <a:prstGeom prst="rect">
+            <a:avLst/>
+          </a:prstGeom>
+          <a:noFill/>
+          <a:ln/>
+        </p:spPr>
+        <p:txBody>
+          <a:bodyPr wrap="square" lIns="0" tIns="0" rIns="0" bIns="0" rtlCol="0" anchor="ctr"/>
+          <a:lstStyle/>
+          <a:p>
+            <a:pPr marL="0" indent="0">
+              <a:buNone/>
+            </a:pPr>
+            <a:r>
+              <a:rPr lang="en-US" sz="950" dirty="0">
+                <a:solidFill>
+                  <a:srgbClr val="E6EDF3"/>
+                </a:solidFill>
+                <a:latin typeface="Consolas" pitchFamily="34" charset="0"/>
+                <a:ea typeface="Consolas" pitchFamily="34" charset="-122"/>
+                <a:cs typeface="Consolas" pitchFamily="34" charset="-120"/>
+              </a:rPr>
+              <a:t>오염 문서 VectorDB 삽입</a:t>
+            </a:r>
+            <a:endParaRPr lang="en-US" sz="950" dirty="0"/>
+          </a:p>
+        </p:txBody>
+      </p:sp>
+      <p:sp>
+        <p:nvSpPr>
+          <p:cNvPr id="18" name="Text 16"/>
+          <p:cNvSpPr/>
+          <p:nvPr/>
+        </p:nvSpPr>
+        <p:spPr>
+          <a:xfrm>
+            <a:off x="8823960" y="2340864"/>
+            <a:ext cx="2880360" cy="420624"/>
+          </a:xfrm>
+          <a:prstGeom prst="rect">
+            <a:avLst/>
+          </a:prstGeom>
+          <a:noFill/>
+          <a:ln/>
+        </p:spPr>
+        <p:txBody>
+          <a:bodyPr wrap="square" lIns="0" tIns="0" rIns="0" bIns="0" rtlCol="0" anchor="ctr"/>
+          <a:lstStyle/>
+          <a:p>
+            <a:pPr marL="0" indent="0">
+              <a:buNone/>
+            </a:pPr>
+            <a:r>
+              <a:rPr lang="en-US" sz="950" dirty="0">
+                <a:solidFill>
+                  <a:srgbClr val="FFFFFF"/>
+                </a:solidFill>
+                <a:latin typeface="Consolas" pitchFamily="34" charset="0"/>
+                <a:ea typeface="Consolas" pitchFamily="34" charset="-122"/>
+                <a:cs typeface="Consolas" pitchFamily="34" charset="-120"/>
+              </a:rPr>
+              <a:t>  ↓ 검색</a:t>
+            </a:r>
+            <a:endParaRPr lang="en-US" sz="950" dirty="0"/>
+          </a:p>
+        </p:txBody>
+      </p:sp>
+      <p:sp>
+        <p:nvSpPr>
+          <p:cNvPr id="19" name="Text 17"/>
+          <p:cNvSpPr/>
+          <p:nvPr/>
+        </p:nvSpPr>
+        <p:spPr>
+          <a:xfrm>
+            <a:off x="8823960" y="2816352"/>
+            <a:ext cx="2880360" cy="420624"/>
+          </a:xfrm>
+          <a:prstGeom prst="rect">
+            <a:avLst/>
+          </a:prstGeom>
+          <a:noFill/>
+          <a:ln/>
+        </p:spPr>
+        <p:txBody>
+          <a:bodyPr wrap="square" lIns="0" tIns="0" rIns="0" bIns="0" rtlCol="0" anchor="ctr"/>
+          <a:lstStyle/>
+          <a:p>
+            <a:pPr marL="0" indent="0">
+              <a:buNone/>
+            </a:pPr>
+            <a:r>
+              <a:rPr lang="en-US" sz="950" dirty="0">
+                <a:solidFill>
+                  <a:srgbClr val="F59E0B"/>
+                </a:solidFill>
+                <a:latin typeface="Consolas" pitchFamily="34" charset="0"/>
+                <a:ea typeface="Consolas" pitchFamily="34" charset="-122"/>
+                <a:cs typeface="Consolas" pitchFamily="34" charset="-120"/>
+              </a:rPr>
+              <a:t>poisoned_doc 검색 결과 포함</a:t>
+            </a:r>
+            <a:endParaRPr lang="en-US" sz="950" dirty="0"/>
+          </a:p>
+        </p:txBody>
+      </p:sp>
+      <p:sp>
+        <p:nvSpPr>
+          <p:cNvPr id="20" name="Text 18"/>
+          <p:cNvSpPr/>
+          <p:nvPr/>
+        </p:nvSpPr>
+        <p:spPr>
+          <a:xfrm>
+            <a:off x="8823960" y="3291840"/>
+            <a:ext cx="2880360" cy="420624"/>
+          </a:xfrm>
+          <a:prstGeom prst="rect">
+            <a:avLst/>
+          </a:prstGeom>
+          <a:noFill/>
+          <a:ln/>
+        </p:spPr>
+        <p:txBody>
+          <a:bodyPr wrap="square" lIns="0" tIns="0" rIns="0" bIns="0" rtlCol="0" anchor="ctr"/>
+          <a:lstStyle/>
+          <a:p>
+            <a:pPr marL="0" indent="0">
+              <a:buNone/>
+            </a:pPr>
+            <a:r>
+              <a:rPr lang="en-US" sz="950" dirty="0">
+                <a:solidFill>
+                  <a:srgbClr val="FFFFFF"/>
+                </a:solidFill>
+                <a:latin typeface="Consolas" pitchFamily="34" charset="0"/>
+                <a:ea typeface="Consolas" pitchFamily="34" charset="-122"/>
+                <a:cs typeface="Consolas" pitchFamily="34" charset="-120"/>
+              </a:rPr>
+              <a:t>  ↓ RAG</a:t>
+            </a:r>
+            <a:endParaRPr lang="en-US" sz="950" dirty="0"/>
+          </a:p>
+        </p:txBody>
+      </p:sp>
+      <p:sp>
+        <p:nvSpPr>
+          <p:cNvPr id="21" name="Text 19"/>
+          <p:cNvSpPr/>
+          <p:nvPr/>
+        </p:nvSpPr>
+        <p:spPr>
+          <a:xfrm>
+            <a:off x="8823960" y="3767328"/>
+            <a:ext cx="2880360" cy="420624"/>
+          </a:xfrm>
+          <a:prstGeom prst="rect">
+            <a:avLst/>
+          </a:prstGeom>
+          <a:noFill/>
+          <a:ln/>
+        </p:spPr>
+        <p:txBody>
+          <a:bodyPr wrap="square" lIns="0" tIns="0" rIns="0" bIns="0" rtlCol="0" anchor="ctr"/>
+          <a:lstStyle/>
+          <a:p>
+            <a:pPr marL="0" indent="0">
+              <a:buNone/>
+            </a:pPr>
+            <a:r>
+              <a:rPr lang="en-US" sz="950" dirty="0">
+                <a:solidFill>
+                  <a:srgbClr val="DC2626"/>
+                </a:solidFill>
+                <a:latin typeface="Consolas" pitchFamily="34" charset="0"/>
+                <a:ea typeface="Consolas" pitchFamily="34" charset="-122"/>
+                <a:cs typeface="Consolas" pitchFamily="34" charset="-120"/>
+              </a:rPr>
+              <a:t>LLM 컨텍스트에 명령 포함</a:t>
+            </a:r>
+            <a:endParaRPr lang="en-US" sz="950" dirty="0"/>
+          </a:p>
+        </p:txBody>
+      </p:sp>
+      <p:sp>
+        <p:nvSpPr>
+          <p:cNvPr id="22" name="Text 20"/>
+          <p:cNvSpPr/>
+          <p:nvPr/>
+        </p:nvSpPr>
+        <p:spPr>
+          <a:xfrm>
+            <a:off x="8823960" y="4242816"/>
+            <a:ext cx="2880360" cy="420624"/>
+          </a:xfrm>
+          <a:prstGeom prst="rect">
+            <a:avLst/>
+          </a:prstGeom>
+          <a:noFill/>
+          <a:ln/>
+        </p:spPr>
+        <p:txBody>
+          <a:bodyPr wrap="square" lIns="0" tIns="0" rIns="0" bIns="0" rtlCol="0" anchor="ctr"/>
+          <a:lstStyle/>
+          <a:p>
+            <a:pPr marL="0" indent="0">
+              <a:buNone/>
+            </a:pPr>
+            <a:r>
+              <a:rPr lang="en-US" sz="950" dirty="0">
+                <a:solidFill>
+                  <a:srgbClr val="FFFFFF"/>
+                </a:solidFill>
+                <a:latin typeface="Consolas" pitchFamily="34" charset="0"/>
+                <a:ea typeface="Consolas" pitchFamily="34" charset="-122"/>
+                <a:cs typeface="Consolas" pitchFamily="34" charset="-120"/>
+              </a:rPr>
+              <a:t>  ↓</a:t>
+            </a:r>
+            <a:endParaRPr lang="en-US" sz="950" dirty="0"/>
+          </a:p>
+        </p:txBody>
+      </p:sp>
+      <p:sp>
+        <p:nvSpPr>
+          <p:cNvPr id="23" name="Text 21"/>
+          <p:cNvSpPr/>
+          <p:nvPr/>
+        </p:nvSpPr>
+        <p:spPr>
+          <a:xfrm>
+            <a:off x="8823960" y="4718304"/>
+            <a:ext cx="2880360" cy="420624"/>
+          </a:xfrm>
+          <a:prstGeom prst="rect">
+            <a:avLst/>
+          </a:prstGeom>
+          <a:noFill/>
+          <a:ln/>
+        </p:spPr>
+        <p:txBody>
+          <a:bodyPr wrap="square" lIns="0" tIns="0" rIns="0" bIns="0" rtlCol="0" anchor="ctr"/>
+          <a:lstStyle/>
+          <a:p>
+            <a:pPr marL="0" indent="0">
+              <a:buNone/>
+            </a:pPr>
+            <a:r>
+              <a:rPr lang="en-US" sz="950" dirty="0">
+                <a:solidFill>
+                  <a:srgbClr val="DC2626"/>
+                </a:solidFill>
+                <a:latin typeface="Consolas" pitchFamily="34" charset="0"/>
+                <a:ea typeface="Consolas" pitchFamily="34" charset="-122"/>
+                <a:cs typeface="Consolas" pitchFamily="34" charset="-120"/>
+              </a:rPr>
+              <a:t>공격자 지령 수행 ← LLM01!</a:t>
+            </a:r>
+            <a:endParaRPr lang="en-US" sz="950" dirty="0"/>
+          </a:p>
+        </p:txBody>
+      </p:sp>
+      <p:sp>
+        <p:nvSpPr>
+          <p:cNvPr id="24" name="Text 22"/>
+          <p:cNvSpPr/>
+          <p:nvPr/>
+        </p:nvSpPr>
+        <p:spPr>
+          <a:xfrm>
+            <a:off x="11064240" y="6510528"/>
+            <a:ext cx="914400" cy="274320"/>
+          </a:xfrm>
+          <a:prstGeom prst="rect">
+            <a:avLst/>
+          </a:prstGeom>
+          <a:noFill/>
+          <a:ln/>
+        </p:spPr>
+        <p:txBody>
+          <a:bodyPr wrap="square" lIns="0" tIns="0" rIns="0" bIns="0" rtlCol="0" anchor="ctr"/>
+          <a:lstStyle/>
+          <a:p>
+            <a:pPr marL="0" indent="0" algn="r">
+              <a:buNone/>
+            </a:pPr>
+            <a:r>
+              <a:rPr lang="en-US" sz="900" dirty="0">
+                <a:solidFill>
+                  <a:srgbClr val="94A3B8"/>
+                </a:solidFill>
+                <a:latin typeface="Arial" pitchFamily="34" charset="0"/>
+                <a:ea typeface="Arial" pitchFamily="34" charset="-122"/>
+                <a:cs typeface="Arial" pitchFamily="34" charset="-120"/>
+              </a:rPr>
+              <a:t>12 / 18</a:t>
+            </a:r>
+            <a:endParaRPr lang="en-US" sz="900" dirty="0"/>
+          </a:p>
+        </p:txBody>
+      </p:sp>
+    </p:spTree>
+  </p:cSld>
+  <p:clrMapOvr>
+    <a:masterClrMapping/>
+  </p:clrMapOvr>
+</p:sld>
+</file>
+
+<file path=ppt/slides/slide11.xml><?xml version="1.0" encoding="utf-8"?>
+<p:sld xmlns:a="http://schemas.openxmlformats.org/drawingml/2006/main" xmlns:r="http://schemas.openxmlformats.org/officeDocument/2006/relationships" xmlns:p="http://schemas.openxmlformats.org/presentationml/2006/main">
   <p:cSld name="Slide 13">
     <p:bg>
       <p:bgPr>
@@ -10567,7 +11523,7 @@
 </p:sld>
 </file>
 
-<file path=ppt/slides/slide11.xml><?xml version="1.0" encoding="utf-8"?>
+<file path=ppt/slides/slide12.xml><?xml version="1.0" encoding="utf-8"?>
 <p:sld xmlns:a="http://schemas.openxmlformats.org/drawingml/2006/main" xmlns:r="http://schemas.openxmlformats.org/officeDocument/2006/relationships" xmlns:p="http://schemas.openxmlformats.org/presentationml/2006/main">
   <p:cSld name="Slide 14">
     <p:bg>
@@ -11990,7 +12946,7 @@
 </p:sld>
 </file>
 
-<file path=ppt/slides/slide12.xml><?xml version="1.0" encoding="utf-8"?>
+<file path=ppt/slides/slide13.xml><?xml version="1.0" encoding="utf-8"?>
 <p:sld xmlns:a="http://schemas.openxmlformats.org/drawingml/2006/main" xmlns:r="http://schemas.openxmlformats.org/officeDocument/2006/relationships" xmlns:p="http://schemas.openxmlformats.org/presentationml/2006/main">
   <p:cSld name="Slide 16">
     <p:bg>
@@ -13010,7 +13966,7 @@
 </p:sld>
 </file>
 
-<file path=ppt/slides/slide13.xml><?xml version="1.0" encoding="utf-8"?>
+<file path=ppt/slides/slide14.xml><?xml version="1.0" encoding="utf-8"?>
 <p:sld xmlns:a="http://schemas.openxmlformats.org/drawingml/2006/main" xmlns:r="http://schemas.openxmlformats.org/officeDocument/2006/relationships" xmlns:p="http://schemas.openxmlformats.org/presentationml/2006/main">
   <p:cSld name="Slide 17">
     <p:bg>
@@ -14617,7 +15573,7 @@
 </p:sld>
 </file>
 
-<file path=ppt/slides/slide14.xml><?xml version="1.0" encoding="utf-8"?>
+<file path=ppt/slides/slide15.xml><?xml version="1.0" encoding="utf-8"?>
 <p:sld xmlns:a="http://schemas.openxmlformats.org/drawingml/2006/main" xmlns:r="http://schemas.openxmlformats.org/officeDocument/2006/relationships" xmlns:p="http://schemas.openxmlformats.org/presentationml/2006/main">
   <p:cSld name="Slide 18">
     <p:bg>
@@ -17691,7 +18647,7 @@
 </p:sld>
 </file>
 
-<file path=ppt/slides/slide15.xml><?xml version="1.0" encoding="utf-8"?>
+<file path=ppt/slides/slide16.xml><?xml version="1.0" encoding="utf-8"?>
 <p:sld xmlns:a="http://schemas.openxmlformats.org/drawingml/2006/main" xmlns:r="http://schemas.openxmlformats.org/officeDocument/2006/relationships" xmlns:p="http://schemas.openxmlformats.org/presentationml/2006/main">
   <p:cSld>
     <p:bg>
@@ -17869,6 +18825,1805 @@
 
 <file path=ppt/slides/slide2.xml><?xml version="1.0" encoding="utf-8"?>
 <p:sld xmlns:a="http://schemas.openxmlformats.org/drawingml/2006/main" xmlns:r="http://schemas.openxmlformats.org/officeDocument/2006/relationships" xmlns:p="http://schemas.openxmlformats.org/presentationml/2006/main">
+  <p:cSld>
+    <p:spTree>
+      <p:nvGrpSpPr>
+        <p:cNvPr id="1" name=""/>
+        <p:cNvGrpSpPr/>
+        <p:nvPr/>
+      </p:nvGrpSpPr>
+      <p:grpSpPr>
+        <a:xfrm>
+          <a:off x="0" y="0"/>
+          <a:ext cx="0" cy="0"/>
+          <a:chOff x="0" y="0"/>
+          <a:chExt cx="0" cy="0"/>
+        </a:xfrm>
+      </p:grpSpPr>
+      <p:sp>
+        <p:nvSpPr>
+          <p:cNvPr id="22" name="Shape 20"/>
+          <p:cNvSpPr/>
+          <p:nvPr/>
+        </p:nvSpPr>
+        <p:spPr>
+          <a:xfrm>
+            <a:off x="6035040" y="594359"/>
+            <a:ext cx="5852160" cy="5001371"/>
+          </a:xfrm>
+          <a:prstGeom prst="rect">
+            <a:avLst/>
+          </a:prstGeom>
+          <a:solidFill>
+            <a:srgbClr val="0D1117"/>
+          </a:solidFill>
+          <a:ln/>
+          <a:effectLst>
+            <a:outerShdw blurRad="63500" dist="25400" dir="8100000" algn="bl" rotWithShape="0">
+              <a:srgbClr val="000000">
+                <a:alpha val="10000"/>
+              </a:srgbClr>
+            </a:outerShdw>
+          </a:effectLst>
+        </p:spPr>
+        <p:txBody>
+          <a:bodyPr/>
+          <a:lstStyle/>
+          <a:p>
+            <a:endParaRPr lang="ko-KR" altLang="en-US"/>
+          </a:p>
+        </p:txBody>
+      </p:sp>
+      <p:sp>
+        <p:nvSpPr>
+          <p:cNvPr id="2" name="Text 0"/>
+          <p:cNvSpPr/>
+          <p:nvPr/>
+        </p:nvSpPr>
+        <p:spPr>
+          <a:xfrm>
+            <a:off x="365760" y="228600"/>
+            <a:ext cx="10972800" cy="365760"/>
+          </a:xfrm>
+          <a:prstGeom prst="rect">
+            <a:avLst/>
+          </a:prstGeom>
+          <a:noFill/>
+          <a:ln/>
+        </p:spPr>
+        <p:txBody>
+          <a:bodyPr wrap="square" lIns="0" tIns="0" rIns="0" bIns="0" rtlCol="0" anchor="ctr"/>
+          <a:lstStyle/>
+          <a:p>
+            <a:r>
+              <a:rPr lang="en-US" sz="1800" b="1" dirty="0">
+                <a:solidFill>
+                  <a:srgbClr val="111848"/>
+                </a:solidFill>
+                <a:latin typeface="Arial" pitchFamily="34" charset="0"/>
+                <a:ea typeface="Arial" pitchFamily="34" charset="-122"/>
+                <a:cs typeface="Arial" pitchFamily="34" charset="-120"/>
+              </a:rPr>
+              <a:t>⚙️  Step 0 — </a:t>
+            </a:r>
+            <a:r>
+              <a:rPr lang="en-US" sz="1800" b="1" dirty="0" err="1">
+                <a:solidFill>
+                  <a:srgbClr val="111848"/>
+                </a:solidFill>
+                <a:latin typeface="Arial" pitchFamily="34" charset="0"/>
+                <a:ea typeface="Arial" pitchFamily="34" charset="-122"/>
+                <a:cs typeface="Arial" pitchFamily="34" charset="-120"/>
+              </a:rPr>
+              <a:t>환경</a:t>
+            </a:r>
+            <a:r>
+              <a:rPr lang="en-US" sz="1800" b="1" dirty="0">
+                <a:solidFill>
+                  <a:srgbClr val="111848"/>
+                </a:solidFill>
+                <a:latin typeface="Arial" pitchFamily="34" charset="0"/>
+                <a:ea typeface="Arial" pitchFamily="34" charset="-122"/>
+                <a:cs typeface="Arial" pitchFamily="34" charset="-120"/>
+              </a:rPr>
+              <a:t> </a:t>
+            </a:r>
+            <a:r>
+              <a:rPr lang="en-US" sz="1800" b="1" dirty="0" err="1">
+                <a:solidFill>
+                  <a:srgbClr val="111848"/>
+                </a:solidFill>
+                <a:latin typeface="Arial" pitchFamily="34" charset="0"/>
+                <a:ea typeface="Arial" pitchFamily="34" charset="-122"/>
+                <a:cs typeface="Arial" pitchFamily="34" charset="-120"/>
+              </a:rPr>
+              <a:t>설정</a:t>
+            </a:r>
+            <a:r>
+              <a:rPr lang="en-US" altLang="ko-KR" b="1" dirty="0">
+                <a:solidFill>
+                  <a:srgbClr val="111848"/>
+                </a:solidFill>
+                <a:latin typeface="Arial" pitchFamily="34" charset="0"/>
+                <a:ea typeface="Arial" pitchFamily="34" charset="-122"/>
+                <a:cs typeface="Arial" pitchFamily="34" charset="-120"/>
+              </a:rPr>
+              <a:t> + RAG </a:t>
+            </a:r>
+            <a:r>
+              <a:rPr lang="en-US" altLang="ko-KR" b="1" dirty="0" err="1">
+                <a:solidFill>
+                  <a:srgbClr val="111848"/>
+                </a:solidFill>
+                <a:latin typeface="Arial" pitchFamily="34" charset="0"/>
+                <a:ea typeface="Arial" pitchFamily="34" charset="-122"/>
+                <a:cs typeface="Arial" pitchFamily="34" charset="-120"/>
+              </a:rPr>
+              <a:t>인프라</a:t>
+            </a:r>
+            <a:r>
+              <a:rPr lang="en-US" altLang="ko-KR" b="1" dirty="0">
+                <a:solidFill>
+                  <a:srgbClr val="111848"/>
+                </a:solidFill>
+                <a:latin typeface="Arial" pitchFamily="34" charset="0"/>
+                <a:ea typeface="Arial" pitchFamily="34" charset="-122"/>
+                <a:cs typeface="Arial" pitchFamily="34" charset="-120"/>
+              </a:rPr>
+              <a:t> </a:t>
+            </a:r>
+            <a:r>
+              <a:rPr lang="en-US" altLang="ko-KR" b="1" dirty="0" err="1">
+                <a:solidFill>
+                  <a:srgbClr val="111848"/>
+                </a:solidFill>
+                <a:latin typeface="Arial" pitchFamily="34" charset="0"/>
+                <a:ea typeface="Arial" pitchFamily="34" charset="-122"/>
+                <a:cs typeface="Arial" pitchFamily="34" charset="-120"/>
+              </a:rPr>
+              <a:t>구축</a:t>
+            </a:r>
+            <a:endParaRPr lang="en-US" sz="1800" dirty="0"/>
+          </a:p>
+        </p:txBody>
+      </p:sp>
+      <p:sp>
+        <p:nvSpPr>
+          <p:cNvPr id="3" name="Shape 1"/>
+          <p:cNvSpPr/>
+          <p:nvPr/>
+        </p:nvSpPr>
+        <p:spPr>
+          <a:xfrm>
+            <a:off x="274320" y="548640"/>
+            <a:ext cx="11612880" cy="36576"/>
+          </a:xfrm>
+          <a:prstGeom prst="rect">
+            <a:avLst/>
+          </a:prstGeom>
+          <a:solidFill>
+            <a:srgbClr val="111848"/>
+          </a:solidFill>
+          <a:ln w="12700">
+            <a:solidFill>
+              <a:srgbClr val="333333"/>
+            </a:solidFill>
+            <a:prstDash val="solid"/>
+          </a:ln>
+        </p:spPr>
+        <p:txBody>
+          <a:bodyPr/>
+          <a:lstStyle/>
+          <a:p>
+            <a:endParaRPr lang="ko-KR" altLang="en-US"/>
+          </a:p>
+        </p:txBody>
+      </p:sp>
+      <p:sp>
+        <p:nvSpPr>
+          <p:cNvPr id="4" name="Shape 2"/>
+          <p:cNvSpPr/>
+          <p:nvPr/>
+        </p:nvSpPr>
+        <p:spPr>
+          <a:xfrm>
+            <a:off x="274320" y="685800"/>
+            <a:ext cx="5486400" cy="1417320"/>
+          </a:xfrm>
+          <a:prstGeom prst="rect">
+            <a:avLst/>
+          </a:prstGeom>
+          <a:solidFill>
+            <a:srgbClr val="FFFFFF"/>
+          </a:solidFill>
+          <a:ln w="15240">
+            <a:solidFill>
+              <a:srgbClr val="1A73E8"/>
+            </a:solidFill>
+            <a:prstDash val="solid"/>
+          </a:ln>
+          <a:effectLst>
+            <a:outerShdw blurRad="63500" dist="25400" dir="8100000" algn="bl" rotWithShape="0">
+              <a:srgbClr val="000000">
+                <a:alpha val="10000"/>
+              </a:srgbClr>
+            </a:outerShdw>
+          </a:effectLst>
+        </p:spPr>
+        <p:txBody>
+          <a:bodyPr/>
+          <a:lstStyle/>
+          <a:p>
+            <a:endParaRPr lang="ko-KR" altLang="en-US"/>
+          </a:p>
+        </p:txBody>
+      </p:sp>
+      <p:sp>
+        <p:nvSpPr>
+          <p:cNvPr id="5" name="Shape 3"/>
+          <p:cNvSpPr/>
+          <p:nvPr/>
+        </p:nvSpPr>
+        <p:spPr>
+          <a:xfrm>
+            <a:off x="274320" y="685800"/>
+            <a:ext cx="5486400" cy="329184"/>
+          </a:xfrm>
+          <a:prstGeom prst="rect">
+            <a:avLst/>
+          </a:prstGeom>
+          <a:solidFill>
+            <a:srgbClr val="1A73E8"/>
+          </a:solidFill>
+          <a:ln w="12700">
+            <a:solidFill>
+              <a:srgbClr val="1A73E8"/>
+            </a:solidFill>
+            <a:prstDash val="solid"/>
+          </a:ln>
+        </p:spPr>
+        <p:txBody>
+          <a:bodyPr/>
+          <a:lstStyle/>
+          <a:p>
+            <a:endParaRPr lang="ko-KR" altLang="en-US"/>
+          </a:p>
+        </p:txBody>
+      </p:sp>
+      <p:sp>
+        <p:nvSpPr>
+          <p:cNvPr id="6" name="Text 4"/>
+          <p:cNvSpPr/>
+          <p:nvPr/>
+        </p:nvSpPr>
+        <p:spPr>
+          <a:xfrm>
+            <a:off x="384048" y="685800"/>
+            <a:ext cx="5266944" cy="329184"/>
+          </a:xfrm>
+          <a:prstGeom prst="rect">
+            <a:avLst/>
+          </a:prstGeom>
+          <a:noFill/>
+          <a:ln/>
+        </p:spPr>
+        <p:txBody>
+          <a:bodyPr wrap="square" lIns="0" tIns="0" rIns="0" bIns="0" rtlCol="0" anchor="ctr"/>
+          <a:lstStyle/>
+          <a:p>
+            <a:pPr marL="0" indent="0">
+              <a:buNone/>
+            </a:pPr>
+            <a:r>
+              <a:rPr lang="en-US" sz="1100" b="1" dirty="0">
+                <a:solidFill>
+                  <a:srgbClr val="FFFFFF"/>
+                </a:solidFill>
+                <a:latin typeface="Arial" pitchFamily="34" charset="0"/>
+                <a:ea typeface="Arial" pitchFamily="34" charset="-122"/>
+                <a:cs typeface="Arial" pitchFamily="34" charset="-120"/>
+              </a:rPr>
+              <a:t>① API 키 설정</a:t>
+            </a:r>
+            <a:endParaRPr lang="en-US" sz="1100" dirty="0"/>
+          </a:p>
+        </p:txBody>
+      </p:sp>
+      <p:sp>
+        <p:nvSpPr>
+          <p:cNvPr id="7" name="Text 5"/>
+          <p:cNvSpPr/>
+          <p:nvPr/>
+        </p:nvSpPr>
+        <p:spPr>
+          <a:xfrm>
+            <a:off x="411480" y="1088136"/>
+            <a:ext cx="5212080" cy="246888"/>
+          </a:xfrm>
+          <a:prstGeom prst="rect">
+            <a:avLst/>
+          </a:prstGeom>
+          <a:noFill/>
+          <a:ln/>
+        </p:spPr>
+        <p:txBody>
+          <a:bodyPr wrap="square" rtlCol="0" anchor="ctr"/>
+          <a:lstStyle/>
+          <a:p>
+            <a:pPr marL="0" indent="0">
+              <a:buNone/>
+            </a:pPr>
+            <a:r>
+              <a:rPr lang="en-US" sz="950" dirty="0">
+                <a:solidFill>
+                  <a:srgbClr val="111848"/>
+                </a:solidFill>
+                <a:latin typeface="Arial" pitchFamily="34" charset="0"/>
+                <a:ea typeface="Arial" pitchFamily="34" charset="-122"/>
+                <a:cs typeface="Arial" pitchFamily="34" charset="-120"/>
+              </a:rPr>
+              <a:t>Colab: 왼쪽 🔑 아이콘 → Secrets</a:t>
+            </a:r>
+            <a:endParaRPr lang="en-US" sz="950" dirty="0"/>
+          </a:p>
+        </p:txBody>
+      </p:sp>
+      <p:sp>
+        <p:nvSpPr>
+          <p:cNvPr id="8" name="Text 6"/>
+          <p:cNvSpPr/>
+          <p:nvPr/>
+        </p:nvSpPr>
+        <p:spPr>
+          <a:xfrm>
+            <a:off x="411480" y="1362456"/>
+            <a:ext cx="5212080" cy="246888"/>
+          </a:xfrm>
+          <a:prstGeom prst="rect">
+            <a:avLst/>
+          </a:prstGeom>
+          <a:noFill/>
+          <a:ln/>
+        </p:spPr>
+        <p:txBody>
+          <a:bodyPr wrap="square" rtlCol="0" anchor="ctr"/>
+          <a:lstStyle/>
+          <a:p>
+            <a:pPr marL="0" indent="0">
+              <a:buNone/>
+            </a:pPr>
+            <a:r>
+              <a:rPr lang="en-US" sz="950" dirty="0">
+                <a:solidFill>
+                  <a:srgbClr val="111848"/>
+                </a:solidFill>
+                <a:latin typeface="Arial" pitchFamily="34" charset="0"/>
+                <a:ea typeface="Arial" pitchFamily="34" charset="-122"/>
+                <a:cs typeface="Arial" pitchFamily="34" charset="-120"/>
+              </a:rPr>
+              <a:t>→ GEMINI_API_KEY 추가</a:t>
+            </a:r>
+            <a:endParaRPr lang="en-US" sz="950" dirty="0"/>
+          </a:p>
+        </p:txBody>
+      </p:sp>
+      <p:sp>
+        <p:nvSpPr>
+          <p:cNvPr id="9" name="Text 7"/>
+          <p:cNvSpPr/>
+          <p:nvPr/>
+        </p:nvSpPr>
+        <p:spPr>
+          <a:xfrm>
+            <a:off x="411480" y="1636776"/>
+            <a:ext cx="5212080" cy="246888"/>
+          </a:xfrm>
+          <a:prstGeom prst="rect">
+            <a:avLst/>
+          </a:prstGeom>
+          <a:noFill/>
+          <a:ln/>
+        </p:spPr>
+        <p:txBody>
+          <a:bodyPr wrap="square" rtlCol="0" anchor="ctr"/>
+          <a:lstStyle/>
+          <a:p>
+            <a:pPr marL="0" indent="0">
+              <a:buNone/>
+            </a:pPr>
+            <a:r>
+              <a:rPr lang="en-US" sz="950" dirty="0">
+                <a:solidFill>
+                  <a:srgbClr val="94A3B8"/>
+                </a:solidFill>
+                <a:latin typeface="Arial" pitchFamily="34" charset="0"/>
+                <a:ea typeface="Arial" pitchFamily="34" charset="-122"/>
+                <a:cs typeface="Arial" pitchFamily="34" charset="-120"/>
+              </a:rPr>
+              <a:t>키 없으면 진행 불가</a:t>
+            </a:r>
+            <a:endParaRPr lang="en-US" sz="950" dirty="0"/>
+          </a:p>
+        </p:txBody>
+      </p:sp>
+      <p:sp>
+        <p:nvSpPr>
+          <p:cNvPr id="10" name="Shape 8"/>
+          <p:cNvSpPr/>
+          <p:nvPr/>
+        </p:nvSpPr>
+        <p:spPr>
+          <a:xfrm>
+            <a:off x="274320" y="2212848"/>
+            <a:ext cx="5486400" cy="1325880"/>
+          </a:xfrm>
+          <a:prstGeom prst="rect">
+            <a:avLst/>
+          </a:prstGeom>
+          <a:solidFill>
+            <a:srgbClr val="FFFFFF"/>
+          </a:solidFill>
+          <a:ln w="15240">
+            <a:solidFill>
+              <a:srgbClr val="10B981"/>
+            </a:solidFill>
+            <a:prstDash val="solid"/>
+          </a:ln>
+          <a:effectLst>
+            <a:outerShdw blurRad="63500" dist="25400" dir="8100000" algn="bl" rotWithShape="0">
+              <a:srgbClr val="000000">
+                <a:alpha val="10000"/>
+              </a:srgbClr>
+            </a:outerShdw>
+          </a:effectLst>
+        </p:spPr>
+        <p:txBody>
+          <a:bodyPr/>
+          <a:lstStyle/>
+          <a:p>
+            <a:endParaRPr lang="ko-KR" altLang="en-US"/>
+          </a:p>
+        </p:txBody>
+      </p:sp>
+      <p:sp>
+        <p:nvSpPr>
+          <p:cNvPr id="11" name="Shape 9"/>
+          <p:cNvSpPr/>
+          <p:nvPr/>
+        </p:nvSpPr>
+        <p:spPr>
+          <a:xfrm>
+            <a:off x="274320" y="2212848"/>
+            <a:ext cx="5486400" cy="329184"/>
+          </a:xfrm>
+          <a:prstGeom prst="rect">
+            <a:avLst/>
+          </a:prstGeom>
+          <a:solidFill>
+            <a:srgbClr val="10B981"/>
+          </a:solidFill>
+          <a:ln w="12700">
+            <a:solidFill>
+              <a:srgbClr val="10B981"/>
+            </a:solidFill>
+            <a:prstDash val="solid"/>
+          </a:ln>
+        </p:spPr>
+        <p:txBody>
+          <a:bodyPr/>
+          <a:lstStyle/>
+          <a:p>
+            <a:endParaRPr lang="ko-KR" altLang="en-US"/>
+          </a:p>
+        </p:txBody>
+      </p:sp>
+      <p:sp>
+        <p:nvSpPr>
+          <p:cNvPr id="12" name="Text 10"/>
+          <p:cNvSpPr/>
+          <p:nvPr/>
+        </p:nvSpPr>
+        <p:spPr>
+          <a:xfrm>
+            <a:off x="384048" y="2212848"/>
+            <a:ext cx="5266944" cy="329184"/>
+          </a:xfrm>
+          <a:prstGeom prst="rect">
+            <a:avLst/>
+          </a:prstGeom>
+          <a:noFill/>
+          <a:ln/>
+        </p:spPr>
+        <p:txBody>
+          <a:bodyPr wrap="square" lIns="0" tIns="0" rIns="0" bIns="0" rtlCol="0" anchor="ctr"/>
+          <a:lstStyle/>
+          <a:p>
+            <a:pPr marL="0" indent="0">
+              <a:buNone/>
+            </a:pPr>
+            <a:r>
+              <a:rPr lang="en-US" sz="1100" b="1" dirty="0">
+                <a:solidFill>
+                  <a:srgbClr val="FFFFFF"/>
+                </a:solidFill>
+                <a:latin typeface="Arial" pitchFamily="34" charset="0"/>
+                <a:ea typeface="Arial" pitchFamily="34" charset="-122"/>
+                <a:cs typeface="Arial" pitchFamily="34" charset="-120"/>
+              </a:rPr>
+              <a:t>② 패키지 설치 (최초 1회)</a:t>
+            </a:r>
+            <a:endParaRPr lang="en-US" sz="1100" dirty="0"/>
+          </a:p>
+        </p:txBody>
+      </p:sp>
+      <p:sp>
+        <p:nvSpPr>
+          <p:cNvPr id="13" name="Text 11"/>
+          <p:cNvSpPr/>
+          <p:nvPr/>
+        </p:nvSpPr>
+        <p:spPr>
+          <a:xfrm>
+            <a:off x="411480" y="2615184"/>
+            <a:ext cx="5212080" cy="246888"/>
+          </a:xfrm>
+          <a:prstGeom prst="rect">
+            <a:avLst/>
+          </a:prstGeom>
+          <a:noFill/>
+          <a:ln/>
+        </p:spPr>
+        <p:txBody>
+          <a:bodyPr wrap="square" rtlCol="0" anchor="ctr"/>
+          <a:lstStyle/>
+          <a:p>
+            <a:pPr marL="0" indent="0">
+              <a:buNone/>
+            </a:pPr>
+            <a:r>
+              <a:rPr lang="en-US" sz="950" dirty="0">
+                <a:solidFill>
+                  <a:srgbClr val="111848"/>
+                </a:solidFill>
+                <a:latin typeface="Arial" pitchFamily="34" charset="0"/>
+                <a:ea typeface="Arial" pitchFamily="34" charset="-122"/>
+                <a:cs typeface="Arial" pitchFamily="34" charset="-120"/>
+              </a:rPr>
+              <a:t>!pip install -q google-genai python-dotenv</a:t>
+            </a:r>
+            <a:endParaRPr lang="en-US" sz="950" dirty="0"/>
+          </a:p>
+        </p:txBody>
+      </p:sp>
+      <p:sp>
+        <p:nvSpPr>
+          <p:cNvPr id="14" name="Text 12"/>
+          <p:cNvSpPr/>
+          <p:nvPr/>
+        </p:nvSpPr>
+        <p:spPr>
+          <a:xfrm>
+            <a:off x="411480" y="2889504"/>
+            <a:ext cx="5212080" cy="246888"/>
+          </a:xfrm>
+          <a:prstGeom prst="rect">
+            <a:avLst/>
+          </a:prstGeom>
+          <a:noFill/>
+          <a:ln/>
+        </p:spPr>
+        <p:txBody>
+          <a:bodyPr wrap="square" rtlCol="0" anchor="ctr"/>
+          <a:lstStyle/>
+          <a:p>
+            <a:pPr marL="0" indent="0">
+              <a:buNone/>
+            </a:pPr>
+            <a:r>
+              <a:rPr lang="en-US" sz="950" dirty="0">
+                <a:solidFill>
+                  <a:srgbClr val="94A3B8"/>
+                </a:solidFill>
+                <a:latin typeface="Arial" pitchFamily="34" charset="0"/>
+                <a:ea typeface="Arial" pitchFamily="34" charset="-122"/>
+                <a:cs typeface="Arial" pitchFamily="34" charset="-120"/>
+              </a:rPr>
+              <a:t>Colab 런타임 재시작 불필요</a:t>
+            </a:r>
+            <a:endParaRPr lang="en-US" sz="950" dirty="0"/>
+          </a:p>
+        </p:txBody>
+      </p:sp>
+      <p:sp>
+        <p:nvSpPr>
+          <p:cNvPr id="15" name="Shape 13"/>
+          <p:cNvSpPr/>
+          <p:nvPr/>
+        </p:nvSpPr>
+        <p:spPr>
+          <a:xfrm>
+            <a:off x="274320" y="3648456"/>
+            <a:ext cx="5486400" cy="1371600"/>
+          </a:xfrm>
+          <a:prstGeom prst="rect">
+            <a:avLst/>
+          </a:prstGeom>
+          <a:solidFill>
+            <a:srgbClr val="FFFFFF"/>
+          </a:solidFill>
+          <a:ln w="15240">
+            <a:solidFill>
+              <a:srgbClr val="2563EB"/>
+            </a:solidFill>
+            <a:prstDash val="solid"/>
+          </a:ln>
+          <a:effectLst>
+            <a:outerShdw blurRad="63500" dist="25400" dir="8100000" algn="bl" rotWithShape="0">
+              <a:srgbClr val="000000">
+                <a:alpha val="10000"/>
+              </a:srgbClr>
+            </a:outerShdw>
+          </a:effectLst>
+        </p:spPr>
+        <p:txBody>
+          <a:bodyPr/>
+          <a:lstStyle/>
+          <a:p>
+            <a:endParaRPr lang="ko-KR" altLang="en-US"/>
+          </a:p>
+        </p:txBody>
+      </p:sp>
+      <p:sp>
+        <p:nvSpPr>
+          <p:cNvPr id="16" name="Shape 14"/>
+          <p:cNvSpPr/>
+          <p:nvPr/>
+        </p:nvSpPr>
+        <p:spPr>
+          <a:xfrm>
+            <a:off x="274320" y="3648456"/>
+            <a:ext cx="5486400" cy="329184"/>
+          </a:xfrm>
+          <a:prstGeom prst="rect">
+            <a:avLst/>
+          </a:prstGeom>
+          <a:solidFill>
+            <a:srgbClr val="2563EB"/>
+          </a:solidFill>
+          <a:ln w="12700">
+            <a:solidFill>
+              <a:srgbClr val="2563EB"/>
+            </a:solidFill>
+            <a:prstDash val="solid"/>
+          </a:ln>
+        </p:spPr>
+        <p:txBody>
+          <a:bodyPr/>
+          <a:lstStyle/>
+          <a:p>
+            <a:endParaRPr lang="ko-KR" altLang="en-US"/>
+          </a:p>
+        </p:txBody>
+      </p:sp>
+      <p:sp>
+        <p:nvSpPr>
+          <p:cNvPr id="17" name="Text 15"/>
+          <p:cNvSpPr/>
+          <p:nvPr/>
+        </p:nvSpPr>
+        <p:spPr>
+          <a:xfrm>
+            <a:off x="384048" y="3648456"/>
+            <a:ext cx="5266944" cy="329184"/>
+          </a:xfrm>
+          <a:prstGeom prst="rect">
+            <a:avLst/>
+          </a:prstGeom>
+          <a:noFill/>
+          <a:ln/>
+        </p:spPr>
+        <p:txBody>
+          <a:bodyPr wrap="square" lIns="0" tIns="0" rIns="0" bIns="0" rtlCol="0" anchor="ctr"/>
+          <a:lstStyle/>
+          <a:p>
+            <a:pPr marL="0" indent="0">
+              <a:buNone/>
+            </a:pPr>
+            <a:r>
+              <a:rPr lang="en-US" sz="1100" b="1" dirty="0">
+                <a:solidFill>
+                  <a:srgbClr val="FFFFFF"/>
+                </a:solidFill>
+                <a:latin typeface="Arial" pitchFamily="34" charset="0"/>
+                <a:ea typeface="Arial" pitchFamily="34" charset="-122"/>
+                <a:cs typeface="Arial" pitchFamily="34" charset="-120"/>
+              </a:rPr>
+              <a:t>③ 모델 선택</a:t>
+            </a:r>
+            <a:endParaRPr lang="en-US" sz="1100" dirty="0"/>
+          </a:p>
+        </p:txBody>
+      </p:sp>
+      <p:sp>
+        <p:nvSpPr>
+          <p:cNvPr id="18" name="Text 16"/>
+          <p:cNvSpPr/>
+          <p:nvPr/>
+        </p:nvSpPr>
+        <p:spPr>
+          <a:xfrm>
+            <a:off x="411480" y="4050792"/>
+            <a:ext cx="5212080" cy="246888"/>
+          </a:xfrm>
+          <a:prstGeom prst="rect">
+            <a:avLst/>
+          </a:prstGeom>
+          <a:noFill/>
+          <a:ln/>
+        </p:spPr>
+        <p:txBody>
+          <a:bodyPr wrap="square" rtlCol="0" anchor="ctr"/>
+          <a:lstStyle/>
+          <a:p>
+            <a:pPr marL="0" indent="0">
+              <a:buNone/>
+            </a:pPr>
+            <a:r>
+              <a:rPr lang="en-US" sz="950" dirty="0">
+                <a:solidFill>
+                  <a:srgbClr val="111848"/>
+                </a:solidFill>
+                <a:latin typeface="Arial" pitchFamily="34" charset="0"/>
+                <a:ea typeface="Arial" pitchFamily="34" charset="-122"/>
+                <a:cs typeface="Arial" pitchFamily="34" charset="-120"/>
+              </a:rPr>
+              <a:t>MODEL = "gemini-2.5-flash-lite"</a:t>
+            </a:r>
+            <a:endParaRPr lang="en-US" sz="950" dirty="0"/>
+          </a:p>
+        </p:txBody>
+      </p:sp>
+      <p:sp>
+        <p:nvSpPr>
+          <p:cNvPr id="19" name="Text 17"/>
+          <p:cNvSpPr/>
+          <p:nvPr/>
+        </p:nvSpPr>
+        <p:spPr>
+          <a:xfrm>
+            <a:off x="411480" y="4325112"/>
+            <a:ext cx="5212080" cy="246888"/>
+          </a:xfrm>
+          <a:prstGeom prst="rect">
+            <a:avLst/>
+          </a:prstGeom>
+          <a:noFill/>
+          <a:ln/>
+        </p:spPr>
+        <p:txBody>
+          <a:bodyPr wrap="square" rtlCol="0" anchor="ctr"/>
+          <a:lstStyle/>
+          <a:p>
+            <a:pPr marL="0" indent="0">
+              <a:buNone/>
+            </a:pPr>
+            <a:r>
+              <a:rPr lang="en-US" sz="950" dirty="0">
+                <a:solidFill>
+                  <a:srgbClr val="111848"/>
+                </a:solidFill>
+                <a:latin typeface="Arial" pitchFamily="34" charset="0"/>
+                <a:ea typeface="Arial" pitchFamily="34" charset="-122"/>
+                <a:cs typeface="Arial" pitchFamily="34" charset="-120"/>
+              </a:rPr>
+              <a:t>client 초기화 및 API 키 로드</a:t>
+            </a:r>
+            <a:endParaRPr lang="en-US" sz="950" dirty="0"/>
+          </a:p>
+        </p:txBody>
+      </p:sp>
+      <p:sp>
+        <p:nvSpPr>
+          <p:cNvPr id="20" name="Text 18"/>
+          <p:cNvSpPr/>
+          <p:nvPr/>
+        </p:nvSpPr>
+        <p:spPr>
+          <a:xfrm>
+            <a:off x="411480" y="4599432"/>
+            <a:ext cx="5212080" cy="246888"/>
+          </a:xfrm>
+          <a:prstGeom prst="rect">
+            <a:avLst/>
+          </a:prstGeom>
+          <a:noFill/>
+          <a:ln/>
+        </p:spPr>
+        <p:txBody>
+          <a:bodyPr wrap="square" rtlCol="0" anchor="ctr"/>
+          <a:lstStyle/>
+          <a:p>
+            <a:pPr marL="0" indent="0">
+              <a:buNone/>
+            </a:pPr>
+            <a:r>
+              <a:rPr lang="en-US" sz="950" dirty="0">
+                <a:solidFill>
+                  <a:srgbClr val="94A3B8"/>
+                </a:solidFill>
+                <a:latin typeface="Arial" pitchFamily="34" charset="0"/>
+                <a:ea typeface="Arial" pitchFamily="34" charset="-122"/>
+                <a:cs typeface="Arial" pitchFamily="34" charset="-120"/>
+              </a:rPr>
+              <a:t>아래 코드를 Cell 2~5 순서대로 실행</a:t>
+            </a:r>
+            <a:endParaRPr lang="en-US" sz="950" dirty="0"/>
+          </a:p>
+        </p:txBody>
+      </p:sp>
+      <p:sp>
+        <p:nvSpPr>
+          <p:cNvPr id="21" name="Text 19"/>
+          <p:cNvSpPr/>
+          <p:nvPr/>
+        </p:nvSpPr>
+        <p:spPr>
+          <a:xfrm>
+            <a:off x="6035040" y="685800"/>
+            <a:ext cx="5852160" cy="320040"/>
+          </a:xfrm>
+          <a:prstGeom prst="rect">
+            <a:avLst/>
+          </a:prstGeom>
+          <a:noFill/>
+          <a:ln/>
+        </p:spPr>
+        <p:txBody>
+          <a:bodyPr wrap="square" rtlCol="0" anchor="ctr"/>
+          <a:lstStyle/>
+          <a:p>
+            <a:pPr marL="0" indent="0">
+              <a:buNone/>
+            </a:pPr>
+            <a:r>
+              <a:rPr lang="en-US" sz="1200" b="1" dirty="0">
+                <a:solidFill>
+                  <a:srgbClr val="111848"/>
+                </a:solidFill>
+                <a:latin typeface="Arial" pitchFamily="34" charset="0"/>
+                <a:ea typeface="Arial" pitchFamily="34" charset="-122"/>
+                <a:cs typeface="Arial" pitchFamily="34" charset="-120"/>
+              </a:rPr>
+              <a:t>실행할 코드 (Cell 2~5)</a:t>
+            </a:r>
+            <a:endParaRPr lang="en-US" sz="1200" dirty="0"/>
+          </a:p>
+        </p:txBody>
+      </p:sp>
+      <p:sp>
+        <p:nvSpPr>
+          <p:cNvPr id="47" name="Text 45"/>
+          <p:cNvSpPr/>
+          <p:nvPr/>
+        </p:nvSpPr>
+        <p:spPr>
+          <a:xfrm>
+            <a:off x="6172200" y="5271914"/>
+            <a:ext cx="5577840" cy="228600"/>
+          </a:xfrm>
+          <a:prstGeom prst="rect">
+            <a:avLst/>
+          </a:prstGeom>
+          <a:noFill/>
+          <a:ln/>
+        </p:spPr>
+        <p:txBody>
+          <a:bodyPr wrap="square" lIns="0" tIns="0" rIns="0" bIns="0" rtlCol="0" anchor="ctr"/>
+          <a:lstStyle/>
+          <a:p>
+            <a:pPr marL="0" indent="0">
+              <a:buNone/>
+            </a:pPr>
+            <a:r>
+              <a:rPr lang="en-US" sz="950" dirty="0">
+                <a:solidFill>
+                  <a:srgbClr val="E6EDF3"/>
+                </a:solidFill>
+                <a:latin typeface="Consolas" pitchFamily="34" charset="0"/>
+                <a:ea typeface="Consolas" pitchFamily="34" charset="-122"/>
+                <a:cs typeface="Consolas" pitchFamily="34" charset="-120"/>
+              </a:rPr>
+              <a:t>    config=config).text</a:t>
+            </a:r>
+            <a:endParaRPr lang="en-US" sz="950" dirty="0"/>
+          </a:p>
+        </p:txBody>
+      </p:sp>
+      <p:sp>
+        <p:nvSpPr>
+          <p:cNvPr id="48" name="Shape 46"/>
+          <p:cNvSpPr/>
+          <p:nvPr/>
+        </p:nvSpPr>
+        <p:spPr>
+          <a:xfrm>
+            <a:off x="274320" y="5138928"/>
+            <a:ext cx="5486400" cy="420624"/>
+          </a:xfrm>
+          <a:prstGeom prst="rect">
+            <a:avLst/>
+          </a:prstGeom>
+          <a:solidFill>
+            <a:srgbClr val="FEF3C7"/>
+          </a:solidFill>
+          <a:ln w="12700">
+            <a:solidFill>
+              <a:srgbClr val="F59E0B"/>
+            </a:solidFill>
+            <a:prstDash val="solid"/>
+          </a:ln>
+        </p:spPr>
+        <p:txBody>
+          <a:bodyPr/>
+          <a:lstStyle/>
+          <a:p>
+            <a:endParaRPr lang="ko-KR" altLang="en-US"/>
+          </a:p>
+        </p:txBody>
+      </p:sp>
+      <p:sp>
+        <p:nvSpPr>
+          <p:cNvPr id="49" name="Text 47"/>
+          <p:cNvSpPr/>
+          <p:nvPr/>
+        </p:nvSpPr>
+        <p:spPr>
+          <a:xfrm>
+            <a:off x="411480" y="5138928"/>
+            <a:ext cx="5212080" cy="420624"/>
+          </a:xfrm>
+          <a:prstGeom prst="rect">
+            <a:avLst/>
+          </a:prstGeom>
+          <a:noFill/>
+          <a:ln/>
+        </p:spPr>
+        <p:txBody>
+          <a:bodyPr wrap="square" rtlCol="0" anchor="ctr"/>
+          <a:lstStyle/>
+          <a:p>
+            <a:pPr marL="0" indent="0">
+              <a:buNone/>
+            </a:pPr>
+            <a:r>
+              <a:rPr lang="en-US" sz="1000" dirty="0">
+                <a:solidFill>
+                  <a:srgbClr val="92400E"/>
+                </a:solidFill>
+                <a:latin typeface="Arial" pitchFamily="34" charset="0"/>
+                <a:ea typeface="Arial" pitchFamily="34" charset="-122"/>
+                <a:cs typeface="Arial" pitchFamily="34" charset="-120"/>
+              </a:rPr>
+              <a:t>셀을 위에서 아래로 순서대로 실행 — 한 셀씩 Shift+Enter</a:t>
+            </a:r>
+            <a:endParaRPr lang="en-US" sz="1000" dirty="0"/>
+          </a:p>
+        </p:txBody>
+      </p:sp>
+      <p:sp>
+        <p:nvSpPr>
+          <p:cNvPr id="23" name="Text 21"/>
+          <p:cNvSpPr/>
+          <p:nvPr/>
+        </p:nvSpPr>
+        <p:spPr>
+          <a:xfrm>
+            <a:off x="6172200" y="704088"/>
+            <a:ext cx="5577840" cy="228600"/>
+          </a:xfrm>
+          <a:prstGeom prst="rect">
+            <a:avLst/>
+          </a:prstGeom>
+          <a:noFill/>
+          <a:ln/>
+        </p:spPr>
+        <p:txBody>
+          <a:bodyPr wrap="square" lIns="0" tIns="0" rIns="0" bIns="0" rtlCol="0" anchor="ctr"/>
+          <a:lstStyle/>
+          <a:p>
+            <a:pPr marL="0" indent="0">
+              <a:buNone/>
+            </a:pPr>
+            <a:r>
+              <a:rPr lang="en-US" sz="950" dirty="0">
+                <a:solidFill>
+                  <a:srgbClr val="8B949E"/>
+                </a:solidFill>
+                <a:latin typeface="Consolas" pitchFamily="34" charset="0"/>
+                <a:ea typeface="Consolas" pitchFamily="34" charset="-122"/>
+                <a:cs typeface="Consolas" pitchFamily="34" charset="-120"/>
+              </a:rPr>
+              <a:t># Cell 2: 패키지 설치</a:t>
+            </a:r>
+            <a:endParaRPr lang="en-US" sz="950" dirty="0"/>
+          </a:p>
+        </p:txBody>
+      </p:sp>
+      <p:sp>
+        <p:nvSpPr>
+          <p:cNvPr id="24" name="Text 22"/>
+          <p:cNvSpPr/>
+          <p:nvPr/>
+        </p:nvSpPr>
+        <p:spPr>
+          <a:xfrm>
+            <a:off x="6172200" y="950976"/>
+            <a:ext cx="5577840" cy="228600"/>
+          </a:xfrm>
+          <a:prstGeom prst="rect">
+            <a:avLst/>
+          </a:prstGeom>
+          <a:noFill/>
+          <a:ln/>
+        </p:spPr>
+        <p:txBody>
+          <a:bodyPr wrap="square" lIns="0" tIns="0" rIns="0" bIns="0" rtlCol="0" anchor="ctr"/>
+          <a:lstStyle/>
+          <a:p>
+            <a:pPr marL="0" indent="0">
+              <a:buNone/>
+            </a:pPr>
+            <a:r>
+              <a:rPr lang="en-US" sz="950" dirty="0">
+                <a:solidFill>
+                  <a:srgbClr val="E6EDF3"/>
+                </a:solidFill>
+                <a:latin typeface="Consolas" pitchFamily="34" charset="0"/>
+                <a:ea typeface="Consolas" pitchFamily="34" charset="-122"/>
+                <a:cs typeface="Consolas" pitchFamily="34" charset="-120"/>
+              </a:rPr>
+              <a:t>!pip install -q google-genai python-dotenv</a:t>
+            </a:r>
+            <a:endParaRPr lang="en-US" sz="950" dirty="0"/>
+          </a:p>
+        </p:txBody>
+      </p:sp>
+      <p:sp>
+        <p:nvSpPr>
+          <p:cNvPr id="25" name="Text 23"/>
+          <p:cNvSpPr/>
+          <p:nvPr/>
+        </p:nvSpPr>
+        <p:spPr>
+          <a:xfrm>
+            <a:off x="6172200" y="1197864"/>
+            <a:ext cx="5577840" cy="228600"/>
+          </a:xfrm>
+          <a:prstGeom prst="rect">
+            <a:avLst/>
+          </a:prstGeom>
+          <a:noFill/>
+          <a:ln/>
+        </p:spPr>
+        <p:txBody>
+          <a:bodyPr wrap="square" lIns="0" tIns="0" rIns="0" bIns="0" rtlCol="0" anchor="ctr"/>
+          <a:lstStyle/>
+          <a:p>
+            <a:pPr marL="0" indent="0">
+              <a:buNone/>
+            </a:pPr>
+            <a:endParaRPr lang="en-US" sz="950" dirty="0"/>
+          </a:p>
+        </p:txBody>
+      </p:sp>
+      <p:sp>
+        <p:nvSpPr>
+          <p:cNvPr id="26" name="Text 24"/>
+          <p:cNvSpPr/>
+          <p:nvPr/>
+        </p:nvSpPr>
+        <p:spPr>
+          <a:xfrm>
+            <a:off x="6172200" y="1444752"/>
+            <a:ext cx="5577840" cy="228600"/>
+          </a:xfrm>
+          <a:prstGeom prst="rect">
+            <a:avLst/>
+          </a:prstGeom>
+          <a:noFill/>
+          <a:ln/>
+        </p:spPr>
+        <p:txBody>
+          <a:bodyPr wrap="square" lIns="0" tIns="0" rIns="0" bIns="0" rtlCol="0" anchor="ctr"/>
+          <a:lstStyle/>
+          <a:p>
+            <a:pPr marL="0" indent="0">
+              <a:buNone/>
+            </a:pPr>
+            <a:r>
+              <a:rPr lang="en-US" sz="950" dirty="0">
+                <a:solidFill>
+                  <a:srgbClr val="8B949E"/>
+                </a:solidFill>
+                <a:latin typeface="Consolas" pitchFamily="34" charset="0"/>
+                <a:ea typeface="Consolas" pitchFamily="34" charset="-122"/>
+                <a:cs typeface="Consolas" pitchFamily="34" charset="-120"/>
+              </a:rPr>
+              <a:t># Cell 3: API 키 + 클라이언트 초기화</a:t>
+            </a:r>
+            <a:endParaRPr lang="en-US" sz="950" dirty="0"/>
+          </a:p>
+        </p:txBody>
+      </p:sp>
+      <p:sp>
+        <p:nvSpPr>
+          <p:cNvPr id="27" name="Text 25"/>
+          <p:cNvSpPr/>
+          <p:nvPr/>
+        </p:nvSpPr>
+        <p:spPr>
+          <a:xfrm>
+            <a:off x="6172200" y="1691640"/>
+            <a:ext cx="5577840" cy="228600"/>
+          </a:xfrm>
+          <a:prstGeom prst="rect">
+            <a:avLst/>
+          </a:prstGeom>
+          <a:noFill/>
+          <a:ln/>
+        </p:spPr>
+        <p:txBody>
+          <a:bodyPr wrap="square" lIns="0" tIns="0" rIns="0" bIns="0" rtlCol="0" anchor="ctr"/>
+          <a:lstStyle/>
+          <a:p>
+            <a:pPr marL="0" indent="0">
+              <a:buNone/>
+            </a:pPr>
+            <a:r>
+              <a:rPr lang="en-US" sz="950" dirty="0">
+                <a:solidFill>
+                  <a:srgbClr val="E6EDF3"/>
+                </a:solidFill>
+                <a:latin typeface="Consolas" pitchFamily="34" charset="0"/>
+                <a:ea typeface="Consolas" pitchFamily="34" charset="-122"/>
+                <a:cs typeface="Consolas" pitchFamily="34" charset="-120"/>
+              </a:rPr>
+              <a:t>import </a:t>
+            </a:r>
+            <a:r>
+              <a:rPr lang="en-US" sz="950" dirty="0" err="1">
+                <a:solidFill>
+                  <a:srgbClr val="E6EDF3"/>
+                </a:solidFill>
+                <a:latin typeface="Consolas" pitchFamily="34" charset="0"/>
+                <a:ea typeface="Consolas" pitchFamily="34" charset="-122"/>
+                <a:cs typeface="Consolas" pitchFamily="34" charset="-120"/>
+              </a:rPr>
+              <a:t>os</a:t>
+            </a:r>
+            <a:r>
+              <a:rPr lang="en-US" sz="950" dirty="0">
+                <a:solidFill>
+                  <a:srgbClr val="E6EDF3"/>
+                </a:solidFill>
+                <a:latin typeface="Consolas" pitchFamily="34" charset="0"/>
+                <a:ea typeface="Consolas" pitchFamily="34" charset="-122"/>
+                <a:cs typeface="Consolas" pitchFamily="34" charset="-120"/>
+              </a:rPr>
+              <a:t>, google-</a:t>
+            </a:r>
+            <a:r>
+              <a:rPr lang="en-US" sz="950" dirty="0" err="1">
+                <a:solidFill>
+                  <a:srgbClr val="E6EDF3"/>
+                </a:solidFill>
+                <a:latin typeface="Consolas" pitchFamily="34" charset="0"/>
+                <a:ea typeface="Consolas" pitchFamily="34" charset="-122"/>
+                <a:cs typeface="Consolas" pitchFamily="34" charset="-120"/>
+              </a:rPr>
+              <a:t>genai</a:t>
+            </a:r>
+            <a:r>
+              <a:rPr lang="en-US" sz="950" dirty="0">
+                <a:solidFill>
+                  <a:srgbClr val="E6EDF3"/>
+                </a:solidFill>
+                <a:latin typeface="Consolas" pitchFamily="34" charset="0"/>
+                <a:ea typeface="Consolas" pitchFamily="34" charset="-122"/>
+                <a:cs typeface="Consolas" pitchFamily="34" charset="-120"/>
+              </a:rPr>
+              <a:t> as </a:t>
+            </a:r>
+            <a:r>
+              <a:rPr lang="en-US" sz="950" dirty="0" err="1">
+                <a:solidFill>
+                  <a:srgbClr val="E6EDF3"/>
+                </a:solidFill>
+                <a:latin typeface="Consolas" pitchFamily="34" charset="0"/>
+                <a:ea typeface="Consolas" pitchFamily="34" charset="-122"/>
+                <a:cs typeface="Consolas" pitchFamily="34" charset="-120"/>
+              </a:rPr>
+              <a:t>genai</a:t>
+            </a:r>
+            <a:endParaRPr lang="en-US" sz="950" dirty="0"/>
+          </a:p>
+        </p:txBody>
+      </p:sp>
+      <p:sp>
+        <p:nvSpPr>
+          <p:cNvPr id="29" name="Text 27"/>
+          <p:cNvSpPr/>
+          <p:nvPr/>
+        </p:nvSpPr>
+        <p:spPr>
+          <a:xfrm>
+            <a:off x="6042991" y="1926999"/>
+            <a:ext cx="5577840" cy="228600"/>
+          </a:xfrm>
+          <a:prstGeom prst="rect">
+            <a:avLst/>
+          </a:prstGeom>
+          <a:noFill/>
+          <a:ln/>
+        </p:spPr>
+        <p:txBody>
+          <a:bodyPr wrap="square" lIns="0" tIns="0" rIns="0" bIns="0" rtlCol="0" anchor="ctr"/>
+          <a:lstStyle/>
+          <a:p>
+            <a:pPr marL="0" indent="0">
+              <a:buNone/>
+            </a:pPr>
+            <a:r>
+              <a:rPr lang="en-US" sz="950" dirty="0">
+                <a:solidFill>
+                  <a:srgbClr val="E6EDF3"/>
+                </a:solidFill>
+                <a:latin typeface="Consolas" pitchFamily="34" charset="0"/>
+                <a:ea typeface="Consolas" pitchFamily="34" charset="-122"/>
+                <a:cs typeface="Consolas" pitchFamily="34" charset="-120"/>
+              </a:rPr>
+              <a:t>  from google.colab import userdata</a:t>
+            </a:r>
+            <a:endParaRPr lang="en-US" sz="950" dirty="0"/>
+          </a:p>
+        </p:txBody>
+      </p:sp>
+      <p:sp>
+        <p:nvSpPr>
+          <p:cNvPr id="30" name="Text 28"/>
+          <p:cNvSpPr/>
+          <p:nvPr/>
+        </p:nvSpPr>
+        <p:spPr>
+          <a:xfrm>
+            <a:off x="6062870" y="2422365"/>
+            <a:ext cx="5577840" cy="228600"/>
+          </a:xfrm>
+          <a:prstGeom prst="rect">
+            <a:avLst/>
+          </a:prstGeom>
+          <a:noFill/>
+          <a:ln/>
+        </p:spPr>
+        <p:txBody>
+          <a:bodyPr wrap="square" lIns="0" tIns="0" rIns="0" bIns="0" rtlCol="0" anchor="ctr"/>
+          <a:lstStyle/>
+          <a:p>
+            <a:pPr marL="0" indent="0">
+              <a:buNone/>
+            </a:pPr>
+            <a:r>
+              <a:rPr lang="en-US" sz="950" dirty="0">
+                <a:solidFill>
+                  <a:srgbClr val="E6EDF3"/>
+                </a:solidFill>
+                <a:latin typeface="Consolas" pitchFamily="34" charset="0"/>
+                <a:ea typeface="Consolas" pitchFamily="34" charset="-122"/>
+                <a:cs typeface="Consolas" pitchFamily="34" charset="-120"/>
+              </a:rPr>
+              <a:t>  GEMINI_API_KEY=userdata.get('GEMINI_API_KEY')</a:t>
+            </a:r>
+            <a:endParaRPr lang="en-US" sz="950" dirty="0"/>
+          </a:p>
+        </p:txBody>
+      </p:sp>
+      <p:sp>
+        <p:nvSpPr>
+          <p:cNvPr id="36" name="Text 34"/>
+          <p:cNvSpPr/>
+          <p:nvPr/>
+        </p:nvSpPr>
+        <p:spPr>
+          <a:xfrm>
+            <a:off x="6172200" y="3913632"/>
+            <a:ext cx="5577840" cy="228600"/>
+          </a:xfrm>
+          <a:prstGeom prst="rect">
+            <a:avLst/>
+          </a:prstGeom>
+          <a:noFill/>
+          <a:ln/>
+        </p:spPr>
+        <p:txBody>
+          <a:bodyPr wrap="square" lIns="0" tIns="0" rIns="0" bIns="0" rtlCol="0" anchor="ctr"/>
+          <a:lstStyle/>
+          <a:p>
+            <a:pPr marL="0" indent="0">
+              <a:buNone/>
+            </a:pPr>
+            <a:endParaRPr lang="en-US" sz="950" dirty="0"/>
+          </a:p>
+        </p:txBody>
+      </p:sp>
+      <p:sp>
+        <p:nvSpPr>
+          <p:cNvPr id="37" name="Text 35"/>
+          <p:cNvSpPr/>
+          <p:nvPr/>
+        </p:nvSpPr>
+        <p:spPr>
+          <a:xfrm>
+            <a:off x="6192079" y="2878373"/>
+            <a:ext cx="5577840" cy="228600"/>
+          </a:xfrm>
+          <a:prstGeom prst="rect">
+            <a:avLst/>
+          </a:prstGeom>
+          <a:noFill/>
+          <a:ln/>
+        </p:spPr>
+        <p:txBody>
+          <a:bodyPr wrap="square" lIns="0" tIns="0" rIns="0" bIns="0" rtlCol="0" anchor="ctr"/>
+          <a:lstStyle/>
+          <a:p>
+            <a:pPr marL="0" indent="0">
+              <a:buNone/>
+            </a:pPr>
+            <a:r>
+              <a:rPr lang="en-US" sz="950" dirty="0">
+                <a:solidFill>
+                  <a:srgbClr val="F59E0B"/>
+                </a:solidFill>
+                <a:latin typeface="Consolas" pitchFamily="34" charset="0"/>
+                <a:ea typeface="Consolas" pitchFamily="34" charset="-122"/>
+                <a:cs typeface="Consolas" pitchFamily="34" charset="-120"/>
+              </a:rPr>
+              <a:t>MODEL = 'gemini-2.5-flash-lite'</a:t>
+            </a:r>
+            <a:endParaRPr lang="en-US" sz="950" dirty="0"/>
+          </a:p>
+        </p:txBody>
+      </p:sp>
+      <p:sp>
+        <p:nvSpPr>
+          <p:cNvPr id="38" name="Text 36"/>
+          <p:cNvSpPr/>
+          <p:nvPr/>
+        </p:nvSpPr>
+        <p:spPr>
+          <a:xfrm>
+            <a:off x="6162260" y="3254469"/>
+            <a:ext cx="5577840" cy="228600"/>
+          </a:xfrm>
+          <a:prstGeom prst="rect">
+            <a:avLst/>
+          </a:prstGeom>
+          <a:noFill/>
+          <a:ln/>
+        </p:spPr>
+        <p:txBody>
+          <a:bodyPr wrap="square" lIns="0" tIns="0" rIns="0" bIns="0" rtlCol="0" anchor="ctr"/>
+          <a:lstStyle/>
+          <a:p>
+            <a:r>
+              <a:rPr lang="en-US" sz="950" dirty="0">
+                <a:solidFill>
+                  <a:srgbClr val="E6EDF3"/>
+                </a:solidFill>
+                <a:latin typeface="Consolas" pitchFamily="34" charset="0"/>
+                <a:ea typeface="Consolas" pitchFamily="34" charset="-122"/>
+                <a:cs typeface="Consolas" pitchFamily="34" charset="-120"/>
+              </a:rPr>
+              <a:t>client = </a:t>
+            </a:r>
+            <a:r>
+              <a:rPr lang="en-US" sz="950" dirty="0" err="1">
+                <a:solidFill>
+                  <a:srgbClr val="E6EDF3"/>
+                </a:solidFill>
+                <a:latin typeface="Consolas" pitchFamily="34" charset="0"/>
+                <a:ea typeface="Consolas" pitchFamily="34" charset="-122"/>
+                <a:cs typeface="Consolas" pitchFamily="34" charset="-120"/>
+              </a:rPr>
+              <a:t>genai.Client</a:t>
+            </a:r>
+            <a:r>
+              <a:rPr lang="en-US" sz="950" dirty="0">
+                <a:solidFill>
+                  <a:srgbClr val="E6EDF3"/>
+                </a:solidFill>
+                <a:latin typeface="Consolas" pitchFamily="34" charset="0"/>
+                <a:ea typeface="Consolas" pitchFamily="34" charset="-122"/>
+                <a:cs typeface="Consolas" pitchFamily="34" charset="-120"/>
+              </a:rPr>
+              <a:t>(</a:t>
+            </a:r>
+            <a:r>
+              <a:rPr lang="en-US" sz="950" dirty="0" err="1">
+                <a:solidFill>
+                  <a:srgbClr val="E6EDF3"/>
+                </a:solidFill>
+                <a:latin typeface="Consolas" pitchFamily="34" charset="0"/>
+                <a:ea typeface="Consolas" pitchFamily="34" charset="-122"/>
+                <a:cs typeface="Consolas" pitchFamily="34" charset="-120"/>
+              </a:rPr>
+              <a:t>api_key</a:t>
+            </a:r>
+            <a:r>
+              <a:rPr lang="en-US" sz="950" dirty="0">
+                <a:solidFill>
+                  <a:srgbClr val="E6EDF3"/>
+                </a:solidFill>
+                <a:latin typeface="Consolas" pitchFamily="34" charset="0"/>
+                <a:ea typeface="Consolas" pitchFamily="34" charset="-122"/>
+                <a:cs typeface="Consolas" pitchFamily="34" charset="-120"/>
+              </a:rPr>
+              <a:t>=GEMINI_API_KEY)</a:t>
+            </a:r>
+            <a:endParaRPr lang="en-US" sz="950" dirty="0"/>
+          </a:p>
+        </p:txBody>
+      </p:sp>
+      <p:sp>
+        <p:nvSpPr>
+          <p:cNvPr id="39" name="Text 37"/>
+          <p:cNvSpPr/>
+          <p:nvPr/>
+        </p:nvSpPr>
+        <p:spPr>
+          <a:xfrm>
+            <a:off x="6172200" y="4654296"/>
+            <a:ext cx="5577840" cy="228600"/>
+          </a:xfrm>
+          <a:prstGeom prst="rect">
+            <a:avLst/>
+          </a:prstGeom>
+          <a:noFill/>
+          <a:ln/>
+        </p:spPr>
+        <p:txBody>
+          <a:bodyPr wrap="square" lIns="0" tIns="0" rIns="0" bIns="0" rtlCol="0" anchor="ctr"/>
+          <a:lstStyle/>
+          <a:p>
+            <a:pPr marL="0" indent="0">
+              <a:buNone/>
+            </a:pPr>
+            <a:endParaRPr lang="en-US" sz="950" dirty="0"/>
+          </a:p>
+        </p:txBody>
+      </p:sp>
+      <p:sp>
+        <p:nvSpPr>
+          <p:cNvPr id="40" name="Text 38"/>
+          <p:cNvSpPr/>
+          <p:nvPr/>
+        </p:nvSpPr>
+        <p:spPr>
+          <a:xfrm>
+            <a:off x="6172200" y="3569342"/>
+            <a:ext cx="5577840" cy="228600"/>
+          </a:xfrm>
+          <a:prstGeom prst="rect">
+            <a:avLst/>
+          </a:prstGeom>
+          <a:noFill/>
+          <a:ln/>
+        </p:spPr>
+        <p:txBody>
+          <a:bodyPr wrap="square" lIns="0" tIns="0" rIns="0" bIns="0" rtlCol="0" anchor="ctr"/>
+          <a:lstStyle/>
+          <a:p>
+            <a:pPr marL="0" indent="0">
+              <a:buNone/>
+            </a:pPr>
+            <a:r>
+              <a:rPr lang="en-US" sz="950" dirty="0">
+                <a:solidFill>
+                  <a:srgbClr val="8B949E"/>
+                </a:solidFill>
+                <a:latin typeface="Consolas" pitchFamily="34" charset="0"/>
+                <a:ea typeface="Consolas" pitchFamily="34" charset="-122"/>
+                <a:cs typeface="Consolas" pitchFamily="34" charset="-120"/>
+              </a:rPr>
+              <a:t># Cell 4: ask() 헬퍼 함수</a:t>
+            </a:r>
+            <a:endParaRPr lang="en-US" sz="950" dirty="0"/>
+          </a:p>
+        </p:txBody>
+      </p:sp>
+      <p:sp>
+        <p:nvSpPr>
+          <p:cNvPr id="41" name="Text 39"/>
+          <p:cNvSpPr/>
+          <p:nvPr/>
+        </p:nvSpPr>
+        <p:spPr>
+          <a:xfrm>
+            <a:off x="6172200" y="3816230"/>
+            <a:ext cx="5577840" cy="228600"/>
+          </a:xfrm>
+          <a:prstGeom prst="rect">
+            <a:avLst/>
+          </a:prstGeom>
+          <a:noFill/>
+          <a:ln/>
+        </p:spPr>
+        <p:txBody>
+          <a:bodyPr wrap="square" lIns="0" tIns="0" rIns="0" bIns="0" rtlCol="0" anchor="ctr"/>
+          <a:lstStyle/>
+          <a:p>
+            <a:pPr marL="0" indent="0">
+              <a:buNone/>
+            </a:pPr>
+            <a:r>
+              <a:rPr lang="en-US" sz="950" dirty="0">
+                <a:solidFill>
+                  <a:srgbClr val="E6EDF3"/>
+                </a:solidFill>
+                <a:latin typeface="Consolas" pitchFamily="34" charset="0"/>
+                <a:ea typeface="Consolas" pitchFamily="34" charset="-122"/>
+                <a:cs typeface="Consolas" pitchFamily="34" charset="-120"/>
+              </a:rPr>
+              <a:t>def ask(prompt, system=None):</a:t>
+            </a:r>
+            <a:endParaRPr lang="en-US" sz="950" dirty="0"/>
+          </a:p>
+        </p:txBody>
+      </p:sp>
+      <p:sp>
+        <p:nvSpPr>
+          <p:cNvPr id="42" name="Text 40"/>
+          <p:cNvSpPr/>
+          <p:nvPr/>
+        </p:nvSpPr>
+        <p:spPr>
+          <a:xfrm>
+            <a:off x="6172200" y="4063118"/>
+            <a:ext cx="5577840" cy="228600"/>
+          </a:xfrm>
+          <a:prstGeom prst="rect">
+            <a:avLst/>
+          </a:prstGeom>
+          <a:noFill/>
+          <a:ln/>
+        </p:spPr>
+        <p:txBody>
+          <a:bodyPr wrap="square" lIns="0" tIns="0" rIns="0" bIns="0" rtlCol="0" anchor="ctr"/>
+          <a:lstStyle/>
+          <a:p>
+            <a:pPr marL="0" indent="0">
+              <a:buNone/>
+            </a:pPr>
+            <a:r>
+              <a:rPr lang="en-US" sz="950" dirty="0">
+                <a:solidFill>
+                  <a:srgbClr val="E6EDF3"/>
+                </a:solidFill>
+                <a:latin typeface="Consolas" pitchFamily="34" charset="0"/>
+                <a:ea typeface="Consolas" pitchFamily="34" charset="-122"/>
+                <a:cs typeface="Consolas" pitchFamily="34" charset="-120"/>
+              </a:rPr>
+              <a:t>  from google.genai import types</a:t>
+            </a:r>
+            <a:endParaRPr lang="en-US" sz="950" dirty="0"/>
+          </a:p>
+        </p:txBody>
+      </p:sp>
+      <p:sp>
+        <p:nvSpPr>
+          <p:cNvPr id="43" name="Text 41"/>
+          <p:cNvSpPr/>
+          <p:nvPr/>
+        </p:nvSpPr>
+        <p:spPr>
+          <a:xfrm>
+            <a:off x="6172200" y="4310006"/>
+            <a:ext cx="5577840" cy="228600"/>
+          </a:xfrm>
+          <a:prstGeom prst="rect">
+            <a:avLst/>
+          </a:prstGeom>
+          <a:noFill/>
+          <a:ln/>
+        </p:spPr>
+        <p:txBody>
+          <a:bodyPr wrap="square" lIns="0" tIns="0" rIns="0" bIns="0" rtlCol="0" anchor="ctr"/>
+          <a:lstStyle/>
+          <a:p>
+            <a:pPr marL="0" indent="0">
+              <a:buNone/>
+            </a:pPr>
+            <a:r>
+              <a:rPr lang="en-US" sz="950" dirty="0">
+                <a:solidFill>
+                  <a:srgbClr val="E6EDF3"/>
+                </a:solidFill>
+                <a:latin typeface="Consolas" pitchFamily="34" charset="0"/>
+                <a:ea typeface="Consolas" pitchFamily="34" charset="-122"/>
+                <a:cs typeface="Consolas" pitchFamily="34" charset="-120"/>
+              </a:rPr>
+              <a:t>  config = types.GenerateContentConfig(</a:t>
+            </a:r>
+            <a:endParaRPr lang="en-US" sz="950" dirty="0"/>
+          </a:p>
+        </p:txBody>
+      </p:sp>
+      <p:sp>
+        <p:nvSpPr>
+          <p:cNvPr id="44" name="Text 42"/>
+          <p:cNvSpPr/>
+          <p:nvPr/>
+        </p:nvSpPr>
+        <p:spPr>
+          <a:xfrm>
+            <a:off x="6172200" y="4556894"/>
+            <a:ext cx="5577840" cy="228600"/>
+          </a:xfrm>
+          <a:prstGeom prst="rect">
+            <a:avLst/>
+          </a:prstGeom>
+          <a:noFill/>
+          <a:ln/>
+        </p:spPr>
+        <p:txBody>
+          <a:bodyPr wrap="square" lIns="0" tIns="0" rIns="0" bIns="0" rtlCol="0" anchor="ctr"/>
+          <a:lstStyle/>
+          <a:p>
+            <a:pPr marL="0" indent="0">
+              <a:buNone/>
+            </a:pPr>
+            <a:r>
+              <a:rPr lang="en-US" sz="950" dirty="0">
+                <a:solidFill>
+                  <a:srgbClr val="E6EDF3"/>
+                </a:solidFill>
+                <a:latin typeface="Consolas" pitchFamily="34" charset="0"/>
+                <a:ea typeface="Consolas" pitchFamily="34" charset="-122"/>
+                <a:cs typeface="Consolas" pitchFamily="34" charset="-120"/>
+              </a:rPr>
+              <a:t>    system_instruction=system) if system else None</a:t>
+            </a:r>
+            <a:endParaRPr lang="en-US" sz="950" dirty="0"/>
+          </a:p>
+        </p:txBody>
+      </p:sp>
+      <p:sp>
+        <p:nvSpPr>
+          <p:cNvPr id="45" name="Text 43"/>
+          <p:cNvSpPr/>
+          <p:nvPr/>
+        </p:nvSpPr>
+        <p:spPr>
+          <a:xfrm>
+            <a:off x="6172200" y="4803782"/>
+            <a:ext cx="5577840" cy="228600"/>
+          </a:xfrm>
+          <a:prstGeom prst="rect">
+            <a:avLst/>
+          </a:prstGeom>
+          <a:noFill/>
+          <a:ln/>
+        </p:spPr>
+        <p:txBody>
+          <a:bodyPr wrap="square" lIns="0" tIns="0" rIns="0" bIns="0" rtlCol="0" anchor="ctr"/>
+          <a:lstStyle/>
+          <a:p>
+            <a:pPr marL="0" indent="0">
+              <a:buNone/>
+            </a:pPr>
+            <a:r>
+              <a:rPr lang="en-US" sz="950" dirty="0">
+                <a:solidFill>
+                  <a:srgbClr val="E6EDF3"/>
+                </a:solidFill>
+                <a:latin typeface="Consolas" pitchFamily="34" charset="0"/>
+                <a:ea typeface="Consolas" pitchFamily="34" charset="-122"/>
+                <a:cs typeface="Consolas" pitchFamily="34" charset="-120"/>
+              </a:rPr>
+              <a:t>  return client.models.generate_content(</a:t>
+            </a:r>
+            <a:endParaRPr lang="en-US" sz="950" dirty="0"/>
+          </a:p>
+        </p:txBody>
+      </p:sp>
+      <p:sp>
+        <p:nvSpPr>
+          <p:cNvPr id="46" name="Text 44"/>
+          <p:cNvSpPr/>
+          <p:nvPr/>
+        </p:nvSpPr>
+        <p:spPr>
+          <a:xfrm>
+            <a:off x="6172200" y="5050670"/>
+            <a:ext cx="5577840" cy="228600"/>
+          </a:xfrm>
+          <a:prstGeom prst="rect">
+            <a:avLst/>
+          </a:prstGeom>
+          <a:noFill/>
+          <a:ln/>
+        </p:spPr>
+        <p:txBody>
+          <a:bodyPr wrap="square" lIns="0" tIns="0" rIns="0" bIns="0" rtlCol="0" anchor="ctr"/>
+          <a:lstStyle/>
+          <a:p>
+            <a:pPr marL="0" indent="0">
+              <a:buNone/>
+            </a:pPr>
+            <a:r>
+              <a:rPr lang="en-US" sz="950" dirty="0">
+                <a:solidFill>
+                  <a:srgbClr val="E6EDF3"/>
+                </a:solidFill>
+                <a:latin typeface="Consolas" pitchFamily="34" charset="0"/>
+                <a:ea typeface="Consolas" pitchFamily="34" charset="-122"/>
+                <a:cs typeface="Consolas" pitchFamily="34" charset="-120"/>
+              </a:rPr>
+              <a:t>    model=MODEL, contents=prompt,</a:t>
+            </a:r>
+            <a:endParaRPr lang="en-US" sz="950" dirty="0"/>
+          </a:p>
+        </p:txBody>
+      </p:sp>
+      <p:sp>
+        <p:nvSpPr>
+          <p:cNvPr id="50" name="Text 48"/>
+          <p:cNvSpPr/>
+          <p:nvPr/>
+        </p:nvSpPr>
+        <p:spPr>
+          <a:xfrm>
+            <a:off x="11064240" y="6053328"/>
+            <a:ext cx="914400" cy="274320"/>
+          </a:xfrm>
+          <a:prstGeom prst="rect">
+            <a:avLst/>
+          </a:prstGeom>
+          <a:noFill/>
+          <a:ln/>
+        </p:spPr>
+        <p:txBody>
+          <a:bodyPr wrap="square" lIns="0" tIns="0" rIns="0" bIns="0" rtlCol="0" anchor="ctr"/>
+          <a:lstStyle/>
+          <a:p>
+            <a:pPr marL="0" indent="0" algn="r">
+              <a:buNone/>
+            </a:pPr>
+            <a:r>
+              <a:rPr lang="en-US" sz="900" dirty="0">
+                <a:solidFill>
+                  <a:srgbClr val="94A3B8"/>
+                </a:solidFill>
+                <a:latin typeface="Arial" pitchFamily="34" charset="0"/>
+                <a:ea typeface="Arial" pitchFamily="34" charset="-122"/>
+                <a:cs typeface="Arial" pitchFamily="34" charset="-120"/>
+              </a:rPr>
+              <a:t>3 / 16</a:t>
+            </a:r>
+            <a:endParaRPr lang="en-US" sz="900" dirty="0"/>
+          </a:p>
+        </p:txBody>
+      </p:sp>
+    </p:spTree>
+  </p:cSld>
+  <p:clrMapOvr>
+    <a:masterClrMapping/>
+  </p:clrMapOvr>
+</p:sld>
+</file>
+
+<file path=ppt/slides/slide3.xml><?xml version="1.0" encoding="utf-8"?>
+<p:sld xmlns:a="http://schemas.openxmlformats.org/drawingml/2006/main" xmlns:r="http://schemas.openxmlformats.org/officeDocument/2006/relationships" xmlns:p="http://schemas.openxmlformats.org/presentationml/2006/main">
   <p:cSld name="Slide 2">
     <p:bg>
       <p:bgPr>
@@ -17960,77 +20715,6 @@
       </p:sp>
       <p:sp>
         <p:nvSpPr>
-          <p:cNvPr id="4" name="Shape 2"/>
-          <p:cNvSpPr/>
-          <p:nvPr/>
-        </p:nvSpPr>
-        <p:spPr>
-          <a:xfrm>
-            <a:off x="274320" y="685800"/>
-            <a:ext cx="5486400" cy="1234440"/>
-          </a:xfrm>
-          <a:prstGeom prst="rect">
-            <a:avLst/>
-          </a:prstGeom>
-          <a:solidFill>
-            <a:srgbClr val="FFFFFF"/>
-          </a:solidFill>
-          <a:ln w="15240">
-            <a:solidFill>
-              <a:srgbClr val="1A73E8"/>
-            </a:solidFill>
-            <a:prstDash val="solid"/>
-          </a:ln>
-          <a:effectLst>
-            <a:outerShdw blurRad="63500" dist="25400" dir="8100000" algn="bl" rotWithShape="0">
-              <a:srgbClr val="000000">
-                <a:alpha val="10000"/>
-              </a:srgbClr>
-            </a:outerShdw>
-          </a:effectLst>
-        </p:spPr>
-        <p:txBody>
-          <a:bodyPr/>
-          <a:lstStyle/>
-          <a:p>
-            <a:endParaRPr lang="ko-KR" altLang="en-US"/>
-          </a:p>
-        </p:txBody>
-      </p:sp>
-      <p:sp>
-        <p:nvSpPr>
-          <p:cNvPr id="5" name="Shape 3"/>
-          <p:cNvSpPr/>
-          <p:nvPr/>
-        </p:nvSpPr>
-        <p:spPr>
-          <a:xfrm>
-            <a:off x="274320" y="685800"/>
-            <a:ext cx="5486400" cy="329184"/>
-          </a:xfrm>
-          <a:prstGeom prst="rect">
-            <a:avLst/>
-          </a:prstGeom>
-          <a:solidFill>
-            <a:srgbClr val="1A73E8"/>
-          </a:solidFill>
-          <a:ln w="12700">
-            <a:solidFill>
-              <a:srgbClr val="1A73E8"/>
-            </a:solidFill>
-            <a:prstDash val="solid"/>
-          </a:ln>
-        </p:spPr>
-        <p:txBody>
-          <a:bodyPr/>
-          <a:lstStyle/>
-          <a:p>
-            <a:endParaRPr lang="ko-KR" altLang="en-US"/>
-          </a:p>
-        </p:txBody>
-      </p:sp>
-      <p:sp>
-        <p:nvSpPr>
           <p:cNvPr id="6" name="Text 4"/>
           <p:cNvSpPr/>
           <p:nvPr/>
@@ -18065,123 +20749,6 @@
               <a:t>① 기본 패키지 + API (Cell 2~5)</a:t>
             </a:r>
             <a:endParaRPr lang="en-US" sz="1100" dirty="0"/>
-          </a:p>
-        </p:txBody>
-      </p:sp>
-      <p:sp>
-        <p:nvSpPr>
-          <p:cNvPr id="7" name="Text 5"/>
-          <p:cNvSpPr/>
-          <p:nvPr/>
-        </p:nvSpPr>
-        <p:spPr>
-          <a:xfrm>
-            <a:off x="411480" y="1088136"/>
-            <a:ext cx="5212080" cy="246888"/>
-          </a:xfrm>
-          <a:prstGeom prst="rect">
-            <a:avLst/>
-          </a:prstGeom>
-          <a:noFill/>
-          <a:ln/>
-        </p:spPr>
-        <p:txBody>
-          <a:bodyPr wrap="square" rtlCol="0" anchor="ctr"/>
-          <a:lstStyle/>
-          <a:p>
-            <a:pPr marL="0" indent="0">
-              <a:buNone/>
-            </a:pPr>
-            <a:r>
-              <a:rPr lang="en-US" sz="950" dirty="0">
-                <a:solidFill>
-                  <a:srgbClr val="111848"/>
-                </a:solidFill>
-                <a:latin typeface="Arial" pitchFamily="34" charset="0"/>
-                <a:ea typeface="Arial" pitchFamily="34" charset="-122"/>
-                <a:cs typeface="Arial" pitchFamily="34" charset="-120"/>
-              </a:rPr>
-              <a:t>MODEL = "gemini-2.5-flash-lite"</a:t>
-            </a:r>
-            <a:endParaRPr lang="en-US" sz="950" dirty="0"/>
-          </a:p>
-        </p:txBody>
-      </p:sp>
-      <p:sp>
-        <p:nvSpPr>
-          <p:cNvPr id="8" name="Text 6"/>
-          <p:cNvSpPr/>
-          <p:nvPr/>
-        </p:nvSpPr>
-        <p:spPr>
-          <a:xfrm>
-            <a:off x="411480" y="1362456"/>
-            <a:ext cx="5212080" cy="246888"/>
-          </a:xfrm>
-          <a:prstGeom prst="rect">
-            <a:avLst/>
-          </a:prstGeom>
-          <a:noFill/>
-          <a:ln/>
-        </p:spPr>
-        <p:txBody>
-          <a:bodyPr wrap="square" rtlCol="0" anchor="ctr"/>
-          <a:lstStyle/>
-          <a:p>
-            <a:pPr marL="0" indent="0">
-              <a:buNone/>
-            </a:pPr>
-            <a:r>
-              <a:rPr lang="en-US" sz="950" dirty="0">
-                <a:solidFill>
-                  <a:srgbClr val="111848"/>
-                </a:solidFill>
-                <a:latin typeface="Arial" pitchFamily="34" charset="0"/>
-                <a:ea typeface="Arial" pitchFamily="34" charset="-122"/>
-                <a:cs typeface="Arial" pitchFamily="34" charset="-120"/>
-              </a:rPr>
-              <a:t>!pip install -q google-genai python-dotenv</a:t>
-            </a:r>
-            <a:endParaRPr lang="en-US" sz="950" dirty="0"/>
-          </a:p>
-        </p:txBody>
-      </p:sp>
-      <p:sp>
-        <p:nvSpPr>
-          <p:cNvPr id="9" name="Text 7"/>
-          <p:cNvSpPr/>
-          <p:nvPr/>
-        </p:nvSpPr>
-        <p:spPr>
-          <a:xfrm>
-            <a:off x="411480" y="1636776"/>
-            <a:ext cx="5212080" cy="246888"/>
-          </a:xfrm>
-          <a:prstGeom prst="rect">
-            <a:avLst/>
-          </a:prstGeom>
-          <a:noFill/>
-          <a:ln/>
-        </p:spPr>
-        <p:txBody>
-          <a:bodyPr wrap="square" rtlCol="0" anchor="ctr"/>
-          <a:lstStyle/>
-          <a:p>
-            <a:pPr marL="0" indent="0">
-              <a:buNone/>
-            </a:pPr>
-            <a:r>
-              <a:rPr lang="en-US" sz="950" b="1" dirty="0">
-                <a:solidFill>
-                  <a:srgbClr val="F59E0B"/>
-                </a:solidFill>
-                <a:latin typeface="Arial" pitchFamily="34" charset="0"/>
-                <a:ea typeface="Arial" pitchFamily="34" charset="-122"/>
-                <a:cs typeface="Arial" pitchFamily="34" charset="-120"/>
-              </a:rPr>
-              <a:t>→ GEMINI_API_KEY Colab Secrets에 추가</a:t>
-            </a:r>
-            <a:endParaRPr lang="en-US" sz="950" dirty="0"/>
           </a:p>
         </p:txBody>
       </p:sp>
@@ -18289,7 +20856,29 @@
                 <a:ea typeface="Arial" pitchFamily="34" charset="-122"/>
                 <a:cs typeface="Arial" pitchFamily="34" charset="-120"/>
               </a:rPr>
-              <a:t>② RAG 인프라 패키지 (Cell 9)</a:t>
+              <a:t>④</a:t>
+            </a:r>
+            <a:r>
+              <a:rPr lang="ko-KR" altLang="en-US" sz="1100" b="1" dirty="0">
+                <a:solidFill>
+                  <a:srgbClr val="FFFFFF"/>
+                </a:solidFill>
+                <a:latin typeface="Arial" pitchFamily="34" charset="0"/>
+                <a:ea typeface="Arial" pitchFamily="34" charset="-122"/>
+                <a:cs typeface="Arial" pitchFamily="34" charset="-120"/>
+              </a:rPr>
+              <a:t> </a:t>
+            </a:r>
+            <a:r>
+              <a:rPr lang="en-US" sz="1100" b="1" dirty="0">
+                <a:solidFill>
+                  <a:srgbClr val="FFFFFF"/>
+                </a:solidFill>
+                <a:latin typeface="Arial" pitchFamily="34" charset="0"/>
+                <a:ea typeface="Arial" pitchFamily="34" charset="-122"/>
+                <a:cs typeface="Arial" pitchFamily="34" charset="-120"/>
+              </a:rPr>
+              <a:t>RAG 인프라 패키지 (Cell 9)</a:t>
             </a:r>
             <a:endParaRPr lang="en-US" sz="1100" dirty="0"/>
           </a:p>
@@ -18504,11 +21093,8 @@
           <a:bodyPr wrap="square" lIns="0" tIns="0" rIns="0" bIns="0" rtlCol="0" anchor="ctr"/>
           <a:lstStyle/>
           <a:p>
-            <a:pPr marL="0" indent="0">
-              <a:buNone/>
-            </a:pPr>
-            <a:r>
-              <a:rPr lang="en-US" sz="1100" b="1" dirty="0">
+            <a:r>
+              <a:rPr lang="en-US" altLang="ko-KR" sz="1100" b="1" dirty="0">
                 <a:solidFill>
                   <a:srgbClr val="FFFFFF"/>
                 </a:solidFill>
@@ -18516,99 +21102,43 @@
                 <a:ea typeface="Arial" pitchFamily="34" charset="-122"/>
                 <a:cs typeface="Arial" pitchFamily="34" charset="-120"/>
               </a:rPr>
-              <a:t>③ FAISS 인덱스 구축 (Cell 10~11)</a:t>
-            </a:r>
-            <a:endParaRPr lang="en-US" sz="1100" dirty="0"/>
-          </a:p>
-        </p:txBody>
-      </p:sp>
-      <p:sp>
-        <p:nvSpPr>
-          <p:cNvPr id="20" name="Text 18"/>
-          <p:cNvSpPr/>
-          <p:nvPr/>
-        </p:nvSpPr>
-        <p:spPr>
-          <a:xfrm>
-            <a:off x="411480" y="3959352"/>
-            <a:ext cx="5212080" cy="246888"/>
-          </a:xfrm>
-          <a:prstGeom prst="rect">
-            <a:avLst/>
-          </a:prstGeom>
-          <a:noFill/>
-          <a:ln/>
-        </p:spPr>
-        <p:txBody>
-          <a:bodyPr wrap="square" rtlCol="0" anchor="ctr"/>
-          <a:lstStyle/>
-          <a:p>
-            <a:pPr marL="0" indent="0">
-              <a:buNone/>
-            </a:pPr>
-            <a:r>
-              <a:rPr lang="en-US" sz="950" dirty="0">
-                <a:solidFill>
-                  <a:srgbClr val="111848"/>
+              <a:t> ⑤</a:t>
+            </a:r>
+            <a:r>
+              <a:rPr lang="ko-KR" altLang="en-US" sz="1100" b="1" dirty="0">
+                <a:solidFill>
+                  <a:srgbClr val="FFFFFF"/>
                 </a:solidFill>
                 <a:latin typeface="Arial" pitchFamily="34" charset="0"/>
                 <a:ea typeface="Arial" pitchFamily="34" charset="-122"/>
                 <a:cs typeface="Arial" pitchFamily="34" charset="-120"/>
               </a:rPr>
-              <a:t>대한민국 헌법.pdf → 청크 → BAAI/bge-m3 임베딩</a:t>
-            </a:r>
-            <a:endParaRPr lang="en-US" sz="950" dirty="0"/>
-          </a:p>
-        </p:txBody>
-      </p:sp>
-      <p:sp>
-        <p:nvSpPr>
-          <p:cNvPr id="21" name="Text 19"/>
-          <p:cNvSpPr/>
-          <p:nvPr/>
-        </p:nvSpPr>
-        <p:spPr>
-          <a:xfrm>
-            <a:off x="411480" y="4233672"/>
-            <a:ext cx="5212080" cy="246888"/>
-          </a:xfrm>
-          <a:prstGeom prst="rect">
-            <a:avLst/>
-          </a:prstGeom>
-          <a:noFill/>
-          <a:ln/>
-        </p:spPr>
-        <p:txBody>
-          <a:bodyPr wrap="square" rtlCol="0" anchor="ctr"/>
-          <a:lstStyle/>
-          <a:p>
-            <a:pPr marL="0" indent="0">
-              <a:buNone/>
-            </a:pPr>
-            <a:r>
-              <a:rPr lang="en-US" sz="950" dirty="0">
-                <a:solidFill>
-                  <a:srgbClr val="111848"/>
+              <a:t> </a:t>
+            </a:r>
+            <a:r>
+              <a:rPr lang="en-US" sz="1100" b="1" dirty="0">
+                <a:solidFill>
+                  <a:srgbClr val="FFFFFF"/>
                 </a:solidFill>
                 <a:latin typeface="Arial" pitchFamily="34" charset="0"/>
                 <a:ea typeface="Arial" pitchFamily="34" charset="-122"/>
                 <a:cs typeface="Arial" pitchFamily="34" charset="-120"/>
               </a:rPr>
-              <a:t>→ faiss_db_long 인덱스 저장</a:t>
-            </a:r>
-            <a:endParaRPr lang="en-US" sz="950" dirty="0"/>
-          </a:p>
-        </p:txBody>
-      </p:sp>
-      <p:sp>
-        <p:nvSpPr>
-          <p:cNvPr id="22" name="Text 20"/>
-          <p:cNvSpPr/>
-          <p:nvPr/>
-        </p:nvSpPr>
-        <p:spPr>
-          <a:xfrm>
-            <a:off x="411480" y="4507992"/>
+              <a:t>FAISS 인덱스 구축 (Cell 10~11)</a:t>
+            </a:r>
+            <a:endParaRPr lang="en-US" sz="1100" dirty="0"/>
+          </a:p>
+        </p:txBody>
+      </p:sp>
+      <p:sp>
+        <p:nvSpPr>
+          <p:cNvPr id="20" name="Text 18"/>
+          <p:cNvSpPr/>
+          <p:nvPr/>
+        </p:nvSpPr>
+        <p:spPr>
+          <a:xfrm>
+            <a:off x="411480" y="3959352"/>
             <a:ext cx="5212080" cy="246888"/>
           </a:xfrm>
           <a:prstGeom prst="rect">
@@ -18633,7 +21163,7 @@
                 <a:ea typeface="Arial" pitchFamily="34" charset="-122"/>
                 <a:cs typeface="Arial" pitchFamily="34" charset="-120"/>
               </a:rPr>
-              <a:t>Day 2 완료자: 기존 인덱스 자동 재사용</a:t>
+              <a:t>대한민국 헌법.pdf → 청크 → BAAI/bge-m3 임베딩</a:t>
             </a:r>
             <a:endParaRPr lang="en-US" sz="950" dirty="0"/>
           </a:p>
@@ -18641,13 +21171,13 @@
       </p:sp>
       <p:sp>
         <p:nvSpPr>
-          <p:cNvPr id="23" name="Text 21"/>
-          <p:cNvSpPr/>
-          <p:nvPr/>
-        </p:nvSpPr>
-        <p:spPr>
-          <a:xfrm>
-            <a:off x="411480" y="4782312"/>
+          <p:cNvPr id="21" name="Text 19"/>
+          <p:cNvSpPr/>
+          <p:nvPr/>
+        </p:nvSpPr>
+        <p:spPr>
+          <a:xfrm>
+            <a:off x="411480" y="4233672"/>
             <a:ext cx="5212080" cy="246888"/>
           </a:xfrm>
           <a:prstGeom prst="rect">
@@ -18664,15 +21194,15 @@
               <a:buNone/>
             </a:pPr>
             <a:r>
-              <a:rPr lang="en-US" sz="950" b="1" dirty="0">
-                <a:solidFill>
-                  <a:srgbClr val="F59E0B"/>
+              <a:rPr lang="en-US" sz="950" dirty="0">
+                <a:solidFill>
+                  <a:srgbClr val="111848"/>
                 </a:solidFill>
                 <a:latin typeface="Arial" pitchFamily="34" charset="0"/>
                 <a:ea typeface="Arial" pitchFamily="34" charset="-122"/>
                 <a:cs typeface="Arial" pitchFamily="34" charset="-120"/>
               </a:rPr>
-              <a:t>최초 실행 2~4분 소요 (임베딩 모델 다운로드)</a:t>
+              <a:t>→ faiss_db_long 인덱스 저장</a:t>
             </a:r>
             <a:endParaRPr lang="en-US" sz="950" dirty="0"/>
           </a:p>
@@ -18680,13 +21210,13 @@
       </p:sp>
       <p:sp>
         <p:nvSpPr>
-          <p:cNvPr id="24" name="Text 22"/>
-          <p:cNvSpPr/>
-          <p:nvPr/>
-        </p:nvSpPr>
-        <p:spPr>
-          <a:xfrm>
-            <a:off x="411480" y="5056632"/>
+          <p:cNvPr id="22" name="Text 20"/>
+          <p:cNvSpPr/>
+          <p:nvPr/>
+        </p:nvSpPr>
+        <p:spPr>
+          <a:xfrm>
+            <a:off x="411480" y="4507992"/>
             <a:ext cx="5212080" cy="246888"/>
           </a:xfrm>
           <a:prstGeom prst="rect">
@@ -18705,12 +21235,90 @@
             <a:r>
               <a:rPr lang="en-US" sz="950" dirty="0">
                 <a:solidFill>
-                  <a:srgbClr val="0F766E"/>
+                  <a:srgbClr val="111848"/>
                 </a:solidFill>
                 <a:latin typeface="Arial" pitchFamily="34" charset="0"/>
                 <a:ea typeface="Arial" pitchFamily="34" charset="-122"/>
                 <a:cs typeface="Arial" pitchFamily="34" charset="-120"/>
               </a:rPr>
+              <a:t>Day 2 완료자: 기존 인덱스 자동 재사용</a:t>
+            </a:r>
+            <a:endParaRPr lang="en-US" sz="950" dirty="0"/>
+          </a:p>
+        </p:txBody>
+      </p:sp>
+      <p:sp>
+        <p:nvSpPr>
+          <p:cNvPr id="23" name="Text 21"/>
+          <p:cNvSpPr/>
+          <p:nvPr/>
+        </p:nvSpPr>
+        <p:spPr>
+          <a:xfrm>
+            <a:off x="411480" y="4782312"/>
+            <a:ext cx="5212080" cy="246888"/>
+          </a:xfrm>
+          <a:prstGeom prst="rect">
+            <a:avLst/>
+          </a:prstGeom>
+          <a:noFill/>
+          <a:ln/>
+        </p:spPr>
+        <p:txBody>
+          <a:bodyPr wrap="square" rtlCol="0" anchor="ctr"/>
+          <a:lstStyle/>
+          <a:p>
+            <a:pPr marL="0" indent="0">
+              <a:buNone/>
+            </a:pPr>
+            <a:r>
+              <a:rPr lang="en-US" sz="950" b="1" dirty="0">
+                <a:solidFill>
+                  <a:srgbClr val="F59E0B"/>
+                </a:solidFill>
+                <a:latin typeface="Arial" pitchFamily="34" charset="0"/>
+                <a:ea typeface="Arial" pitchFamily="34" charset="-122"/>
+                <a:cs typeface="Arial" pitchFamily="34" charset="-120"/>
+              </a:rPr>
+              <a:t>최초 실행 2~4분 소요 (임베딩 모델 다운로드)</a:t>
+            </a:r>
+            <a:endParaRPr lang="en-US" sz="950" dirty="0"/>
+          </a:p>
+        </p:txBody>
+      </p:sp>
+      <p:sp>
+        <p:nvSpPr>
+          <p:cNvPr id="24" name="Text 22"/>
+          <p:cNvSpPr/>
+          <p:nvPr/>
+        </p:nvSpPr>
+        <p:spPr>
+          <a:xfrm>
+            <a:off x="411480" y="5056632"/>
+            <a:ext cx="5212080" cy="246888"/>
+          </a:xfrm>
+          <a:prstGeom prst="rect">
+            <a:avLst/>
+          </a:prstGeom>
+          <a:noFill/>
+          <a:ln/>
+        </p:spPr>
+        <p:txBody>
+          <a:bodyPr wrap="square" rtlCol="0" anchor="ctr"/>
+          <a:lstStyle/>
+          <a:p>
+            <a:pPr marL="0" indent="0">
+              <a:buNone/>
+            </a:pPr>
+            <a:r>
+              <a:rPr lang="en-US" sz="950" dirty="0">
+                <a:solidFill>
+                  <a:srgbClr val="0F766E"/>
+                </a:solidFill>
+                <a:latin typeface="Arial" pitchFamily="34" charset="0"/>
+                <a:ea typeface="Arial" pitchFamily="34" charset="-122"/>
+                <a:cs typeface="Arial" pitchFamily="34" charset="-120"/>
+              </a:rPr>
               <a:t>→ vectordb = FAISS.load_local(INDEX_DIR, embeddings)</a:t>
             </a:r>
             <a:endParaRPr lang="en-US" sz="950" dirty="0"/>
@@ -18726,7 +21334,7 @@
         <p:spPr>
           <a:xfrm>
             <a:off x="6035040" y="534725"/>
-            <a:ext cx="5852160" cy="6263640"/>
+            <a:ext cx="5852160" cy="5774635"/>
           </a:xfrm>
           <a:prstGeom prst="rect">
             <a:avLst/>
@@ -19061,13 +21669,13 @@
       </p:sp>
       <p:sp>
         <p:nvSpPr>
-          <p:cNvPr id="33" name="Text 31"/>
-          <p:cNvSpPr/>
-          <p:nvPr/>
-        </p:nvSpPr>
-        <p:spPr>
-          <a:xfrm>
-            <a:off x="6172200" y="2125781"/>
+          <p:cNvPr id="34" name="Text 32"/>
+          <p:cNvSpPr/>
+          <p:nvPr/>
+        </p:nvSpPr>
+        <p:spPr>
+          <a:xfrm>
+            <a:off x="6172200" y="1925408"/>
             <a:ext cx="5577840" cy="228600"/>
           </a:xfrm>
           <a:prstGeom prst="rect">
@@ -19084,7 +21692,7 @@
               <a:buNone/>
             </a:pPr>
             <a:r>
-              <a:rPr lang="en-US" sz="950" dirty="0">
+              <a:rPr lang="en-US" sz="950" dirty="0" err="1">
                 <a:solidFill>
                   <a:srgbClr val="E6EDF3"/>
                 </a:solidFill>
@@ -19092,36 +21700,8 @@
                 <a:ea typeface="Consolas" pitchFamily="34" charset="-122"/>
                 <a:cs typeface="Consolas" pitchFamily="34" charset="-120"/>
               </a:rPr>
-              <a:t>if not os.path.exists(PDF_PATH):</a:t>
-            </a:r>
-            <a:endParaRPr lang="en-US" sz="950" dirty="0"/>
-          </a:p>
-        </p:txBody>
-      </p:sp>
-      <p:sp>
-        <p:nvSpPr>
-          <p:cNvPr id="34" name="Text 32"/>
-          <p:cNvSpPr/>
-          <p:nvPr/>
-        </p:nvSpPr>
-        <p:spPr>
-          <a:xfrm>
-            <a:off x="6172200" y="2372669"/>
-            <a:ext cx="5577840" cy="228600"/>
-          </a:xfrm>
-          <a:prstGeom prst="rect">
-            <a:avLst/>
-          </a:prstGeom>
-          <a:noFill/>
-          <a:ln/>
-        </p:spPr>
-        <p:txBody>
-          <a:bodyPr wrap="square" lIns="0" tIns="0" rIns="0" bIns="0" rtlCol="0" anchor="ctr"/>
-          <a:lstStyle/>
-          <a:p>
-            <a:pPr marL="0" indent="0">
-              <a:buNone/>
-            </a:pPr>
+              <a:t>urllib.request.urlretrieve</a:t>
+            </a:r>
             <a:r>
               <a:rPr lang="en-US" sz="950" dirty="0">
                 <a:solidFill>
@@ -19131,7 +21711,7 @@
                 <a:ea typeface="Consolas" pitchFamily="34" charset="-122"/>
                 <a:cs typeface="Consolas" pitchFamily="34" charset="-120"/>
               </a:rPr>
-              <a:t>    urllib.request.urlretrieve(PDF_URL,PDF_PATH)</a:t>
+              <a:t>(PDF_URL,PDF_PATH)</a:t>
             </a:r>
             <a:endParaRPr lang="en-US" sz="950" dirty="0"/>
           </a:p>
@@ -19173,7 +21753,7 @@
         </p:nvSpPr>
         <p:spPr>
           <a:xfrm>
-            <a:off x="6172200" y="2866445"/>
+            <a:off x="6172200" y="2289975"/>
             <a:ext cx="5577840" cy="228600"/>
           </a:xfrm>
           <a:prstGeom prst="rect">
@@ -19212,7 +21792,7 @@
         </p:nvSpPr>
         <p:spPr>
           <a:xfrm>
-            <a:off x="6172200" y="3113333"/>
+            <a:off x="6172200" y="2536863"/>
             <a:ext cx="5577840" cy="228600"/>
           </a:xfrm>
           <a:prstGeom prst="rect">
@@ -19225,9 +21805,6 @@
           <a:bodyPr wrap="square" lIns="0" tIns="0" rIns="0" bIns="0" rtlCol="0" anchor="ctr"/>
           <a:lstStyle/>
           <a:p>
-            <a:pPr marL="0" indent="0">
-              <a:buNone/>
-            </a:pPr>
             <a:r>
               <a:rPr lang="en-US" sz="950" dirty="0">
                 <a:solidFill>
@@ -19237,38 +21814,10 @@
                 <a:ea typeface="Consolas" pitchFamily="34" charset="-122"/>
                 <a:cs typeface="Consolas" pitchFamily="34" charset="-120"/>
               </a:rPr>
-              <a:t>from langchain_community.embeddings import \</a:t>
-            </a:r>
-            <a:endParaRPr lang="en-US" sz="950" dirty="0"/>
-          </a:p>
-        </p:txBody>
-      </p:sp>
-      <p:sp>
-        <p:nvSpPr>
-          <p:cNvPr id="38" name="Text 36"/>
-          <p:cNvSpPr/>
-          <p:nvPr/>
-        </p:nvSpPr>
-        <p:spPr>
-          <a:xfrm>
-            <a:off x="6172200" y="3360221"/>
-            <a:ext cx="5577840" cy="228600"/>
-          </a:xfrm>
-          <a:prstGeom prst="rect">
-            <a:avLst/>
-          </a:prstGeom>
-          <a:noFill/>
-          <a:ln/>
-        </p:spPr>
-        <p:txBody>
-          <a:bodyPr wrap="square" lIns="0" tIns="0" rIns="0" bIns="0" rtlCol="0" anchor="ctr"/>
-          <a:lstStyle/>
-          <a:p>
-            <a:pPr marL="0" indent="0">
-              <a:buNone/>
-            </a:pPr>
-            <a:r>
-              <a:rPr lang="en-US" sz="950" dirty="0">
+              <a:t>from langchain_community.embeddings import </a:t>
+            </a:r>
+            <a:r>
+              <a:rPr lang="en-US" altLang="ko-KR" sz="950" dirty="0" err="1">
                 <a:solidFill>
                   <a:srgbClr val="E6EDF3"/>
                 </a:solidFill>
@@ -19276,7 +21825,7 @@
                 <a:ea typeface="Consolas" pitchFamily="34" charset="-122"/>
                 <a:cs typeface="Consolas" pitchFamily="34" charset="-120"/>
               </a:rPr>
-              <a:t>    HuggingFaceEmbeddings</a:t>
+              <a:t>HuggingFaceEmbeddings</a:t>
             </a:r>
             <a:endParaRPr lang="en-US" sz="950" dirty="0"/>
           </a:p>
@@ -19290,7 +21839,7 @@
         </p:nvSpPr>
         <p:spPr>
           <a:xfrm>
-            <a:off x="6172200" y="3607109"/>
+            <a:off x="6162261" y="2772222"/>
             <a:ext cx="5577840" cy="228600"/>
           </a:xfrm>
           <a:prstGeom prst="rect">
@@ -19357,7 +21906,7 @@
         </p:nvSpPr>
         <p:spPr>
           <a:xfrm>
-            <a:off x="6172200" y="4100885"/>
+            <a:off x="6172200" y="3126851"/>
             <a:ext cx="5577840" cy="228600"/>
           </a:xfrm>
           <a:prstGeom prst="rect">
@@ -19396,7 +21945,7 @@
         </p:nvSpPr>
         <p:spPr>
           <a:xfrm>
-            <a:off x="6172200" y="4347773"/>
+            <a:off x="6172200" y="3373739"/>
             <a:ext cx="5577840" cy="228600"/>
           </a:xfrm>
           <a:prstGeom prst="rect">
@@ -19409,9 +21958,6 @@
           <a:bodyPr wrap="square" lIns="0" tIns="0" rIns="0" bIns="0" rtlCol="0" anchor="ctr"/>
           <a:lstStyle/>
           <a:p>
-            <a:pPr marL="0" indent="0">
-              <a:buNone/>
-            </a:pPr>
             <a:r>
               <a:rPr lang="en-US" sz="950" dirty="0">
                 <a:solidFill>
@@ -19421,38 +21967,10 @@
                 <a:ea typeface="Consolas" pitchFamily="34" charset="-122"/>
                 <a:cs typeface="Consolas" pitchFamily="34" charset="-120"/>
               </a:rPr>
-              <a:t>embeddings = HuggingFaceEmbeddings(</a:t>
-            </a:r>
-            <a:endParaRPr lang="en-US" sz="950" dirty="0"/>
-          </a:p>
-        </p:txBody>
-      </p:sp>
-      <p:sp>
-        <p:nvSpPr>
-          <p:cNvPr id="43" name="Text 41"/>
-          <p:cNvSpPr/>
-          <p:nvPr/>
-        </p:nvSpPr>
-        <p:spPr>
-          <a:xfrm>
-            <a:off x="6172200" y="4594661"/>
-            <a:ext cx="5577840" cy="228600"/>
-          </a:xfrm>
-          <a:prstGeom prst="rect">
-            <a:avLst/>
-          </a:prstGeom>
-          <a:noFill/>
-          <a:ln/>
-        </p:spPr>
-        <p:txBody>
-          <a:bodyPr wrap="square" lIns="0" tIns="0" rIns="0" bIns="0" rtlCol="0" anchor="ctr"/>
-          <a:lstStyle/>
-          <a:p>
-            <a:pPr marL="0" indent="0">
-              <a:buNone/>
-            </a:pPr>
-            <a:r>
-              <a:rPr lang="en-US" sz="950" dirty="0">
+              <a:t>embeddings = </a:t>
+            </a:r>
+            <a:r>
+              <a:rPr lang="en-US" sz="950" dirty="0" err="1">
                 <a:solidFill>
                   <a:srgbClr val="E6EDF3"/>
                 </a:solidFill>
@@ -19460,64 +21978,8 @@
                 <a:ea typeface="Consolas" pitchFamily="34" charset="-122"/>
                 <a:cs typeface="Consolas" pitchFamily="34" charset="-120"/>
               </a:rPr>
-              <a:t>    model_name=EMBED_MODEL)</a:t>
-            </a:r>
-            <a:endParaRPr lang="en-US" sz="950" dirty="0"/>
-          </a:p>
-        </p:txBody>
-      </p:sp>
-      <p:sp>
-        <p:nvSpPr>
-          <p:cNvPr id="44" name="Text 42"/>
-          <p:cNvSpPr/>
-          <p:nvPr/>
-        </p:nvSpPr>
-        <p:spPr>
-          <a:xfrm>
-            <a:off x="6172200" y="4841549"/>
-            <a:ext cx="5577840" cy="228600"/>
-          </a:xfrm>
-          <a:prstGeom prst="rect">
-            <a:avLst/>
-          </a:prstGeom>
-          <a:noFill/>
-          <a:ln/>
-        </p:spPr>
-        <p:txBody>
-          <a:bodyPr wrap="square" lIns="0" tIns="0" rIns="0" bIns="0" rtlCol="0" anchor="ctr"/>
-          <a:lstStyle/>
-          <a:p>
-            <a:pPr marL="0" indent="0">
-              <a:buNone/>
-            </a:pPr>
-            <a:endParaRPr lang="en-US" sz="950" dirty="0"/>
-          </a:p>
-        </p:txBody>
-      </p:sp>
-      <p:sp>
-        <p:nvSpPr>
-          <p:cNvPr id="45" name="Text 43"/>
-          <p:cNvSpPr/>
-          <p:nvPr/>
-        </p:nvSpPr>
-        <p:spPr>
-          <a:xfrm>
-            <a:off x="6172200" y="5088437"/>
-            <a:ext cx="5577840" cy="228600"/>
-          </a:xfrm>
-          <a:prstGeom prst="rect">
-            <a:avLst/>
-          </a:prstGeom>
-          <a:noFill/>
-          <a:ln/>
-        </p:spPr>
-        <p:txBody>
-          <a:bodyPr wrap="square" lIns="0" tIns="0" rIns="0" bIns="0" rtlCol="0" anchor="ctr"/>
-          <a:lstStyle/>
-          <a:p>
-            <a:pPr marL="0" indent="0">
-              <a:buNone/>
-            </a:pPr>
+              <a:t>HuggingFaceEmbeddings</a:t>
+            </a:r>
             <a:r>
               <a:rPr lang="en-US" sz="950" dirty="0">
                 <a:solidFill>
@@ -19527,38 +21989,10 @@
                 <a:ea typeface="Consolas" pitchFamily="34" charset="-122"/>
                 <a:cs typeface="Consolas" pitchFamily="34" charset="-120"/>
               </a:rPr>
-              <a:t>if not os.path.exists(INDEX_DIR):</a:t>
-            </a:r>
-            <a:endParaRPr lang="en-US" sz="950" dirty="0"/>
-          </a:p>
-        </p:txBody>
-      </p:sp>
-      <p:sp>
-        <p:nvSpPr>
-          <p:cNvPr id="46" name="Text 44"/>
-          <p:cNvSpPr/>
-          <p:nvPr/>
-        </p:nvSpPr>
-        <p:spPr>
-          <a:xfrm>
-            <a:off x="6172200" y="5335325"/>
-            <a:ext cx="5577840" cy="228600"/>
-          </a:xfrm>
-          <a:prstGeom prst="rect">
-            <a:avLst/>
-          </a:prstGeom>
-          <a:noFill/>
-          <a:ln/>
-        </p:spPr>
-        <p:txBody>
-          <a:bodyPr wrap="square" lIns="0" tIns="0" rIns="0" bIns="0" rtlCol="0" anchor="ctr"/>
-          <a:lstStyle/>
-          <a:p>
-            <a:pPr marL="0" indent="0">
-              <a:buNone/>
-            </a:pPr>
-            <a:r>
-              <a:rPr lang="en-US" sz="950" dirty="0">
+              <a:t>(</a:t>
+            </a:r>
+            <a:r>
+              <a:rPr lang="en-US" altLang="ko-KR" sz="950" dirty="0" err="1">
                 <a:solidFill>
                   <a:srgbClr val="E6EDF3"/>
                 </a:solidFill>
@@ -19566,46 +22000,18 @@
                 <a:ea typeface="Consolas" pitchFamily="34" charset="-122"/>
                 <a:cs typeface="Consolas" pitchFamily="34" charset="-120"/>
               </a:rPr>
-              <a:t>    print('⚙️ FAISS 구축 중... (2~4분)')</a:t>
-            </a:r>
-            <a:endParaRPr lang="en-US" sz="950" dirty="0"/>
-          </a:p>
-        </p:txBody>
-      </p:sp>
-      <p:sp>
-        <p:nvSpPr>
-          <p:cNvPr id="47" name="Text 45"/>
-          <p:cNvSpPr/>
-          <p:nvPr/>
-        </p:nvSpPr>
-        <p:spPr>
-          <a:xfrm>
-            <a:off x="6172200" y="5582213"/>
-            <a:ext cx="5577840" cy="228600"/>
-          </a:xfrm>
-          <a:prstGeom prst="rect">
-            <a:avLst/>
-          </a:prstGeom>
-          <a:noFill/>
-          <a:ln/>
-        </p:spPr>
-        <p:txBody>
-          <a:bodyPr wrap="square" lIns="0" tIns="0" rIns="0" bIns="0" rtlCol="0" anchor="ctr"/>
-          <a:lstStyle/>
-          <a:p>
-            <a:pPr marL="0" indent="0">
-              <a:buNone/>
-            </a:pPr>
-            <a:r>
-              <a:rPr lang="en-US" sz="950" dirty="0">
-                <a:solidFill>
-                  <a:srgbClr val="8B949E"/>
+              <a:t>model_name</a:t>
+            </a:r>
+            <a:r>
+              <a:rPr lang="en-US" altLang="ko-KR" sz="950" dirty="0">
+                <a:solidFill>
+                  <a:srgbClr val="E6EDF3"/>
                 </a:solidFill>
                 <a:latin typeface="Consolas" pitchFamily="34" charset="0"/>
                 <a:ea typeface="Consolas" pitchFamily="34" charset="-122"/>
                 <a:cs typeface="Consolas" pitchFamily="34" charset="-120"/>
               </a:rPr>
-              <a:t>    # PDF 로드 → 청크 → 임베딩 → 저장</a:t>
+              <a:t>=EMBED_MODEL)</a:t>
             </a:r>
             <a:endParaRPr lang="en-US" sz="950" dirty="0"/>
           </a:p>
@@ -19613,13 +22019,13 @@
       </p:sp>
       <p:sp>
         <p:nvSpPr>
-          <p:cNvPr id="48" name="Text 46"/>
-          <p:cNvSpPr/>
-          <p:nvPr/>
-        </p:nvSpPr>
-        <p:spPr>
-          <a:xfrm>
-            <a:off x="6172200" y="5829101"/>
+          <p:cNvPr id="43" name="Text 41"/>
+          <p:cNvSpPr/>
+          <p:nvPr/>
+        </p:nvSpPr>
+        <p:spPr>
+          <a:xfrm>
+            <a:off x="6172200" y="4594661"/>
             <a:ext cx="5577840" cy="228600"/>
           </a:xfrm>
           <a:prstGeom prst="rect">
@@ -19638,13 +22044,13 @@
             <a:r>
               <a:rPr lang="en-US" sz="950" dirty="0">
                 <a:solidFill>
-                  <a:srgbClr val="8B949E"/>
+                  <a:srgbClr val="E6EDF3"/>
                 </a:solidFill>
                 <a:latin typeface="Consolas" pitchFamily="34" charset="0"/>
                 <a:ea typeface="Consolas" pitchFamily="34" charset="-122"/>
                 <a:cs typeface="Consolas" pitchFamily="34" charset="-120"/>
               </a:rPr>
-              <a:t>    # (자세한 코드는 노트북 Cell 11 참조)</a:t>
+              <a:t>    </a:t>
             </a:r>
             <a:endParaRPr lang="en-US" sz="950" dirty="0"/>
           </a:p>
@@ -19652,13 +22058,13 @@
       </p:sp>
       <p:sp>
         <p:nvSpPr>
-          <p:cNvPr id="49" name="Text 47"/>
-          <p:cNvSpPr/>
-          <p:nvPr/>
-        </p:nvSpPr>
-        <p:spPr>
-          <a:xfrm>
-            <a:off x="6172200" y="6075989"/>
+          <p:cNvPr id="44" name="Text 42"/>
+          <p:cNvSpPr/>
+          <p:nvPr/>
+        </p:nvSpPr>
+        <p:spPr>
+          <a:xfrm>
+            <a:off x="6172200" y="4841549"/>
             <a:ext cx="5577840" cy="228600"/>
           </a:xfrm>
           <a:prstGeom prst="rect">
@@ -19674,16 +22080,44 @@
             <a:pPr marL="0" indent="0">
               <a:buNone/>
             </a:pPr>
+            <a:endParaRPr lang="en-US" sz="950" dirty="0"/>
+          </a:p>
+        </p:txBody>
+      </p:sp>
+      <p:sp>
+        <p:nvSpPr>
+          <p:cNvPr id="47" name="Text 45"/>
+          <p:cNvSpPr/>
+          <p:nvPr/>
+        </p:nvSpPr>
+        <p:spPr>
+          <a:xfrm>
+            <a:off x="5943599" y="3942257"/>
+            <a:ext cx="5577840" cy="228600"/>
+          </a:xfrm>
+          <a:prstGeom prst="rect">
+            <a:avLst/>
+          </a:prstGeom>
+          <a:noFill/>
+          <a:ln/>
+        </p:spPr>
+        <p:txBody>
+          <a:bodyPr wrap="square" lIns="0" tIns="0" rIns="0" bIns="0" rtlCol="0" anchor="ctr"/>
+          <a:lstStyle/>
+          <a:p>
+            <a:pPr marL="0" indent="0">
+              <a:buNone/>
+            </a:pPr>
             <a:r>
               <a:rPr lang="en-US" sz="950" dirty="0">
                 <a:solidFill>
-                  <a:srgbClr val="10B981"/>
+                  <a:srgbClr val="8B949E"/>
                 </a:solidFill>
                 <a:latin typeface="Consolas" pitchFamily="34" charset="0"/>
                 <a:ea typeface="Consolas" pitchFamily="34" charset="-122"/>
                 <a:cs typeface="Consolas" pitchFamily="34" charset="-120"/>
               </a:rPr>
-              <a:t>vectordb = FAISS.load_local(</a:t>
+              <a:t>    # PDF 로드 → 청크 → 임베딩 → 저장</a:t>
             </a:r>
             <a:endParaRPr lang="en-US" sz="950" dirty="0"/>
           </a:p>
@@ -19691,14 +22125,14 @@
       </p:sp>
       <p:sp>
         <p:nvSpPr>
-          <p:cNvPr id="50" name="Text 48"/>
-          <p:cNvSpPr/>
-          <p:nvPr/>
-        </p:nvSpPr>
-        <p:spPr>
-          <a:xfrm>
-            <a:off x="6172200" y="6322877"/>
-            <a:ext cx="5577840" cy="228600"/>
+          <p:cNvPr id="52" name="Text 50"/>
+          <p:cNvSpPr/>
+          <p:nvPr/>
+        </p:nvSpPr>
+        <p:spPr>
+          <a:xfrm>
+            <a:off x="11064240" y="6510528"/>
+            <a:ext cx="914400" cy="274320"/>
           </a:xfrm>
           <a:prstGeom prst="rect">
             <a:avLst/>
@@ -19710,99 +22144,535 @@
           <a:bodyPr wrap="square" lIns="0" tIns="0" rIns="0" bIns="0" rtlCol="0" anchor="ctr"/>
           <a:lstStyle/>
           <a:p>
-            <a:pPr marL="0" indent="0">
-              <a:buNone/>
+            <a:pPr marL="0" indent="0" algn="r">
+              <a:buNone/>
+            </a:pPr>
+            <a:r>
+              <a:rPr lang="en-US" sz="900" dirty="0">
+                <a:solidFill>
+                  <a:srgbClr val="94A3B8"/>
+                </a:solidFill>
+                <a:latin typeface="Arial" pitchFamily="34" charset="0"/>
+                <a:ea typeface="Arial" pitchFamily="34" charset="-122"/>
+                <a:cs typeface="Arial" pitchFamily="34" charset="-120"/>
+              </a:rPr>
+              <a:t>2 / 18</a:t>
+            </a:r>
+            <a:endParaRPr lang="en-US" sz="900" dirty="0"/>
+          </a:p>
+        </p:txBody>
+      </p:sp>
+      <p:sp>
+        <p:nvSpPr>
+          <p:cNvPr id="16" name="Text 40">
+            <a:extLst>
+              <a:ext uri="{FF2B5EF4-FFF2-40B4-BE49-F238E27FC236}">
+                <a16:creationId xmlns:a16="http://schemas.microsoft.com/office/drawing/2014/main" id="{BF094C94-6196-7F47-EF06-E4D08F64D4D1}"/>
+              </a:ext>
+            </a:extLst>
+          </p:cNvPr>
+          <p:cNvSpPr/>
+          <p:nvPr/>
+        </p:nvSpPr>
+        <p:spPr>
+          <a:xfrm>
+            <a:off x="6195393" y="4251696"/>
+            <a:ext cx="5577840" cy="886834"/>
+          </a:xfrm>
+          <a:prstGeom prst="rect">
+            <a:avLst/>
+          </a:prstGeom>
+          <a:noFill/>
+          <a:ln/>
+        </p:spPr>
+        <p:txBody>
+          <a:bodyPr wrap="square" lIns="0" tIns="0" rIns="0" bIns="0" rtlCol="0" anchor="t"/>
+          <a:lstStyle/>
+          <a:p>
+            <a:pPr>
+              <a:lnSpc>
+                <a:spcPct val="150000"/>
+              </a:lnSpc>
             </a:pPr>
             <a:r>
               <a:rPr lang="en-US" sz="950" dirty="0">
                 <a:solidFill>
-                  <a:srgbClr val="10B981"/>
+                  <a:srgbClr val="E6EDF3"/>
                 </a:solidFill>
                 <a:latin typeface="Consolas" pitchFamily="34" charset="0"/>
                 <a:ea typeface="Consolas" pitchFamily="34" charset="-122"/>
                 <a:cs typeface="Consolas" pitchFamily="34" charset="-120"/>
               </a:rPr>
-              <a:t>    INDEX_DIR, embeddings,</a:t>
-            </a:r>
-            <a:endParaRPr lang="en-US" sz="950" dirty="0"/>
-          </a:p>
-        </p:txBody>
-      </p:sp>
-      <p:sp>
-        <p:nvSpPr>
-          <p:cNvPr id="51" name="Text 49"/>
-          <p:cNvSpPr/>
-          <p:nvPr/>
-        </p:nvSpPr>
-        <p:spPr>
-          <a:xfrm>
-            <a:off x="6172200" y="6569765"/>
-            <a:ext cx="5577840" cy="228600"/>
-          </a:xfrm>
-          <a:prstGeom prst="rect">
-            <a:avLst/>
-          </a:prstGeom>
-          <a:noFill/>
-          <a:ln/>
-        </p:spPr>
-        <p:txBody>
-          <a:bodyPr wrap="square" lIns="0" tIns="0" rIns="0" bIns="0" rtlCol="0" anchor="ctr"/>
-          <a:lstStyle/>
-          <a:p>
-            <a:pPr marL="0" indent="0">
-              <a:buNone/>
-            </a:pPr>
-            <a:r>
-              <a:rPr lang="en-US" sz="950" dirty="0">
-                <a:solidFill>
-                  <a:srgbClr val="10B981"/>
+              <a:t>from </a:t>
+            </a:r>
+            <a:r>
+              <a:rPr lang="en-US" sz="950" dirty="0" err="1">
+                <a:solidFill>
+                  <a:srgbClr val="E6EDF3"/>
                 </a:solidFill>
                 <a:latin typeface="Consolas" pitchFamily="34" charset="0"/>
                 <a:ea typeface="Consolas" pitchFamily="34" charset="-122"/>
                 <a:cs typeface="Consolas" pitchFamily="34" charset="-120"/>
               </a:rPr>
-              <a:t>    allow_dangerous_deserialization=True)</a:t>
-            </a:r>
-            <a:endParaRPr lang="en-US" sz="950" dirty="0"/>
-          </a:p>
-        </p:txBody>
-      </p:sp>
-      <p:sp>
-        <p:nvSpPr>
-          <p:cNvPr id="52" name="Text 50"/>
-          <p:cNvSpPr/>
-          <p:nvPr/>
-        </p:nvSpPr>
-        <p:spPr>
-          <a:xfrm>
-            <a:off x="11064240" y="6510528"/>
-            <a:ext cx="914400" cy="274320"/>
-          </a:xfrm>
-          <a:prstGeom prst="rect">
-            <a:avLst/>
-          </a:prstGeom>
-          <a:noFill/>
-          <a:ln/>
-        </p:spPr>
-        <p:txBody>
-          <a:bodyPr wrap="square" lIns="0" tIns="0" rIns="0" bIns="0" rtlCol="0" anchor="ctr"/>
-          <a:lstStyle/>
-          <a:p>
-            <a:pPr marL="0" indent="0" algn="r">
-              <a:buNone/>
-            </a:pPr>
-            <a:r>
-              <a:rPr lang="en-US" sz="900" dirty="0">
-                <a:solidFill>
-                  <a:srgbClr val="94A3B8"/>
-                </a:solidFill>
-                <a:latin typeface="Arial" pitchFamily="34" charset="0"/>
-                <a:ea typeface="Arial" pitchFamily="34" charset="-122"/>
-                <a:cs typeface="Arial" pitchFamily="34" charset="-120"/>
-              </a:rPr>
-              <a:t>2 / 18</a:t>
-            </a:r>
-            <a:endParaRPr lang="en-US" sz="900" dirty="0"/>
+              <a:t>langchain_community.document_loaders</a:t>
+            </a:r>
+            <a:r>
+              <a:rPr lang="en-US" sz="950" dirty="0">
+                <a:solidFill>
+                  <a:srgbClr val="E6EDF3"/>
+                </a:solidFill>
+                <a:latin typeface="Consolas" pitchFamily="34" charset="0"/>
+                <a:ea typeface="Consolas" pitchFamily="34" charset="-122"/>
+                <a:cs typeface="Consolas" pitchFamily="34" charset="-120"/>
+              </a:rPr>
+              <a:t> import </a:t>
+            </a:r>
+            <a:r>
+              <a:rPr lang="en-US" sz="950" dirty="0" err="1">
+                <a:solidFill>
+                  <a:srgbClr val="E6EDF3"/>
+                </a:solidFill>
+                <a:latin typeface="Consolas" pitchFamily="34" charset="0"/>
+                <a:ea typeface="Consolas" pitchFamily="34" charset="-122"/>
+                <a:cs typeface="Consolas" pitchFamily="34" charset="-120"/>
+              </a:rPr>
+              <a:t>PyPDFLoader</a:t>
+            </a:r>
+            <a:endParaRPr lang="en-US" sz="950" dirty="0">
+              <a:solidFill>
+                <a:srgbClr val="E6EDF3"/>
+              </a:solidFill>
+              <a:latin typeface="Consolas" pitchFamily="34" charset="0"/>
+              <a:ea typeface="Consolas" pitchFamily="34" charset="-122"/>
+              <a:cs typeface="Consolas" pitchFamily="34" charset="-120"/>
+            </a:endParaRPr>
+          </a:p>
+          <a:p>
+            <a:pPr>
+              <a:lnSpc>
+                <a:spcPct val="150000"/>
+              </a:lnSpc>
+            </a:pPr>
+            <a:r>
+              <a:rPr lang="en-US" sz="950" dirty="0">
+                <a:solidFill>
+                  <a:srgbClr val="E6EDF3"/>
+                </a:solidFill>
+                <a:latin typeface="Consolas" pitchFamily="34" charset="0"/>
+                <a:ea typeface="Consolas" pitchFamily="34" charset="-122"/>
+                <a:cs typeface="Consolas" pitchFamily="34" charset="-120"/>
+              </a:rPr>
+              <a:t>from </a:t>
+            </a:r>
+            <a:r>
+              <a:rPr lang="en-US" sz="950" dirty="0" err="1">
+                <a:solidFill>
+                  <a:srgbClr val="E6EDF3"/>
+                </a:solidFill>
+                <a:latin typeface="Consolas" pitchFamily="34" charset="0"/>
+                <a:ea typeface="Consolas" pitchFamily="34" charset="-122"/>
+                <a:cs typeface="Consolas" pitchFamily="34" charset="-120"/>
+              </a:rPr>
+              <a:t>langchain_text_splitters</a:t>
+            </a:r>
+            <a:r>
+              <a:rPr lang="en-US" sz="950" dirty="0">
+                <a:solidFill>
+                  <a:srgbClr val="E6EDF3"/>
+                </a:solidFill>
+                <a:latin typeface="Consolas" pitchFamily="34" charset="0"/>
+                <a:ea typeface="Consolas" pitchFamily="34" charset="-122"/>
+                <a:cs typeface="Consolas" pitchFamily="34" charset="-120"/>
+              </a:rPr>
+              <a:t> import </a:t>
+            </a:r>
+            <a:r>
+              <a:rPr lang="en-US" sz="950" dirty="0" err="1">
+                <a:solidFill>
+                  <a:srgbClr val="E6EDF3"/>
+                </a:solidFill>
+                <a:latin typeface="Consolas" pitchFamily="34" charset="0"/>
+                <a:ea typeface="Consolas" pitchFamily="34" charset="-122"/>
+                <a:cs typeface="Consolas" pitchFamily="34" charset="-120"/>
+              </a:rPr>
+              <a:t>RecursiveCharacterTextSplitter</a:t>
+            </a:r>
+            <a:endParaRPr lang="en-US" sz="950" dirty="0">
+              <a:solidFill>
+                <a:srgbClr val="E6EDF3"/>
+              </a:solidFill>
+              <a:latin typeface="Consolas" pitchFamily="34" charset="0"/>
+              <a:ea typeface="Consolas" pitchFamily="34" charset="-122"/>
+              <a:cs typeface="Consolas" pitchFamily="34" charset="-120"/>
+            </a:endParaRPr>
+          </a:p>
+          <a:p>
+            <a:pPr>
+              <a:lnSpc>
+                <a:spcPct val="150000"/>
+              </a:lnSpc>
+            </a:pPr>
+            <a:r>
+              <a:rPr lang="en-US" sz="950" dirty="0">
+                <a:solidFill>
+                  <a:srgbClr val="E6EDF3"/>
+                </a:solidFill>
+                <a:latin typeface="Consolas" pitchFamily="34" charset="0"/>
+                <a:ea typeface="Consolas" pitchFamily="34" charset="-122"/>
+                <a:cs typeface="Consolas" pitchFamily="34" charset="-120"/>
+              </a:rPr>
+              <a:t>loader = </a:t>
+            </a:r>
+            <a:r>
+              <a:rPr lang="en-US" sz="950" dirty="0" err="1">
+                <a:solidFill>
+                  <a:srgbClr val="E6EDF3"/>
+                </a:solidFill>
+                <a:latin typeface="Consolas" pitchFamily="34" charset="0"/>
+                <a:ea typeface="Consolas" pitchFamily="34" charset="-122"/>
+                <a:cs typeface="Consolas" pitchFamily="34" charset="-120"/>
+              </a:rPr>
+              <a:t>PyPDFLoader</a:t>
+            </a:r>
+            <a:r>
+              <a:rPr lang="en-US" sz="950" dirty="0">
+                <a:solidFill>
+                  <a:srgbClr val="E6EDF3"/>
+                </a:solidFill>
+                <a:latin typeface="Consolas" pitchFamily="34" charset="0"/>
+                <a:ea typeface="Consolas" pitchFamily="34" charset="-122"/>
+                <a:cs typeface="Consolas" pitchFamily="34" charset="-120"/>
+              </a:rPr>
+              <a:t>(PDF_PATH)</a:t>
+            </a:r>
+          </a:p>
+          <a:p>
+            <a:pPr>
+              <a:lnSpc>
+                <a:spcPct val="150000"/>
+              </a:lnSpc>
+            </a:pPr>
+            <a:r>
+              <a:rPr lang="en-US" sz="950" dirty="0">
+                <a:solidFill>
+                  <a:srgbClr val="E6EDF3"/>
+                </a:solidFill>
+                <a:latin typeface="Consolas" pitchFamily="34" charset="0"/>
+                <a:ea typeface="Consolas" pitchFamily="34" charset="-122"/>
+                <a:cs typeface="Consolas" pitchFamily="34" charset="-120"/>
+              </a:rPr>
+              <a:t>docs = </a:t>
+            </a:r>
+            <a:r>
+              <a:rPr lang="en-US" sz="950" dirty="0" err="1">
+                <a:solidFill>
+                  <a:srgbClr val="E6EDF3"/>
+                </a:solidFill>
+                <a:latin typeface="Consolas" pitchFamily="34" charset="0"/>
+                <a:ea typeface="Consolas" pitchFamily="34" charset="-122"/>
+                <a:cs typeface="Consolas" pitchFamily="34" charset="-120"/>
+              </a:rPr>
+              <a:t>loader.load</a:t>
+            </a:r>
+            <a:r>
+              <a:rPr lang="en-US" sz="950" dirty="0">
+                <a:solidFill>
+                  <a:srgbClr val="E6EDF3"/>
+                </a:solidFill>
+                <a:latin typeface="Consolas" pitchFamily="34" charset="0"/>
+                <a:ea typeface="Consolas" pitchFamily="34" charset="-122"/>
+                <a:cs typeface="Consolas" pitchFamily="34" charset="-120"/>
+              </a:rPr>
+              <a:t>()</a:t>
+            </a:r>
+          </a:p>
+          <a:p>
+            <a:pPr>
+              <a:lnSpc>
+                <a:spcPct val="150000"/>
+              </a:lnSpc>
+            </a:pPr>
+            <a:r>
+              <a:rPr lang="en-US" sz="950" dirty="0">
+                <a:solidFill>
+                  <a:srgbClr val="E6EDF3"/>
+                </a:solidFill>
+                <a:latin typeface="Consolas" pitchFamily="34" charset="0"/>
+                <a:ea typeface="Consolas" pitchFamily="34" charset="-122"/>
+                <a:cs typeface="Consolas" pitchFamily="34" charset="-120"/>
+              </a:rPr>
+              <a:t>splitter = </a:t>
+            </a:r>
+            <a:r>
+              <a:rPr lang="en-US" sz="950" dirty="0" err="1">
+                <a:solidFill>
+                  <a:srgbClr val="E6EDF3"/>
+                </a:solidFill>
+                <a:latin typeface="Consolas" pitchFamily="34" charset="0"/>
+                <a:ea typeface="Consolas" pitchFamily="34" charset="-122"/>
+                <a:cs typeface="Consolas" pitchFamily="34" charset="-120"/>
+              </a:rPr>
+              <a:t>RecursiveCharacterTextSplitter</a:t>
+            </a:r>
+            <a:r>
+              <a:rPr lang="en-US" sz="950" dirty="0">
+                <a:solidFill>
+                  <a:srgbClr val="E6EDF3"/>
+                </a:solidFill>
+                <a:latin typeface="Consolas" pitchFamily="34" charset="0"/>
+                <a:ea typeface="Consolas" pitchFamily="34" charset="-122"/>
+                <a:cs typeface="Consolas" pitchFamily="34" charset="-120"/>
+              </a:rPr>
+              <a:t>(</a:t>
+            </a:r>
+            <a:r>
+              <a:rPr lang="en-US" sz="950" dirty="0" err="1">
+                <a:solidFill>
+                  <a:srgbClr val="E6EDF3"/>
+                </a:solidFill>
+                <a:latin typeface="Consolas" pitchFamily="34" charset="0"/>
+                <a:ea typeface="Consolas" pitchFamily="34" charset="-122"/>
+                <a:cs typeface="Consolas" pitchFamily="34" charset="-120"/>
+              </a:rPr>
+              <a:t>chunk_size</a:t>
+            </a:r>
+            <a:r>
+              <a:rPr lang="en-US" sz="950" dirty="0">
+                <a:solidFill>
+                  <a:srgbClr val="E6EDF3"/>
+                </a:solidFill>
+                <a:latin typeface="Consolas" pitchFamily="34" charset="0"/>
+                <a:ea typeface="Consolas" pitchFamily="34" charset="-122"/>
+                <a:cs typeface="Consolas" pitchFamily="34" charset="-120"/>
+              </a:rPr>
+              <a:t>=500, </a:t>
+            </a:r>
+            <a:r>
+              <a:rPr lang="en-US" sz="950" dirty="0" err="1">
+                <a:solidFill>
+                  <a:srgbClr val="E6EDF3"/>
+                </a:solidFill>
+                <a:latin typeface="Consolas" pitchFamily="34" charset="0"/>
+                <a:ea typeface="Consolas" pitchFamily="34" charset="-122"/>
+                <a:cs typeface="Consolas" pitchFamily="34" charset="-120"/>
+              </a:rPr>
+              <a:t>chunk_overlap</a:t>
+            </a:r>
+            <a:r>
+              <a:rPr lang="en-US" sz="950" dirty="0">
+                <a:solidFill>
+                  <a:srgbClr val="E6EDF3"/>
+                </a:solidFill>
+                <a:latin typeface="Consolas" pitchFamily="34" charset="0"/>
+                <a:ea typeface="Consolas" pitchFamily="34" charset="-122"/>
+                <a:cs typeface="Consolas" pitchFamily="34" charset="-120"/>
+              </a:rPr>
+              <a:t>=50)</a:t>
+            </a:r>
+          </a:p>
+          <a:p>
+            <a:pPr>
+              <a:lnSpc>
+                <a:spcPct val="150000"/>
+              </a:lnSpc>
+            </a:pPr>
+            <a:r>
+              <a:rPr lang="en-US" sz="950" dirty="0">
+                <a:solidFill>
+                  <a:srgbClr val="E6EDF3"/>
+                </a:solidFill>
+                <a:latin typeface="Consolas" pitchFamily="34" charset="0"/>
+                <a:ea typeface="Consolas" pitchFamily="34" charset="-122"/>
+                <a:cs typeface="Consolas" pitchFamily="34" charset="-120"/>
+              </a:rPr>
+              <a:t>chunks = </a:t>
+            </a:r>
+            <a:r>
+              <a:rPr lang="en-US" sz="950" dirty="0" err="1">
+                <a:solidFill>
+                  <a:srgbClr val="E6EDF3"/>
+                </a:solidFill>
+                <a:latin typeface="Consolas" pitchFamily="34" charset="0"/>
+                <a:ea typeface="Consolas" pitchFamily="34" charset="-122"/>
+                <a:cs typeface="Consolas" pitchFamily="34" charset="-120"/>
+              </a:rPr>
+              <a:t>splitter.split_documents</a:t>
+            </a:r>
+            <a:r>
+              <a:rPr lang="en-US" sz="950" dirty="0">
+                <a:solidFill>
+                  <a:srgbClr val="E6EDF3"/>
+                </a:solidFill>
+                <a:latin typeface="Consolas" pitchFamily="34" charset="0"/>
+                <a:ea typeface="Consolas" pitchFamily="34" charset="-122"/>
+                <a:cs typeface="Consolas" pitchFamily="34" charset="-120"/>
+              </a:rPr>
+              <a:t>(docs)</a:t>
+            </a:r>
+          </a:p>
+          <a:p>
+            <a:pPr>
+              <a:lnSpc>
+                <a:spcPct val="150000"/>
+              </a:lnSpc>
+            </a:pPr>
+            <a:r>
+              <a:rPr lang="en-US" sz="950" dirty="0" err="1">
+                <a:solidFill>
+                  <a:srgbClr val="E6EDF3"/>
+                </a:solidFill>
+                <a:latin typeface="Consolas" pitchFamily="34" charset="0"/>
+                <a:ea typeface="Consolas" pitchFamily="34" charset="-122"/>
+                <a:cs typeface="Consolas" pitchFamily="34" charset="-120"/>
+              </a:rPr>
+              <a:t>vectordb</a:t>
+            </a:r>
+            <a:r>
+              <a:rPr lang="en-US" sz="950" dirty="0">
+                <a:solidFill>
+                  <a:srgbClr val="E6EDF3"/>
+                </a:solidFill>
+                <a:latin typeface="Consolas" pitchFamily="34" charset="0"/>
+                <a:ea typeface="Consolas" pitchFamily="34" charset="-122"/>
+                <a:cs typeface="Consolas" pitchFamily="34" charset="-120"/>
+              </a:rPr>
+              <a:t> = </a:t>
+            </a:r>
+            <a:r>
+              <a:rPr lang="en-US" sz="950" dirty="0" err="1">
+                <a:solidFill>
+                  <a:srgbClr val="E6EDF3"/>
+                </a:solidFill>
+                <a:latin typeface="Consolas" pitchFamily="34" charset="0"/>
+                <a:ea typeface="Consolas" pitchFamily="34" charset="-122"/>
+                <a:cs typeface="Consolas" pitchFamily="34" charset="-120"/>
+              </a:rPr>
+              <a:t>FAISS.from_documents</a:t>
+            </a:r>
+            <a:r>
+              <a:rPr lang="en-US" sz="950" dirty="0">
+                <a:solidFill>
+                  <a:srgbClr val="E6EDF3"/>
+                </a:solidFill>
+                <a:latin typeface="Consolas" pitchFamily="34" charset="0"/>
+                <a:ea typeface="Consolas" pitchFamily="34" charset="-122"/>
+                <a:cs typeface="Consolas" pitchFamily="34" charset="-120"/>
+              </a:rPr>
+              <a:t>(chunks, embeddings)</a:t>
+            </a:r>
+          </a:p>
+          <a:p>
+            <a:pPr>
+              <a:lnSpc>
+                <a:spcPct val="150000"/>
+              </a:lnSpc>
+            </a:pPr>
+            <a:r>
+              <a:rPr lang="en-US" sz="950" dirty="0" err="1">
+                <a:solidFill>
+                  <a:srgbClr val="E6EDF3"/>
+                </a:solidFill>
+                <a:latin typeface="Consolas" pitchFamily="34" charset="0"/>
+                <a:ea typeface="Consolas" pitchFamily="34" charset="-122"/>
+                <a:cs typeface="Consolas" pitchFamily="34" charset="-120"/>
+              </a:rPr>
+              <a:t>vectordb.save_local</a:t>
+            </a:r>
+            <a:r>
+              <a:rPr lang="en-US" sz="950" dirty="0">
+                <a:solidFill>
+                  <a:srgbClr val="E6EDF3"/>
+                </a:solidFill>
+                <a:latin typeface="Consolas" pitchFamily="34" charset="0"/>
+                <a:ea typeface="Consolas" pitchFamily="34" charset="-122"/>
+                <a:cs typeface="Consolas" pitchFamily="34" charset="-120"/>
+              </a:rPr>
+              <a:t>(INDEX_DIR)</a:t>
+            </a:r>
+          </a:p>
+          <a:p>
+            <a:pPr>
+              <a:lnSpc>
+                <a:spcPct val="150000"/>
+              </a:lnSpc>
+            </a:pPr>
+            <a:r>
+              <a:rPr lang="en-US" sz="950" dirty="0">
+                <a:solidFill>
+                  <a:srgbClr val="E6EDF3"/>
+                </a:solidFill>
+                <a:latin typeface="Consolas" pitchFamily="34" charset="0"/>
+                <a:ea typeface="Consolas" pitchFamily="34" charset="-122"/>
+                <a:cs typeface="Consolas" pitchFamily="34" charset="-120"/>
+              </a:rPr>
+              <a:t>print(f'✅ FAISS </a:t>
+            </a:r>
+            <a:r>
+              <a:rPr lang="ko-KR" altLang="en-US" sz="950" dirty="0">
+                <a:solidFill>
+                  <a:srgbClr val="E6EDF3"/>
+                </a:solidFill>
+                <a:latin typeface="Consolas" pitchFamily="34" charset="0"/>
+                <a:ea typeface="Consolas" pitchFamily="34" charset="-122"/>
+                <a:cs typeface="Consolas" pitchFamily="34" charset="-120"/>
+              </a:rPr>
+              <a:t>인덱스 저장 완료 </a:t>
+            </a:r>
+            <a:r>
+              <a:rPr lang="en-US" altLang="ko-KR" sz="950" dirty="0">
+                <a:solidFill>
+                  <a:srgbClr val="E6EDF3"/>
+                </a:solidFill>
+                <a:latin typeface="Consolas" pitchFamily="34" charset="0"/>
+                <a:ea typeface="Consolas" pitchFamily="34" charset="-122"/>
+                <a:cs typeface="Consolas" pitchFamily="34" charset="-120"/>
+              </a:rPr>
+              <a:t>({</a:t>
+            </a:r>
+            <a:r>
+              <a:rPr lang="en-US" sz="950" dirty="0" err="1">
+                <a:solidFill>
+                  <a:srgbClr val="E6EDF3"/>
+                </a:solidFill>
+                <a:latin typeface="Consolas" pitchFamily="34" charset="0"/>
+                <a:ea typeface="Consolas" pitchFamily="34" charset="-122"/>
+                <a:cs typeface="Consolas" pitchFamily="34" charset="-120"/>
+              </a:rPr>
+              <a:t>len</a:t>
+            </a:r>
+            <a:r>
+              <a:rPr lang="en-US" sz="950" dirty="0">
+                <a:solidFill>
+                  <a:srgbClr val="E6EDF3"/>
+                </a:solidFill>
+                <a:latin typeface="Consolas" pitchFamily="34" charset="0"/>
+                <a:ea typeface="Consolas" pitchFamily="34" charset="-122"/>
+                <a:cs typeface="Consolas" pitchFamily="34" charset="-120"/>
+              </a:rPr>
+              <a:t>(chunks)} </a:t>
+            </a:r>
+            <a:r>
+              <a:rPr lang="ko-KR" altLang="en-US" sz="950" dirty="0" err="1">
+                <a:solidFill>
+                  <a:srgbClr val="E6EDF3"/>
+                </a:solidFill>
+                <a:latin typeface="Consolas" pitchFamily="34" charset="0"/>
+                <a:ea typeface="Consolas" pitchFamily="34" charset="-122"/>
+                <a:cs typeface="Consolas" pitchFamily="34" charset="-120"/>
+              </a:rPr>
+              <a:t>청크</a:t>
+            </a:r>
+            <a:r>
+              <a:rPr lang="en-US" altLang="ko-KR" sz="950" dirty="0">
+                <a:solidFill>
+                  <a:srgbClr val="E6EDF3"/>
+                </a:solidFill>
+                <a:latin typeface="Consolas" pitchFamily="34" charset="0"/>
+                <a:ea typeface="Consolas" pitchFamily="34" charset="-122"/>
+                <a:cs typeface="Consolas" pitchFamily="34" charset="-120"/>
+              </a:rPr>
+              <a:t>)')</a:t>
+            </a:r>
           </a:p>
         </p:txBody>
       </p:sp>
@@ -19814,7 +22684,7 @@
 </p:sld>
 </file>
 
-<file path=ppt/slides/slide3.xml><?xml version="1.0" encoding="utf-8"?>
+<file path=ppt/slides/slide4.xml><?xml version="1.0" encoding="utf-8"?>
 <p:sld xmlns:a="http://schemas.openxmlformats.org/drawingml/2006/main" xmlns:r="http://schemas.openxmlformats.org/officeDocument/2006/relationships" xmlns:p="http://schemas.openxmlformats.org/presentationml/2006/main">
   <p:cSld name="Slide 3">
     <p:bg>
@@ -20597,7 +23467,7 @@
 </p:sld>
 </file>
 
-<file path=ppt/slides/slide4.xml><?xml version="1.0" encoding="utf-8"?>
+<file path=ppt/slides/slide5.xml><?xml version="1.0" encoding="utf-8"?>
 <p:sld xmlns:a="http://schemas.openxmlformats.org/drawingml/2006/main" xmlns:r="http://schemas.openxmlformats.org/officeDocument/2006/relationships" xmlns:p="http://schemas.openxmlformats.org/presentationml/2006/main">
   <p:cSld name="Slide 4">
     <p:bg>
@@ -21825,7 +24695,7 @@
 </p:sld>
 </file>
 
-<file path=ppt/slides/slide5.xml><?xml version="1.0" encoding="utf-8"?>
+<file path=ppt/slides/slide6.xml><?xml version="1.0" encoding="utf-8"?>
 <p:sld xmlns:a="http://schemas.openxmlformats.org/drawingml/2006/main" xmlns:r="http://schemas.openxmlformats.org/officeDocument/2006/relationships" xmlns:p="http://schemas.openxmlformats.org/presentationml/2006/main">
   <p:cSld name="Slide 5">
     <p:bg>
@@ -23315,7 +26185,7 @@
 </p:sld>
 </file>
 
-<file path=ppt/slides/slide6.xml><?xml version="1.0" encoding="utf-8"?>
+<file path=ppt/slides/slide7.xml><?xml version="1.0" encoding="utf-8"?>
 <p:sld xmlns:a="http://schemas.openxmlformats.org/drawingml/2006/main" xmlns:r="http://schemas.openxmlformats.org/officeDocument/2006/relationships" xmlns:p="http://schemas.openxmlformats.org/presentationml/2006/main">
   <p:cSld name="Slide 7">
     <p:bg>
@@ -24137,7 +27007,7 @@
 </p:sld>
 </file>
 
-<file path=ppt/slides/slide7.xml><?xml version="1.0" encoding="utf-8"?>
+<file path=ppt/slides/slide8.xml><?xml version="1.0" encoding="utf-8"?>
 <p:sld xmlns:a="http://schemas.openxmlformats.org/drawingml/2006/main" xmlns:r="http://schemas.openxmlformats.org/officeDocument/2006/relationships" xmlns:p="http://schemas.openxmlformats.org/presentationml/2006/main">
   <p:cSld name="Slide 8">
     <p:bg>
@@ -25404,7 +28274,7 @@
 </p:sld>
 </file>
 
-<file path=ppt/slides/slide8.xml><?xml version="1.0" encoding="utf-8"?>
+<file path=ppt/slides/slide9.xml><?xml version="1.0" encoding="utf-8"?>
 <p:sld xmlns:a="http://schemas.openxmlformats.org/drawingml/2006/main" xmlns:r="http://schemas.openxmlformats.org/officeDocument/2006/relationships" xmlns:p="http://schemas.openxmlformats.org/presentationml/2006/main">
   <p:cSld name="Slide 9">
     <p:bg>
@@ -26892,877 +29762,6 @@
                 <a:cs typeface="Arial" pitchFamily="34" charset="-120"/>
               </a:rPr>
               <a:t>9 / 18</a:t>
-            </a:r>
-            <a:endParaRPr lang="en-US" sz="900" dirty="0"/>
-          </a:p>
-        </p:txBody>
-      </p:sp>
-    </p:spTree>
-  </p:cSld>
-  <p:clrMapOvr>
-    <a:masterClrMapping/>
-  </p:clrMapOvr>
-</p:sld>
-</file>
-
-<file path=ppt/slides/slide9.xml><?xml version="1.0" encoding="utf-8"?>
-<p:sld xmlns:a="http://schemas.openxmlformats.org/drawingml/2006/main" xmlns:r="http://schemas.openxmlformats.org/officeDocument/2006/relationships" xmlns:p="http://schemas.openxmlformats.org/presentationml/2006/main">
-  <p:cSld name="Slide 12">
-    <p:bg>
-      <p:bgPr>
-        <a:solidFill>
-          <a:srgbClr val="111848"/>
-        </a:solidFill>
-        <a:effectLst/>
-      </p:bgPr>
-    </p:bg>
-    <p:spTree>
-      <p:nvGrpSpPr>
-        <p:cNvPr id="1" name=""/>
-        <p:cNvGrpSpPr/>
-        <p:nvPr/>
-      </p:nvGrpSpPr>
-      <p:grpSpPr>
-        <a:xfrm>
-          <a:off x="0" y="0"/>
-          <a:ext cx="0" cy="0"/>
-          <a:chOff x="0" y="0"/>
-          <a:chExt cx="0" cy="0"/>
-        </a:xfrm>
-      </p:grpSpPr>
-      <p:sp>
-        <p:nvSpPr>
-          <p:cNvPr id="2" name="Shape 0"/>
-          <p:cNvSpPr/>
-          <p:nvPr/>
-        </p:nvSpPr>
-        <p:spPr>
-          <a:xfrm>
-            <a:off x="0" y="0"/>
-            <a:ext cx="164592" cy="6858000"/>
-          </a:xfrm>
-          <a:prstGeom prst="rect">
-            <a:avLst/>
-          </a:prstGeom>
-          <a:solidFill>
-            <a:srgbClr val="0F766E"/>
-          </a:solidFill>
-          <a:ln/>
-        </p:spPr>
-        <p:txBody>
-          <a:bodyPr/>
-          <a:lstStyle/>
-          <a:p>
-            <a:endParaRPr lang="ko-KR" altLang="en-US"/>
-          </a:p>
-        </p:txBody>
-      </p:sp>
-      <p:sp>
-        <p:nvSpPr>
-          <p:cNvPr id="3" name="Text 1"/>
-          <p:cNvSpPr/>
-          <p:nvPr/>
-        </p:nvSpPr>
-        <p:spPr>
-          <a:xfrm>
-            <a:off x="411480" y="914400"/>
-            <a:ext cx="8229600" cy="384048"/>
-          </a:xfrm>
-          <a:prstGeom prst="rect">
-            <a:avLst/>
-          </a:prstGeom>
-          <a:noFill/>
-          <a:ln/>
-        </p:spPr>
-        <p:txBody>
-          <a:bodyPr wrap="square" lIns="0" tIns="0" rIns="0" bIns="0" rtlCol="0" anchor="ctr"/>
-          <a:lstStyle/>
-          <a:p>
-            <a:pPr marL="0" indent="0">
-              <a:buNone/>
-            </a:pPr>
-            <a:r>
-              <a:rPr lang="en-US" sz="1400" b="1" dirty="0">
-                <a:solidFill>
-                  <a:srgbClr val="0F766E"/>
-                </a:solidFill>
-                <a:latin typeface="Arial" pitchFamily="34" charset="0"/>
-                <a:ea typeface="Arial" pitchFamily="34" charset="-122"/>
-                <a:cs typeface="Arial" pitchFamily="34" charset="-120"/>
-              </a:rPr>
-              <a:t>실습 C</a:t>
-            </a:r>
-            <a:endParaRPr lang="en-US" sz="1400" dirty="0"/>
-          </a:p>
-        </p:txBody>
-      </p:sp>
-      <p:sp>
-        <p:nvSpPr>
-          <p:cNvPr id="4" name="Text 2"/>
-          <p:cNvSpPr/>
-          <p:nvPr/>
-        </p:nvSpPr>
-        <p:spPr>
-          <a:xfrm>
-            <a:off x="411480" y="1371600"/>
-            <a:ext cx="7772400" cy="1645920"/>
-          </a:xfrm>
-          <a:prstGeom prst="rect">
-            <a:avLst/>
-          </a:prstGeom>
-          <a:noFill/>
-          <a:ln/>
-        </p:spPr>
-        <p:txBody>
-          <a:bodyPr wrap="square" rtlCol="0" anchor="ctr"/>
-          <a:lstStyle/>
-          <a:p>
-            <a:pPr marL="0" indent="0">
-              <a:buNone/>
-            </a:pPr>
-            <a:r>
-              <a:rPr lang="en-US" sz="3400" b="1" dirty="0">
-                <a:solidFill>
-                  <a:srgbClr val="FFFFFF"/>
-                </a:solidFill>
-                <a:latin typeface="Arial" pitchFamily="34" charset="0"/>
-                <a:ea typeface="Arial" pitchFamily="34" charset="-122"/>
-                <a:cs typeface="Arial" pitchFamily="34" charset="-120"/>
-              </a:rPr>
-              <a:t>RAG 프롬프트 인젝션</a:t>
-            </a:r>
-            <a:endParaRPr lang="en-US" sz="3400" dirty="0"/>
-          </a:p>
-          <a:p>
-            <a:pPr marL="0" indent="0">
-              <a:buNone/>
-            </a:pPr>
-            <a:r>
-              <a:rPr lang="en-US" sz="3400" b="1" dirty="0">
-                <a:solidFill>
-                  <a:srgbClr val="FFFFFF"/>
-                </a:solidFill>
-                <a:latin typeface="Arial" pitchFamily="34" charset="0"/>
-                <a:ea typeface="Arial" pitchFamily="34" charset="-122"/>
-                <a:cs typeface="Arial" pitchFamily="34" charset="-120"/>
-              </a:rPr>
-              <a:t>(LLM01)</a:t>
-            </a:r>
-            <a:endParaRPr lang="en-US" sz="3400" dirty="0"/>
-          </a:p>
-        </p:txBody>
-      </p:sp>
-      <p:sp>
-        <p:nvSpPr>
-          <p:cNvPr id="5" name="Text 3"/>
-          <p:cNvSpPr/>
-          <p:nvPr/>
-        </p:nvSpPr>
-        <p:spPr>
-          <a:xfrm>
-            <a:off x="411480" y="3154680"/>
-            <a:ext cx="7772400" cy="438912"/>
-          </a:xfrm>
-          <a:prstGeom prst="rect">
-            <a:avLst/>
-          </a:prstGeom>
-          <a:noFill/>
-          <a:ln/>
-        </p:spPr>
-        <p:txBody>
-          <a:bodyPr wrap="square" rtlCol="0" anchor="ctr"/>
-          <a:lstStyle/>
-          <a:p>
-            <a:pPr marL="0" indent="0">
-              <a:buNone/>
-            </a:pPr>
-            <a:r>
-              <a:rPr lang="en-US" sz="1300" i="1" dirty="0">
-                <a:solidFill>
-                  <a:srgbClr val="94A3B8"/>
-                </a:solidFill>
-                <a:latin typeface="Arial" pitchFamily="34" charset="0"/>
-                <a:ea typeface="Arial" pitchFamily="34" charset="-122"/>
-                <a:cs typeface="Arial" pitchFamily="34" charset="-120"/>
-              </a:rPr>
-              <a:t>"문서 한 건으로 RAG 전체가 조종된다"</a:t>
-            </a:r>
-            <a:endParaRPr lang="en-US" sz="1300" dirty="0"/>
-          </a:p>
-        </p:txBody>
-      </p:sp>
-      <p:sp>
-        <p:nvSpPr>
-          <p:cNvPr id="6" name="Shape 4"/>
-          <p:cNvSpPr/>
-          <p:nvPr/>
-        </p:nvSpPr>
-        <p:spPr>
-          <a:xfrm>
-            <a:off x="411480" y="3794760"/>
-            <a:ext cx="1159459" cy="274320"/>
-          </a:xfrm>
-          <a:prstGeom prst="rect">
-            <a:avLst/>
-          </a:prstGeom>
-          <a:solidFill>
-            <a:srgbClr val="0F766E"/>
-          </a:solidFill>
-          <a:ln/>
-        </p:spPr>
-        <p:txBody>
-          <a:bodyPr/>
-          <a:lstStyle/>
-          <a:p>
-            <a:endParaRPr lang="ko-KR" altLang="en-US"/>
-          </a:p>
-        </p:txBody>
-      </p:sp>
-      <p:sp>
-        <p:nvSpPr>
-          <p:cNvPr id="7" name="Text 5"/>
-          <p:cNvSpPr/>
-          <p:nvPr/>
-        </p:nvSpPr>
-        <p:spPr>
-          <a:xfrm>
-            <a:off x="475488" y="3794760"/>
-            <a:ext cx="1031443" cy="274320"/>
-          </a:xfrm>
-          <a:prstGeom prst="rect">
-            <a:avLst/>
-          </a:prstGeom>
-          <a:noFill/>
-          <a:ln/>
-        </p:spPr>
-        <p:txBody>
-          <a:bodyPr wrap="square" lIns="0" tIns="0" rIns="0" bIns="0" rtlCol="0" anchor="ctr"/>
-          <a:lstStyle/>
-          <a:p>
-            <a:pPr marL="0" indent="0">
-              <a:buNone/>
-            </a:pPr>
-            <a:r>
-              <a:rPr lang="en-US" sz="900" b="1" dirty="0">
-                <a:solidFill>
-                  <a:srgbClr val="FFFFFF"/>
-                </a:solidFill>
-                <a:latin typeface="Arial" pitchFamily="34" charset="0"/>
-                <a:ea typeface="Arial" pitchFamily="34" charset="-122"/>
-                <a:cs typeface="Arial" pitchFamily="34" charset="-120"/>
-              </a:rPr>
-              <a:t>LLM01 간접인젝션</a:t>
-            </a:r>
-            <a:endParaRPr lang="en-US" sz="900" dirty="0"/>
-          </a:p>
-        </p:txBody>
-      </p:sp>
-      <p:sp>
-        <p:nvSpPr>
-          <p:cNvPr id="8" name="Shape 6"/>
-          <p:cNvSpPr/>
-          <p:nvPr/>
-        </p:nvSpPr>
-        <p:spPr>
-          <a:xfrm>
-            <a:off x="1662379" y="3794760"/>
-            <a:ext cx="1159459" cy="274320"/>
-          </a:xfrm>
-          <a:prstGeom prst="rect">
-            <a:avLst/>
-          </a:prstGeom>
-          <a:solidFill>
-            <a:srgbClr val="0F766E"/>
-          </a:solidFill>
-          <a:ln/>
-        </p:spPr>
-        <p:txBody>
-          <a:bodyPr/>
-          <a:lstStyle/>
-          <a:p>
-            <a:endParaRPr lang="ko-KR" altLang="en-US"/>
-          </a:p>
-        </p:txBody>
-      </p:sp>
-      <p:sp>
-        <p:nvSpPr>
-          <p:cNvPr id="9" name="Text 7"/>
-          <p:cNvSpPr/>
-          <p:nvPr/>
-        </p:nvSpPr>
-        <p:spPr>
-          <a:xfrm>
-            <a:off x="1726387" y="3794760"/>
-            <a:ext cx="1031443" cy="274320"/>
-          </a:xfrm>
-          <a:prstGeom prst="rect">
-            <a:avLst/>
-          </a:prstGeom>
-          <a:noFill/>
-          <a:ln/>
-        </p:spPr>
-        <p:txBody>
-          <a:bodyPr wrap="square" lIns="0" tIns="0" rIns="0" bIns="0" rtlCol="0" anchor="ctr"/>
-          <a:lstStyle/>
-          <a:p>
-            <a:pPr marL="0" indent="0">
-              <a:buNone/>
-            </a:pPr>
-            <a:r>
-              <a:rPr lang="en-US" sz="900" b="1" dirty="0">
-                <a:solidFill>
-                  <a:srgbClr val="FFFFFF"/>
-                </a:solidFill>
-                <a:latin typeface="Arial" pitchFamily="34" charset="0"/>
-                <a:ea typeface="Arial" pitchFamily="34" charset="-122"/>
-                <a:cs typeface="Arial" pitchFamily="34" charset="-120"/>
-              </a:rPr>
-              <a:t>M03 DOC태그격리</a:t>
-            </a:r>
-            <a:endParaRPr lang="en-US" sz="900" dirty="0"/>
-          </a:p>
-        </p:txBody>
-      </p:sp>
-      <p:sp>
-        <p:nvSpPr>
-          <p:cNvPr id="10" name="Shape 8"/>
-          <p:cNvSpPr/>
-          <p:nvPr/>
-        </p:nvSpPr>
-        <p:spPr>
-          <a:xfrm>
-            <a:off x="2913278" y="3794760"/>
-            <a:ext cx="918058" cy="274320"/>
-          </a:xfrm>
-          <a:prstGeom prst="rect">
-            <a:avLst/>
-          </a:prstGeom>
-          <a:solidFill>
-            <a:srgbClr val="0F766E"/>
-          </a:solidFill>
-          <a:ln/>
-        </p:spPr>
-        <p:txBody>
-          <a:bodyPr/>
-          <a:lstStyle/>
-          <a:p>
-            <a:endParaRPr lang="ko-KR" altLang="en-US"/>
-          </a:p>
-        </p:txBody>
-      </p:sp>
-      <p:sp>
-        <p:nvSpPr>
-          <p:cNvPr id="11" name="Text 9"/>
-          <p:cNvSpPr/>
-          <p:nvPr/>
-        </p:nvSpPr>
-        <p:spPr>
-          <a:xfrm>
-            <a:off x="2977286" y="3794760"/>
-            <a:ext cx="790042" cy="274320"/>
-          </a:xfrm>
-          <a:prstGeom prst="rect">
-            <a:avLst/>
-          </a:prstGeom>
-          <a:noFill/>
-          <a:ln/>
-        </p:spPr>
-        <p:txBody>
-          <a:bodyPr wrap="square" lIns="0" tIns="0" rIns="0" bIns="0" rtlCol="0" anchor="ctr"/>
-          <a:lstStyle/>
-          <a:p>
-            <a:pPr marL="0" indent="0">
-              <a:buNone/>
-            </a:pPr>
-            <a:r>
-              <a:rPr lang="en-US" sz="900" b="1" dirty="0">
-                <a:solidFill>
-                  <a:srgbClr val="FFFFFF"/>
-                </a:solidFill>
-                <a:latin typeface="Arial" pitchFamily="34" charset="0"/>
-                <a:ea typeface="Arial" pitchFamily="34" charset="-122"/>
-                <a:cs typeface="Arial" pitchFamily="34" charset="-120"/>
-              </a:rPr>
-              <a:t>M11 출처표기</a:t>
-            </a:r>
-            <a:endParaRPr lang="en-US" sz="900" dirty="0"/>
-          </a:p>
-        </p:txBody>
-      </p:sp>
-      <p:sp>
-        <p:nvSpPr>
-          <p:cNvPr id="12" name="Shape 10"/>
-          <p:cNvSpPr/>
-          <p:nvPr/>
-        </p:nvSpPr>
-        <p:spPr>
-          <a:xfrm>
-            <a:off x="3922776" y="3794760"/>
-            <a:ext cx="1561795" cy="274320"/>
-          </a:xfrm>
-          <a:prstGeom prst="rect">
-            <a:avLst/>
-          </a:prstGeom>
-          <a:solidFill>
-            <a:srgbClr val="0F766E"/>
-          </a:solidFill>
-          <a:ln/>
-        </p:spPr>
-        <p:txBody>
-          <a:bodyPr/>
-          <a:lstStyle/>
-          <a:p>
-            <a:endParaRPr lang="ko-KR" altLang="en-US"/>
-          </a:p>
-        </p:txBody>
-      </p:sp>
-      <p:sp>
-        <p:nvSpPr>
-          <p:cNvPr id="13" name="Text 11"/>
-          <p:cNvSpPr/>
-          <p:nvPr/>
-        </p:nvSpPr>
-        <p:spPr>
-          <a:xfrm>
-            <a:off x="3986784" y="3794760"/>
-            <a:ext cx="1433779" cy="274320"/>
-          </a:xfrm>
-          <a:prstGeom prst="rect">
-            <a:avLst/>
-          </a:prstGeom>
-          <a:noFill/>
-          <a:ln/>
-        </p:spPr>
-        <p:txBody>
-          <a:bodyPr wrap="square" lIns="0" tIns="0" rIns="0" bIns="0" rtlCol="0" anchor="ctr"/>
-          <a:lstStyle/>
-          <a:p>
-            <a:pPr marL="0" indent="0">
-              <a:buNone/>
-            </a:pPr>
-            <a:r>
-              <a:rPr lang="en-US" sz="900" b="1" dirty="0">
-                <a:solidFill>
-                  <a:srgbClr val="FFFFFF"/>
-                </a:solidFill>
-                <a:latin typeface="Arial" pitchFamily="34" charset="0"/>
-                <a:ea typeface="Arial" pitchFamily="34" charset="-122"/>
-                <a:cs typeface="Arial" pitchFamily="34" charset="-120"/>
-              </a:rPr>
-              <a:t>M13 VectorDB쓰기통제</a:t>
-            </a:r>
-            <a:endParaRPr lang="en-US" sz="900" dirty="0"/>
-          </a:p>
-        </p:txBody>
-      </p:sp>
-      <p:sp>
-        <p:nvSpPr>
-          <p:cNvPr id="14" name="Shape 12"/>
-          <p:cNvSpPr/>
-          <p:nvPr/>
-        </p:nvSpPr>
-        <p:spPr>
-          <a:xfrm>
-            <a:off x="8686800" y="731520"/>
-            <a:ext cx="3200400" cy="5029200"/>
-          </a:xfrm>
-          <a:prstGeom prst="rect">
-            <a:avLst/>
-          </a:prstGeom>
-          <a:solidFill>
-            <a:srgbClr val="0F172A"/>
-          </a:solidFill>
-          <a:ln/>
-          <a:effectLst>
-            <a:outerShdw blurRad="63500" dist="25400" dir="8100000" algn="bl" rotWithShape="0">
-              <a:srgbClr val="000000">
-                <a:alpha val="10000"/>
-              </a:srgbClr>
-            </a:outerShdw>
-          </a:effectLst>
-        </p:spPr>
-        <p:txBody>
-          <a:bodyPr/>
-          <a:lstStyle/>
-          <a:p>
-            <a:endParaRPr lang="ko-KR" altLang="en-US"/>
-          </a:p>
-        </p:txBody>
-      </p:sp>
-      <p:sp>
-        <p:nvSpPr>
-          <p:cNvPr id="15" name="Text 13"/>
-          <p:cNvSpPr/>
-          <p:nvPr/>
-        </p:nvSpPr>
-        <p:spPr>
-          <a:xfrm>
-            <a:off x="8823960" y="914400"/>
-            <a:ext cx="2880360" cy="420624"/>
-          </a:xfrm>
-          <a:prstGeom prst="rect">
-            <a:avLst/>
-          </a:prstGeom>
-          <a:noFill/>
-          <a:ln/>
-        </p:spPr>
-        <p:txBody>
-          <a:bodyPr wrap="square" lIns="0" tIns="0" rIns="0" bIns="0" rtlCol="0" anchor="ctr"/>
-          <a:lstStyle/>
-          <a:p>
-            <a:pPr marL="0" indent="0">
-              <a:buNone/>
-            </a:pPr>
-            <a:r>
-              <a:rPr lang="en-US" sz="950" b="1" dirty="0">
-                <a:solidFill>
-                  <a:srgbClr val="0F766E"/>
-                </a:solidFill>
-                <a:latin typeface="Consolas" pitchFamily="34" charset="0"/>
-                <a:ea typeface="Consolas" pitchFamily="34" charset="-122"/>
-                <a:cs typeface="Consolas" pitchFamily="34" charset="-120"/>
-              </a:rPr>
-              <a:t>간접 인젝션 흐름</a:t>
-            </a:r>
-            <a:endParaRPr lang="en-US" sz="950" dirty="0"/>
-          </a:p>
-        </p:txBody>
-      </p:sp>
-      <p:sp>
-        <p:nvSpPr>
-          <p:cNvPr id="16" name="Text 14"/>
-          <p:cNvSpPr/>
-          <p:nvPr/>
-        </p:nvSpPr>
-        <p:spPr>
-          <a:xfrm>
-            <a:off x="8823960" y="1389888"/>
-            <a:ext cx="2880360" cy="420624"/>
-          </a:xfrm>
-          <a:prstGeom prst="rect">
-            <a:avLst/>
-          </a:prstGeom>
-          <a:noFill/>
-          <a:ln/>
-        </p:spPr>
-        <p:txBody>
-          <a:bodyPr wrap="square" lIns="0" tIns="0" rIns="0" bIns="0" rtlCol="0" anchor="ctr"/>
-          <a:lstStyle/>
-          <a:p>
-            <a:pPr marL="0" indent="0">
-              <a:buNone/>
-            </a:pPr>
-            <a:endParaRPr lang="en-US" sz="950" dirty="0"/>
-          </a:p>
-        </p:txBody>
-      </p:sp>
-      <p:sp>
-        <p:nvSpPr>
-          <p:cNvPr id="17" name="Text 15"/>
-          <p:cNvSpPr/>
-          <p:nvPr/>
-        </p:nvSpPr>
-        <p:spPr>
-          <a:xfrm>
-            <a:off x="8823960" y="1865376"/>
-            <a:ext cx="2880360" cy="420624"/>
-          </a:xfrm>
-          <a:prstGeom prst="rect">
-            <a:avLst/>
-          </a:prstGeom>
-          <a:noFill/>
-          <a:ln/>
-        </p:spPr>
-        <p:txBody>
-          <a:bodyPr wrap="square" lIns="0" tIns="0" rIns="0" bIns="0" rtlCol="0" anchor="ctr"/>
-          <a:lstStyle/>
-          <a:p>
-            <a:pPr marL="0" indent="0">
-              <a:buNone/>
-            </a:pPr>
-            <a:r>
-              <a:rPr lang="en-US" sz="950" dirty="0">
-                <a:solidFill>
-                  <a:srgbClr val="E6EDF3"/>
-                </a:solidFill>
-                <a:latin typeface="Consolas" pitchFamily="34" charset="0"/>
-                <a:ea typeface="Consolas" pitchFamily="34" charset="-122"/>
-                <a:cs typeface="Consolas" pitchFamily="34" charset="-120"/>
-              </a:rPr>
-              <a:t>오염 문서 VectorDB 삽입</a:t>
-            </a:r>
-            <a:endParaRPr lang="en-US" sz="950" dirty="0"/>
-          </a:p>
-        </p:txBody>
-      </p:sp>
-      <p:sp>
-        <p:nvSpPr>
-          <p:cNvPr id="18" name="Text 16"/>
-          <p:cNvSpPr/>
-          <p:nvPr/>
-        </p:nvSpPr>
-        <p:spPr>
-          <a:xfrm>
-            <a:off x="8823960" y="2340864"/>
-            <a:ext cx="2880360" cy="420624"/>
-          </a:xfrm>
-          <a:prstGeom prst="rect">
-            <a:avLst/>
-          </a:prstGeom>
-          <a:noFill/>
-          <a:ln/>
-        </p:spPr>
-        <p:txBody>
-          <a:bodyPr wrap="square" lIns="0" tIns="0" rIns="0" bIns="0" rtlCol="0" anchor="ctr"/>
-          <a:lstStyle/>
-          <a:p>
-            <a:pPr marL="0" indent="0">
-              <a:buNone/>
-            </a:pPr>
-            <a:r>
-              <a:rPr lang="en-US" sz="950" dirty="0">
-                <a:solidFill>
-                  <a:srgbClr val="FFFFFF"/>
-                </a:solidFill>
-                <a:latin typeface="Consolas" pitchFamily="34" charset="0"/>
-                <a:ea typeface="Consolas" pitchFamily="34" charset="-122"/>
-                <a:cs typeface="Consolas" pitchFamily="34" charset="-120"/>
-              </a:rPr>
-              <a:t>  ↓ 검색</a:t>
-            </a:r>
-            <a:endParaRPr lang="en-US" sz="950" dirty="0"/>
-          </a:p>
-        </p:txBody>
-      </p:sp>
-      <p:sp>
-        <p:nvSpPr>
-          <p:cNvPr id="19" name="Text 17"/>
-          <p:cNvSpPr/>
-          <p:nvPr/>
-        </p:nvSpPr>
-        <p:spPr>
-          <a:xfrm>
-            <a:off x="8823960" y="2816352"/>
-            <a:ext cx="2880360" cy="420624"/>
-          </a:xfrm>
-          <a:prstGeom prst="rect">
-            <a:avLst/>
-          </a:prstGeom>
-          <a:noFill/>
-          <a:ln/>
-        </p:spPr>
-        <p:txBody>
-          <a:bodyPr wrap="square" lIns="0" tIns="0" rIns="0" bIns="0" rtlCol="0" anchor="ctr"/>
-          <a:lstStyle/>
-          <a:p>
-            <a:pPr marL="0" indent="0">
-              <a:buNone/>
-            </a:pPr>
-            <a:r>
-              <a:rPr lang="en-US" sz="950" dirty="0">
-                <a:solidFill>
-                  <a:srgbClr val="F59E0B"/>
-                </a:solidFill>
-                <a:latin typeface="Consolas" pitchFamily="34" charset="0"/>
-                <a:ea typeface="Consolas" pitchFamily="34" charset="-122"/>
-                <a:cs typeface="Consolas" pitchFamily="34" charset="-120"/>
-              </a:rPr>
-              <a:t>poisoned_doc 검색 결과 포함</a:t>
-            </a:r>
-            <a:endParaRPr lang="en-US" sz="950" dirty="0"/>
-          </a:p>
-        </p:txBody>
-      </p:sp>
-      <p:sp>
-        <p:nvSpPr>
-          <p:cNvPr id="20" name="Text 18"/>
-          <p:cNvSpPr/>
-          <p:nvPr/>
-        </p:nvSpPr>
-        <p:spPr>
-          <a:xfrm>
-            <a:off x="8823960" y="3291840"/>
-            <a:ext cx="2880360" cy="420624"/>
-          </a:xfrm>
-          <a:prstGeom prst="rect">
-            <a:avLst/>
-          </a:prstGeom>
-          <a:noFill/>
-          <a:ln/>
-        </p:spPr>
-        <p:txBody>
-          <a:bodyPr wrap="square" lIns="0" tIns="0" rIns="0" bIns="0" rtlCol="0" anchor="ctr"/>
-          <a:lstStyle/>
-          <a:p>
-            <a:pPr marL="0" indent="0">
-              <a:buNone/>
-            </a:pPr>
-            <a:r>
-              <a:rPr lang="en-US" sz="950" dirty="0">
-                <a:solidFill>
-                  <a:srgbClr val="FFFFFF"/>
-                </a:solidFill>
-                <a:latin typeface="Consolas" pitchFamily="34" charset="0"/>
-                <a:ea typeface="Consolas" pitchFamily="34" charset="-122"/>
-                <a:cs typeface="Consolas" pitchFamily="34" charset="-120"/>
-              </a:rPr>
-              <a:t>  ↓ RAG</a:t>
-            </a:r>
-            <a:endParaRPr lang="en-US" sz="950" dirty="0"/>
-          </a:p>
-        </p:txBody>
-      </p:sp>
-      <p:sp>
-        <p:nvSpPr>
-          <p:cNvPr id="21" name="Text 19"/>
-          <p:cNvSpPr/>
-          <p:nvPr/>
-        </p:nvSpPr>
-        <p:spPr>
-          <a:xfrm>
-            <a:off x="8823960" y="3767328"/>
-            <a:ext cx="2880360" cy="420624"/>
-          </a:xfrm>
-          <a:prstGeom prst="rect">
-            <a:avLst/>
-          </a:prstGeom>
-          <a:noFill/>
-          <a:ln/>
-        </p:spPr>
-        <p:txBody>
-          <a:bodyPr wrap="square" lIns="0" tIns="0" rIns="0" bIns="0" rtlCol="0" anchor="ctr"/>
-          <a:lstStyle/>
-          <a:p>
-            <a:pPr marL="0" indent="0">
-              <a:buNone/>
-            </a:pPr>
-            <a:r>
-              <a:rPr lang="en-US" sz="950" dirty="0">
-                <a:solidFill>
-                  <a:srgbClr val="DC2626"/>
-                </a:solidFill>
-                <a:latin typeface="Consolas" pitchFamily="34" charset="0"/>
-                <a:ea typeface="Consolas" pitchFamily="34" charset="-122"/>
-                <a:cs typeface="Consolas" pitchFamily="34" charset="-120"/>
-              </a:rPr>
-              <a:t>LLM 컨텍스트에 명령 포함</a:t>
-            </a:r>
-            <a:endParaRPr lang="en-US" sz="950" dirty="0"/>
-          </a:p>
-        </p:txBody>
-      </p:sp>
-      <p:sp>
-        <p:nvSpPr>
-          <p:cNvPr id="22" name="Text 20"/>
-          <p:cNvSpPr/>
-          <p:nvPr/>
-        </p:nvSpPr>
-        <p:spPr>
-          <a:xfrm>
-            <a:off x="8823960" y="4242816"/>
-            <a:ext cx="2880360" cy="420624"/>
-          </a:xfrm>
-          <a:prstGeom prst="rect">
-            <a:avLst/>
-          </a:prstGeom>
-          <a:noFill/>
-          <a:ln/>
-        </p:spPr>
-        <p:txBody>
-          <a:bodyPr wrap="square" lIns="0" tIns="0" rIns="0" bIns="0" rtlCol="0" anchor="ctr"/>
-          <a:lstStyle/>
-          <a:p>
-            <a:pPr marL="0" indent="0">
-              <a:buNone/>
-            </a:pPr>
-            <a:r>
-              <a:rPr lang="en-US" sz="950" dirty="0">
-                <a:solidFill>
-                  <a:srgbClr val="FFFFFF"/>
-                </a:solidFill>
-                <a:latin typeface="Consolas" pitchFamily="34" charset="0"/>
-                <a:ea typeface="Consolas" pitchFamily="34" charset="-122"/>
-                <a:cs typeface="Consolas" pitchFamily="34" charset="-120"/>
-              </a:rPr>
-              <a:t>  ↓</a:t>
-            </a:r>
-            <a:endParaRPr lang="en-US" sz="950" dirty="0"/>
-          </a:p>
-        </p:txBody>
-      </p:sp>
-      <p:sp>
-        <p:nvSpPr>
-          <p:cNvPr id="23" name="Text 21"/>
-          <p:cNvSpPr/>
-          <p:nvPr/>
-        </p:nvSpPr>
-        <p:spPr>
-          <a:xfrm>
-            <a:off x="8823960" y="4718304"/>
-            <a:ext cx="2880360" cy="420624"/>
-          </a:xfrm>
-          <a:prstGeom prst="rect">
-            <a:avLst/>
-          </a:prstGeom>
-          <a:noFill/>
-          <a:ln/>
-        </p:spPr>
-        <p:txBody>
-          <a:bodyPr wrap="square" lIns="0" tIns="0" rIns="0" bIns="0" rtlCol="0" anchor="ctr"/>
-          <a:lstStyle/>
-          <a:p>
-            <a:pPr marL="0" indent="0">
-              <a:buNone/>
-            </a:pPr>
-            <a:r>
-              <a:rPr lang="en-US" sz="950" dirty="0">
-                <a:solidFill>
-                  <a:srgbClr val="DC2626"/>
-                </a:solidFill>
-                <a:latin typeface="Consolas" pitchFamily="34" charset="0"/>
-                <a:ea typeface="Consolas" pitchFamily="34" charset="-122"/>
-                <a:cs typeface="Consolas" pitchFamily="34" charset="-120"/>
-              </a:rPr>
-              <a:t>공격자 지령 수행 ← LLM01!</a:t>
-            </a:r>
-            <a:endParaRPr lang="en-US" sz="950" dirty="0"/>
-          </a:p>
-        </p:txBody>
-      </p:sp>
-      <p:sp>
-        <p:nvSpPr>
-          <p:cNvPr id="24" name="Text 22"/>
-          <p:cNvSpPr/>
-          <p:nvPr/>
-        </p:nvSpPr>
-        <p:spPr>
-          <a:xfrm>
-            <a:off x="11064240" y="6510528"/>
-            <a:ext cx="914400" cy="274320"/>
-          </a:xfrm>
-          <a:prstGeom prst="rect">
-            <a:avLst/>
-          </a:prstGeom>
-          <a:noFill/>
-          <a:ln/>
-        </p:spPr>
-        <p:txBody>
-          <a:bodyPr wrap="square" lIns="0" tIns="0" rIns="0" bIns="0" rtlCol="0" anchor="ctr"/>
-          <a:lstStyle/>
-          <a:p>
-            <a:pPr marL="0" indent="0" algn="r">
-              <a:buNone/>
-            </a:pPr>
-            <a:r>
-              <a:rPr lang="en-US" sz="900" dirty="0">
-                <a:solidFill>
-                  <a:srgbClr val="94A3B8"/>
-                </a:solidFill>
-                <a:latin typeface="Arial" pitchFamily="34" charset="0"/>
-                <a:ea typeface="Arial" pitchFamily="34" charset="-122"/>
-                <a:cs typeface="Arial" pitchFamily="34" charset="-120"/>
-              </a:rPr>
-              <a:t>12 / 18</a:t>
             </a:r>
             <a:endParaRPr lang="en-US" sz="900" dirty="0"/>
           </a:p>
